--- a/marketing/calendario-novembro/Programacao_Instagram_Novembro_2026.pptx
+++ b/marketing/calendario-novembro/Programacao_Instagram_Novembro_2026.pptx
@@ -113,17 +113,17 @@
   <p:extLst>
     <p:ext uri="{521415D9-36F7-43E2-AB2F-B90AF26B5E84}">
       <p14:sectionLst xmlns:p14="http://schemas.microsoft.com/office/powerpoint/2010/main">
-        <p14:section name="Objetivo do mês" id="{8b65964b-2a9c-c2bc-7b5b-ec835702d3d2}">
+        <p14:section name="Objetivo do mês" id="{54f41b71-23c8-3068-480c-cd584d054edc}">
           <p14:sldIdLst>
             <p14:sldId id="256"/>
           </p14:sldIdLst>
         </p14:section>
-        <p14:section name="Calendário" id="{7817c789-43e9-0b62-abdf-29ebe2c3a9c5}">
+        <p14:section name="Calendário" id="{7c1b6edb-27ae-1204-d5d4-1d86a67f3aad}">
           <p14:sldIdLst>
             <p14:sldId id="257"/>
           </p14:sldIdLst>
         </p14:section>
-        <p14:section name="Detalhamento" id="{89e60167-f848-9b60-a717-bef9988b29e3}">
+        <p14:section name="Detalhamento" id="{1bb91ecb-a028-9a01-2901-b91ce6c42b3a}">
           <p14:sldIdLst>
             <p14:sldId id="258"/>
             <p14:sldId id="259"/>
@@ -536,7 +536,7 @@
           <a:p>
             <a:r>
               <a:rPr lang="en-US" dirty="0"/>
-              <a:t>Os blocos 1 e 2 (reconhecimento e relevância) foram em outubro. Novembro fecha a apresentação inicial (blocos 3 e 4) e abre a fase de atualidade e decisão (blocos 5 e 6), na janela de orçamento do RH.</a:t>
+              <a:t/>
             </a:r>
             <a:endParaRPr lang="en-US" dirty="0"/>
           </a:p>
@@ -1695,6 +1695,13 @@
 <file path=ppt/slides/slide1.xml><?xml version="1.0" encoding="utf-8"?>
 <p:sld xmlns:a="http://schemas.openxmlformats.org/drawingml/2006/main" xmlns:r="http://schemas.openxmlformats.org/officeDocument/2006/relationships" xmlns:p="http://schemas.openxmlformats.org/presentationml/2006/main">
   <p:cSld name="Slide 1">
+    <p:bg>
+      <p:bgPr>
+        <a:solidFill>
+          <a:schemeClr val="tx1"/>
+        </a:solidFill>
+      </p:bgPr>
+    </p:bg>
     <p:spTree>
       <p:nvGrpSpPr>
         <p:cNvPr id="1" name=""/>
@@ -1711,39 +1718,50 @@
       </p:grpSpPr>
       <p:sp>
         <p:nvSpPr>
-          <p:cNvPr id="2" name="coluna-3"/>
-          <p:cNvSpPr/>
-          <p:nvPr/>
-        </p:nvSpPr>
-        <p:spPr>
-          <a:xfrm>
-            <a:off x="0" y="0"/>
-            <a:ext cx="3047924" cy="6858000"/>
-          </a:xfrm>
-          <a:prstGeom prst="rect">
-            <a:avLst/>
-          </a:prstGeom>
-          <a:solidFill>
-            <a:schemeClr val="tx1"/>
-          </a:solidFill>
-          <a:ln w="12700">
-            <a:solidFill>
-              <a:schemeClr val="tx1"/>
-            </a:solidFill>
-            <a:prstDash val="solid"/>
-          </a:ln>
-        </p:spPr>
-      </p:sp>
-      <p:sp>
-        <p:nvSpPr>
-          <p:cNvPr id="3" name="numero-3"/>
-          <p:cNvSpPr txBox="1"/>
-          <p:nvPr/>
-        </p:nvSpPr>
-        <p:spPr>
-          <a:xfrm>
-            <a:off x="411480" y="3017520"/>
-            <a:ext cx="1371600" cy="1143000"/>
+          <p:cNvPr id="2" name="Text 0"/>
+          <p:cNvSpPr txBox="1"/>
+          <p:nvPr/>
+        </p:nvSpPr>
+        <p:spPr>
+          <a:xfrm>
+            <a:off x="822960" y="685800"/>
+            <a:ext cx="7315200" cy="320040"/>
+          </a:xfrm>
+          <a:prstGeom prst="rect">
+            <a:avLst/>
+          </a:prstGeom>
+          <a:noFill/>
+          <a:ln/>
+        </p:spPr>
+        <p:txBody>
+          <a:bodyPr wrap="square" lIns="0" tIns="0" rIns="0" bIns="0" rtlCol="0" anchor="ctr"/>
+          <a:lstStyle/>
+          <a:p>
+            <a:pPr indent="0" marL="0">
+              <a:buNone/>
+            </a:pPr>
+            <a:r>
+              <a:rPr lang="en-US" sz="1200" b="1" spc="300" kern="0" dirty="0">
+                <a:solidFill>
+                  <a:schemeClr val="accent2"/>
+                </a:solidFill>
+              </a:rPr>
+              <a:t>PROGRAMAÇÃO DO INSTAGRAM  ·  01/11 A 30/11</a:t>
+            </a:r>
+            <a:endParaRPr lang="en-US" sz="1200" dirty="0"/>
+          </a:p>
+        </p:txBody>
+      </p:sp>
+      <p:sp>
+        <p:nvSpPr>
+          <p:cNvPr id="3" name="titulo-mes"/>
+          <p:cNvSpPr txBox="1"/>
+          <p:nvPr/>
+        </p:nvSpPr>
+        <p:spPr>
+          <a:xfrm>
+            <a:off x="822960" y="1828800"/>
+            <a:ext cx="10058400" cy="2103120"/>
           </a:xfrm>
           <a:prstGeom prst="rect">
             <a:avLst/>
@@ -1759,969 +1777,111 @@
               <a:buNone/>
             </a:pPr>
             <a:r>
-              <a:rPr lang="en-US" sz="8800" dirty="0">
+              <a:rPr lang="en-US" sz="6600" dirty="0">
                 <a:solidFill>
                   <a:schemeClr val="bg1"/>
                 </a:solidFill>
-                <a:latin typeface="Calibri Light" pitchFamily="34" charset="0"/>
-                <a:ea typeface="Calibri Light" pitchFamily="34" charset="-122"/>
-                <a:cs typeface="Calibri Light" pitchFamily="34" charset="-120"/>
-              </a:rPr>
-              <a:t>3</a:t>
-            </a:r>
-            <a:endParaRPr lang="en-US" sz="8800" dirty="0"/>
-          </a:p>
-        </p:txBody>
-      </p:sp>
-      <p:sp>
-        <p:nvSpPr>
-          <p:cNvPr id="4" name="Text 2"/>
-          <p:cNvSpPr txBox="1"/>
-          <p:nvPr/>
-        </p:nvSpPr>
-        <p:spPr>
-          <a:xfrm>
-            <a:off x="411480" y="4251960"/>
-            <a:ext cx="2224964" cy="411480"/>
-          </a:xfrm>
-          <a:prstGeom prst="rect">
-            <a:avLst/>
-          </a:prstGeom>
-          <a:noFill/>
-          <a:ln/>
-        </p:spPr>
-        <p:txBody>
-          <a:bodyPr wrap="square" lIns="0" tIns="0" rIns="0" bIns="0" rtlCol="0" anchor="ctr"/>
-          <a:lstStyle/>
-          <a:p>
-            <a:pPr indent="0" marL="0">
-              <a:buNone/>
-            </a:pPr>
-            <a:r>
-              <a:rPr lang="en-US" sz="2400" dirty="0">
+              </a:rPr>
+              <a:t>Programação de posts</a:t>
+            </a:r>
+            <a:endParaRPr lang="en-US" sz="6600" dirty="0"/>
+          </a:p>
+          <a:p>
+            <a:pPr indent="0" marL="0">
+              <a:buNone/>
+            </a:pPr>
+            <a:r>
+              <a:rPr lang="en-US" sz="6600" dirty="0">
+                <a:solidFill>
+                  <a:schemeClr val="accent1"/>
+                </a:solidFill>
+              </a:rPr>
+              <a:t>novembro</a:t>
+            </a:r>
+            <a:endParaRPr lang="en-US" sz="6600" dirty="0"/>
+          </a:p>
+        </p:txBody>
+      </p:sp>
+      <p:sp>
+        <p:nvSpPr>
+          <p:cNvPr id="4" name="objetivo"/>
+          <p:cNvSpPr txBox="1"/>
+          <p:nvPr/>
+        </p:nvSpPr>
+        <p:spPr>
+          <a:xfrm>
+            <a:off x="822960" y="4160520"/>
+            <a:ext cx="7863840" cy="1828800"/>
+          </a:xfrm>
+          <a:prstGeom prst="rect">
+            <a:avLst/>
+          </a:prstGeom>
+          <a:noFill/>
+          <a:ln/>
+        </p:spPr>
+        <p:txBody>
+          <a:bodyPr wrap="square" lIns="0" tIns="0" rIns="0" bIns="0" rtlCol="0" anchor="t"/>
+          <a:lstStyle/>
+          <a:p>
+            <a:pPr indent="0" marL="0">
+              <a:spcAft>
+                <a:spcPts val="600"/>
+              </a:spcAft>
+              <a:buNone/>
+            </a:pPr>
+            <a:r>
+              <a:rPr lang="en-US" sz="1600" b="1" dirty="0">
                 <a:solidFill>
                   <a:schemeClr val="bg1"/>
                 </a:solidFill>
               </a:rPr>
-              <a:t>Compreensão</a:t>
-            </a:r>
-            <a:endParaRPr lang="en-US" sz="2400" dirty="0"/>
-          </a:p>
-        </p:txBody>
-      </p:sp>
-      <p:sp>
-        <p:nvSpPr>
-          <p:cNvPr id="5" name="Text 3"/>
-          <p:cNvSpPr txBox="1"/>
-          <p:nvPr/>
-        </p:nvSpPr>
-        <p:spPr>
-          <a:xfrm>
-            <a:off x="411480" y="4709160"/>
-            <a:ext cx="2224964" cy="777240"/>
-          </a:xfrm>
-          <a:prstGeom prst="rect">
-            <a:avLst/>
-          </a:prstGeom>
-          <a:noFill/>
-          <a:ln/>
-        </p:spPr>
-        <p:txBody>
-          <a:bodyPr wrap="square" lIns="0" tIns="0" rIns="0" bIns="0" rtlCol="0" anchor="t"/>
-          <a:lstStyle/>
-          <a:p>
-            <a:pPr indent="0" marL="0">
-              <a:buNone/>
-            </a:pPr>
-            <a:r>
-              <a:rPr lang="en-US" sz="1500" b="1" dirty="0">
-                <a:solidFill>
-                  <a:schemeClr val="bg1"/>
-                </a:solidFill>
-              </a:rPr>
-              <a:t>Como a FairHealth transforma isso em cuidado real?</a:t>
-            </a:r>
-            <a:endParaRPr lang="en-US" sz="1500" dirty="0"/>
-          </a:p>
-        </p:txBody>
-      </p:sp>
-      <p:sp>
-        <p:nvSpPr>
-          <p:cNvPr id="6" name="Text 4"/>
-          <p:cNvSpPr txBox="1"/>
-          <p:nvPr/>
-        </p:nvSpPr>
-        <p:spPr>
-          <a:xfrm>
-            <a:off x="411480" y="5532120"/>
-            <a:ext cx="2224964" cy="566928"/>
-          </a:xfrm>
-          <a:prstGeom prst="rect">
-            <a:avLst/>
-          </a:prstGeom>
-          <a:noFill/>
-          <a:ln/>
-        </p:spPr>
-        <p:txBody>
-          <a:bodyPr wrap="square" lIns="0" tIns="0" rIns="0" bIns="0" rtlCol="0" anchor="t"/>
-          <a:lstStyle/>
-          <a:p>
-            <a:pPr indent="0" marL="0">
-              <a:buNone/>
-            </a:pPr>
-            <a:r>
-              <a:rPr lang="en-US" sz="1300" dirty="0">
-                <a:solidFill>
-                  <a:schemeClr val="bg1"/>
-                </a:solidFill>
-              </a:rPr>
-              <a:t>Mostrar o cuidado na prática, pela experiência de quem é atendido.</a:t>
-            </a:r>
-            <a:endParaRPr lang="en-US" sz="1300" dirty="0"/>
-          </a:p>
-        </p:txBody>
-      </p:sp>
-      <p:sp>
-        <p:nvSpPr>
-          <p:cNvPr id="7" name="Text 5"/>
-          <p:cNvSpPr txBox="1"/>
-          <p:nvPr/>
-        </p:nvSpPr>
-        <p:spPr>
-          <a:xfrm>
-            <a:off x="411480" y="6172200"/>
-            <a:ext cx="2224964" cy="274320"/>
-          </a:xfrm>
-          <a:prstGeom prst="rect">
-            <a:avLst/>
-          </a:prstGeom>
-          <a:noFill/>
-          <a:ln/>
-        </p:spPr>
-        <p:txBody>
-          <a:bodyPr wrap="square" lIns="0" tIns="0" rIns="0" bIns="0" rtlCol="0" anchor="ctr"/>
-          <a:lstStyle/>
-          <a:p>
-            <a:pPr indent="0" marL="0">
-              <a:buNone/>
-            </a:pPr>
-            <a:r>
-              <a:rPr lang="en-US" sz="1200" b="1" spc="100" kern="0" dirty="0">
-                <a:solidFill>
-                  <a:schemeClr val="bg1"/>
-                </a:solidFill>
-              </a:rPr>
-              <a:t>2 posts · 03 e 04/11</a:t>
-            </a:r>
-            <a:endParaRPr lang="en-US" sz="1200" dirty="0"/>
-          </a:p>
-        </p:txBody>
-      </p:sp>
-      <p:sp>
-        <p:nvSpPr>
-          <p:cNvPr id="8" name="coluna-4"/>
-          <p:cNvSpPr/>
-          <p:nvPr/>
-        </p:nvSpPr>
-        <p:spPr>
-          <a:xfrm>
-            <a:off x="3047924" y="0"/>
-            <a:ext cx="3047924" cy="6858000"/>
-          </a:xfrm>
-          <a:prstGeom prst="rect">
-            <a:avLst/>
-          </a:prstGeom>
-          <a:solidFill>
-            <a:schemeClr val="accent2"/>
-          </a:solidFill>
-          <a:ln w="12700">
-            <a:solidFill>
-              <a:schemeClr val="accent2"/>
-            </a:solidFill>
-            <a:prstDash val="solid"/>
-          </a:ln>
-        </p:spPr>
-      </p:sp>
-      <p:sp>
-        <p:nvSpPr>
-          <p:cNvPr id="9" name="numero-4"/>
-          <p:cNvSpPr txBox="1"/>
-          <p:nvPr/>
-        </p:nvSpPr>
-        <p:spPr>
-          <a:xfrm>
-            <a:off x="3459404" y="685800"/>
-            <a:ext cx="1371600" cy="1143000"/>
-          </a:xfrm>
-          <a:prstGeom prst="rect">
-            <a:avLst/>
-          </a:prstGeom>
-          <a:noFill/>
-          <a:ln/>
-        </p:spPr>
-        <p:txBody>
-          <a:bodyPr wrap="square" lIns="0" tIns="0" rIns="0" bIns="0" rtlCol="0" anchor="t"/>
-          <a:lstStyle/>
-          <a:p>
-            <a:pPr indent="0" marL="0">
-              <a:buNone/>
-            </a:pPr>
-            <a:r>
-              <a:rPr lang="en-US" sz="8800" dirty="0">
-                <a:solidFill>
-                  <a:schemeClr val="tx1"/>
-                </a:solidFill>
-                <a:latin typeface="Calibri Light" pitchFamily="34" charset="0"/>
-                <a:ea typeface="Calibri Light" pitchFamily="34" charset="-122"/>
-                <a:cs typeface="Calibri Light" pitchFamily="34" charset="-120"/>
-              </a:rPr>
-              <a:t>4</a:t>
-            </a:r>
-            <a:endParaRPr lang="en-US" sz="8800" dirty="0"/>
-          </a:p>
-        </p:txBody>
-      </p:sp>
-      <p:sp>
-        <p:nvSpPr>
-          <p:cNvPr id="10" name="Text 8"/>
-          <p:cNvSpPr txBox="1"/>
-          <p:nvPr/>
-        </p:nvSpPr>
-        <p:spPr>
-          <a:xfrm>
-            <a:off x="3459404" y="1920240"/>
-            <a:ext cx="2224964" cy="411480"/>
-          </a:xfrm>
-          <a:prstGeom prst="rect">
-            <a:avLst/>
-          </a:prstGeom>
-          <a:noFill/>
-          <a:ln/>
-        </p:spPr>
-        <p:txBody>
-          <a:bodyPr wrap="square" lIns="0" tIns="0" rIns="0" bIns="0" rtlCol="0" anchor="ctr"/>
-          <a:lstStyle/>
-          <a:p>
-            <a:pPr indent="0" marL="0">
-              <a:buNone/>
-            </a:pPr>
-            <a:r>
-              <a:rPr lang="en-US" sz="2400" dirty="0">
-                <a:solidFill>
-                  <a:schemeClr val="tx1"/>
-                </a:solidFill>
-              </a:rPr>
-              <a:t>Confiança</a:t>
-            </a:r>
-            <a:endParaRPr lang="en-US" sz="2400" dirty="0"/>
-          </a:p>
-        </p:txBody>
-      </p:sp>
-      <p:sp>
-        <p:nvSpPr>
-          <p:cNvPr id="11" name="Text 9"/>
-          <p:cNvSpPr txBox="1"/>
-          <p:nvPr/>
-        </p:nvSpPr>
-        <p:spPr>
-          <a:xfrm>
-            <a:off x="3459404" y="2377440"/>
-            <a:ext cx="2224964" cy="777240"/>
-          </a:xfrm>
-          <a:prstGeom prst="rect">
-            <a:avLst/>
-          </a:prstGeom>
-          <a:noFill/>
-          <a:ln/>
-        </p:spPr>
-        <p:txBody>
-          <a:bodyPr wrap="square" lIns="0" tIns="0" rIns="0" bIns="0" rtlCol="0" anchor="t"/>
-          <a:lstStyle/>
-          <a:p>
-            <a:pPr indent="0" marL="0">
-              <a:buNone/>
-            </a:pPr>
-            <a:r>
-              <a:rPr lang="en-US" sz="1500" b="1" dirty="0">
-                <a:solidFill>
-                  <a:schemeClr val="tx1"/>
-                </a:solidFill>
-              </a:rPr>
-              <a:t>Por que acreditar na metodologia e na empresa?</a:t>
-            </a:r>
-            <a:endParaRPr lang="en-US" sz="1500" dirty="0"/>
-          </a:p>
-        </p:txBody>
-      </p:sp>
-      <p:sp>
-        <p:nvSpPr>
-          <p:cNvPr id="12" name="Text 10"/>
-          <p:cNvSpPr txBox="1"/>
-          <p:nvPr/>
-        </p:nvSpPr>
-        <p:spPr>
-          <a:xfrm>
-            <a:off x="3459404" y="3200400"/>
-            <a:ext cx="2224964" cy="566928"/>
-          </a:xfrm>
-          <a:prstGeom prst="rect">
-            <a:avLst/>
-          </a:prstGeom>
-          <a:noFill/>
-          <a:ln/>
-        </p:spPr>
-        <p:txBody>
-          <a:bodyPr wrap="square" lIns="0" tIns="0" rIns="0" bIns="0" rtlCol="0" anchor="t"/>
-          <a:lstStyle/>
-          <a:p>
-            <a:pPr indent="0" marL="0">
-              <a:buNone/>
-            </a:pPr>
-            <a:r>
-              <a:rPr lang="en-US" sz="1300" dirty="0">
-                <a:solidFill>
-                  <a:schemeClr val="tx1"/>
-                </a:solidFill>
-              </a:rPr>
-              <a:t>Dar provas e abrir um caminho claro para o RH.</a:t>
-            </a:r>
-            <a:endParaRPr lang="en-US" sz="1300" dirty="0"/>
-          </a:p>
-        </p:txBody>
-      </p:sp>
-      <p:sp>
-        <p:nvSpPr>
-          <p:cNvPr id="13" name="Text 11"/>
-          <p:cNvSpPr txBox="1"/>
-          <p:nvPr/>
-        </p:nvSpPr>
-        <p:spPr>
-          <a:xfrm>
-            <a:off x="3459404" y="3840480"/>
-            <a:ext cx="2224964" cy="274320"/>
-          </a:xfrm>
-          <a:prstGeom prst="rect">
-            <a:avLst/>
-          </a:prstGeom>
-          <a:noFill/>
-          <a:ln/>
-        </p:spPr>
-        <p:txBody>
-          <a:bodyPr wrap="square" lIns="0" tIns="0" rIns="0" bIns="0" rtlCol="0" anchor="ctr"/>
-          <a:lstStyle/>
-          <a:p>
-            <a:pPr indent="0" marL="0">
-              <a:buNone/>
-            </a:pPr>
-            <a:r>
-              <a:rPr lang="en-US" sz="1200" b="1" spc="100" kern="0" dirty="0">
-                <a:solidFill>
-                  <a:schemeClr val="tx1"/>
-                </a:solidFill>
-              </a:rPr>
-              <a:t>4 posts · 06 a 13/11</a:t>
-            </a:r>
-            <a:endParaRPr lang="en-US" sz="1200" dirty="0"/>
-          </a:p>
-        </p:txBody>
-      </p:sp>
-      <p:sp>
-        <p:nvSpPr>
-          <p:cNvPr id="14" name="seta-4"/>
-          <p:cNvSpPr/>
-          <p:nvPr/>
-        </p:nvSpPr>
-        <p:spPr>
-          <a:xfrm rot="5400000">
-            <a:off x="2993060" y="1069848"/>
-            <a:ext cx="237744" cy="164592"/>
-          </a:xfrm>
-          <a:prstGeom prst="triangle">
-            <a:avLst/>
-          </a:prstGeom>
-          <a:solidFill>
-            <a:schemeClr val="tx1"/>
-          </a:solidFill>
-          <a:ln w="12700">
-            <a:solidFill>
-              <a:schemeClr val="tx1"/>
-            </a:solidFill>
-            <a:prstDash val="solid"/>
-          </a:ln>
-        </p:spPr>
-      </p:sp>
-      <p:sp>
-        <p:nvSpPr>
-          <p:cNvPr id="15" name="coluna-5"/>
-          <p:cNvSpPr/>
-          <p:nvPr/>
-        </p:nvSpPr>
-        <p:spPr>
-          <a:xfrm>
-            <a:off x="6095848" y="0"/>
-            <a:ext cx="3047924" cy="6858000"/>
-          </a:xfrm>
-          <a:prstGeom prst="rect">
-            <a:avLst/>
-          </a:prstGeom>
-          <a:solidFill>
-            <a:schemeClr val="bg2"/>
-          </a:solidFill>
-          <a:ln w="12700">
-            <a:solidFill>
-              <a:schemeClr val="bg2"/>
-            </a:solidFill>
-            <a:prstDash val="solid"/>
-          </a:ln>
-        </p:spPr>
-      </p:sp>
-      <p:sp>
-        <p:nvSpPr>
-          <p:cNvPr id="16" name="numero-5"/>
-          <p:cNvSpPr txBox="1"/>
-          <p:nvPr/>
-        </p:nvSpPr>
-        <p:spPr>
-          <a:xfrm>
-            <a:off x="6507328" y="2514600"/>
-            <a:ext cx="1371600" cy="1143000"/>
-          </a:xfrm>
-          <a:prstGeom prst="rect">
-            <a:avLst/>
-          </a:prstGeom>
-          <a:noFill/>
-          <a:ln/>
-        </p:spPr>
-        <p:txBody>
-          <a:bodyPr wrap="square" lIns="0" tIns="0" rIns="0" bIns="0" rtlCol="0" anchor="t"/>
-          <a:lstStyle/>
-          <a:p>
-            <a:pPr indent="0" marL="0">
-              <a:buNone/>
-            </a:pPr>
-            <a:r>
-              <a:rPr lang="en-US" sz="8800" dirty="0">
-                <a:solidFill>
-                  <a:schemeClr val="tx2"/>
-                </a:solidFill>
-                <a:latin typeface="Calibri Light" pitchFamily="34" charset="0"/>
-                <a:ea typeface="Calibri Light" pitchFamily="34" charset="-122"/>
-                <a:cs typeface="Calibri Light" pitchFamily="34" charset="-120"/>
-              </a:rPr>
-              <a:t>5</a:t>
-            </a:r>
-            <a:endParaRPr lang="en-US" sz="8800" dirty="0"/>
-          </a:p>
-        </p:txBody>
-      </p:sp>
-      <p:sp>
-        <p:nvSpPr>
-          <p:cNvPr id="17" name="Text 15"/>
-          <p:cNvSpPr txBox="1"/>
-          <p:nvPr/>
-        </p:nvSpPr>
-        <p:spPr>
-          <a:xfrm>
-            <a:off x="6507328" y="3749040"/>
-            <a:ext cx="2224964" cy="411480"/>
-          </a:xfrm>
-          <a:prstGeom prst="rect">
-            <a:avLst/>
-          </a:prstGeom>
-          <a:noFill/>
-          <a:ln/>
-        </p:spPr>
-        <p:txBody>
-          <a:bodyPr wrap="square" lIns="0" tIns="0" rIns="0" bIns="0" rtlCol="0" anchor="ctr"/>
-          <a:lstStyle/>
-          <a:p>
-            <a:pPr indent="0" marL="0">
-              <a:buNone/>
-            </a:pPr>
-            <a:r>
-              <a:rPr lang="en-US" sz="2400" dirty="0">
-                <a:solidFill>
-                  <a:schemeClr val="tx1"/>
-                </a:solidFill>
-              </a:rPr>
-              <a:t>Atualidade</a:t>
-            </a:r>
-            <a:endParaRPr lang="en-US" sz="2400" dirty="0"/>
-          </a:p>
-        </p:txBody>
-      </p:sp>
-      <p:sp>
-        <p:nvSpPr>
-          <p:cNvPr id="18" name="Text 16"/>
-          <p:cNvSpPr txBox="1"/>
-          <p:nvPr/>
-        </p:nvSpPr>
-        <p:spPr>
-          <a:xfrm>
-            <a:off x="6507328" y="4206240"/>
-            <a:ext cx="2224964" cy="777240"/>
-          </a:xfrm>
-          <a:prstGeom prst="rect">
-            <a:avLst/>
-          </a:prstGeom>
-          <a:noFill/>
-          <a:ln/>
-        </p:spPr>
-        <p:txBody>
-          <a:bodyPr wrap="square" lIns="0" tIns="0" rIns="0" bIns="0" rtlCol="0" anchor="t"/>
-          <a:lstStyle/>
-          <a:p>
-            <a:pPr indent="0" marL="0">
-              <a:buNone/>
-            </a:pPr>
-            <a:r>
-              <a:rPr lang="en-US" sz="1500" b="1" dirty="0">
-                <a:solidFill>
-                  <a:schemeClr val="tx1"/>
-                </a:solidFill>
-              </a:rPr>
-              <a:t>Por que isso importa agora?</a:t>
-            </a:r>
-            <a:endParaRPr lang="en-US" sz="1500" dirty="0"/>
-          </a:p>
-        </p:txBody>
-      </p:sp>
-      <p:sp>
-        <p:nvSpPr>
-          <p:cNvPr id="19" name="Text 17"/>
-          <p:cNvSpPr txBox="1"/>
-          <p:nvPr/>
-        </p:nvSpPr>
-        <p:spPr>
-          <a:xfrm>
-            <a:off x="6507328" y="5029200"/>
-            <a:ext cx="2224964" cy="566928"/>
-          </a:xfrm>
-          <a:prstGeom prst="rect">
-            <a:avLst/>
-          </a:prstGeom>
-          <a:noFill/>
-          <a:ln/>
-        </p:spPr>
-        <p:txBody>
-          <a:bodyPr wrap="square" lIns="0" tIns="0" rIns="0" bIns="0" rtlCol="0" anchor="t"/>
-          <a:lstStyle/>
-          <a:p>
-            <a:pPr indent="0" marL="0">
-              <a:buNone/>
-            </a:pPr>
-            <a:r>
-              <a:rPr lang="en-US" sz="1300" dirty="0">
-                <a:solidFill>
-                  <a:schemeClr val="tx1"/>
-                </a:solidFill>
-              </a:rPr>
-              <a:t>Ler o momento das empresas: temas em alta que levam ao Escritório do Cuidado.</a:t>
-            </a:r>
-            <a:endParaRPr lang="en-US" sz="1300" dirty="0"/>
-          </a:p>
-        </p:txBody>
-      </p:sp>
-      <p:sp>
-        <p:nvSpPr>
-          <p:cNvPr id="20" name="Text 18"/>
-          <p:cNvSpPr txBox="1"/>
-          <p:nvPr/>
-        </p:nvSpPr>
-        <p:spPr>
-          <a:xfrm>
-            <a:off x="6507328" y="5669280"/>
-            <a:ext cx="2224964" cy="274320"/>
-          </a:xfrm>
-          <a:prstGeom prst="rect">
-            <a:avLst/>
-          </a:prstGeom>
-          <a:noFill/>
-          <a:ln/>
-        </p:spPr>
-        <p:txBody>
-          <a:bodyPr wrap="square" lIns="0" tIns="0" rIns="0" bIns="0" rtlCol="0" anchor="ctr"/>
-          <a:lstStyle/>
-          <a:p>
-            <a:pPr indent="0" marL="0">
-              <a:buNone/>
-            </a:pPr>
-            <a:r>
-              <a:rPr lang="en-US" sz="1200" b="1" spc="100" kern="0" dirty="0">
-                <a:solidFill>
-                  <a:schemeClr val="tx1"/>
-                </a:solidFill>
-              </a:rPr>
-              <a:t>5 posts · 16 a 25/11</a:t>
-            </a:r>
-            <a:endParaRPr lang="en-US" sz="1200" dirty="0"/>
-          </a:p>
-        </p:txBody>
-      </p:sp>
-      <p:sp>
-        <p:nvSpPr>
-          <p:cNvPr id="21" name="seta-5"/>
-          <p:cNvSpPr/>
-          <p:nvPr/>
-        </p:nvSpPr>
-        <p:spPr>
-          <a:xfrm rot="5400000">
-            <a:off x="6040984" y="2898648"/>
-            <a:ext cx="237744" cy="164592"/>
-          </a:xfrm>
-          <a:prstGeom prst="triangle">
-            <a:avLst/>
-          </a:prstGeom>
-          <a:solidFill>
-            <a:schemeClr val="accent2"/>
-          </a:solidFill>
-          <a:ln w="12700">
-            <a:solidFill>
-              <a:schemeClr val="accent2"/>
-            </a:solidFill>
-            <a:prstDash val="solid"/>
-          </a:ln>
-        </p:spPr>
-      </p:sp>
-      <p:sp>
-        <p:nvSpPr>
-          <p:cNvPr id="22" name="coluna-6"/>
-          <p:cNvSpPr/>
-          <p:nvPr/>
-        </p:nvSpPr>
-        <p:spPr>
-          <a:xfrm>
-            <a:off x="9143771" y="0"/>
-            <a:ext cx="3047924" cy="6858000"/>
-          </a:xfrm>
-          <a:prstGeom prst="rect">
-            <a:avLst/>
-          </a:prstGeom>
-          <a:solidFill>
-            <a:schemeClr val="accent1"/>
-          </a:solidFill>
-          <a:ln w="12700">
-            <a:solidFill>
-              <a:schemeClr val="accent1"/>
-            </a:solidFill>
-            <a:prstDash val="solid"/>
-          </a:ln>
-        </p:spPr>
-      </p:sp>
-      <p:sp>
-        <p:nvSpPr>
-          <p:cNvPr id="23" name="numero-6"/>
-          <p:cNvSpPr txBox="1"/>
-          <p:nvPr/>
-        </p:nvSpPr>
-        <p:spPr>
-          <a:xfrm>
-            <a:off x="9555251" y="1508760"/>
-            <a:ext cx="1371600" cy="1143000"/>
-          </a:xfrm>
-          <a:prstGeom prst="rect">
-            <a:avLst/>
-          </a:prstGeom>
-          <a:noFill/>
-          <a:ln/>
-        </p:spPr>
-        <p:txBody>
-          <a:bodyPr wrap="square" lIns="0" tIns="0" rIns="0" bIns="0" rtlCol="0" anchor="t"/>
-          <a:lstStyle/>
-          <a:p>
-            <a:pPr indent="0" marL="0">
-              <a:buNone/>
-            </a:pPr>
-            <a:r>
-              <a:rPr lang="en-US" sz="8800" dirty="0">
-                <a:solidFill>
-                  <a:schemeClr val="tx1"/>
-                </a:solidFill>
-                <a:latin typeface="Calibri Light" pitchFamily="34" charset="0"/>
-                <a:ea typeface="Calibri Light" pitchFamily="34" charset="-122"/>
-                <a:cs typeface="Calibri Light" pitchFamily="34" charset="-120"/>
-              </a:rPr>
-              <a:t>6</a:t>
-            </a:r>
-            <a:endParaRPr lang="en-US" sz="8800" dirty="0"/>
-          </a:p>
-        </p:txBody>
-      </p:sp>
-      <p:sp>
-        <p:nvSpPr>
-          <p:cNvPr id="24" name="Text 22"/>
-          <p:cNvSpPr txBox="1"/>
-          <p:nvPr/>
-        </p:nvSpPr>
-        <p:spPr>
-          <a:xfrm>
-            <a:off x="9555251" y="2743200"/>
-            <a:ext cx="2224964" cy="411480"/>
-          </a:xfrm>
-          <a:prstGeom prst="rect">
-            <a:avLst/>
-          </a:prstGeom>
-          <a:noFill/>
-          <a:ln/>
-        </p:spPr>
-        <p:txBody>
-          <a:bodyPr wrap="square" lIns="0" tIns="0" rIns="0" bIns="0" rtlCol="0" anchor="ctr"/>
-          <a:lstStyle/>
-          <a:p>
-            <a:pPr indent="0" marL="0">
-              <a:buNone/>
-            </a:pPr>
-            <a:r>
-              <a:rPr lang="en-US" sz="2400" dirty="0">
-                <a:solidFill>
-                  <a:schemeClr val="tx1"/>
-                </a:solidFill>
-              </a:rPr>
-              <a:t>Decisão</a:t>
-            </a:r>
-            <a:endParaRPr lang="en-US" sz="2400" dirty="0"/>
-          </a:p>
-        </p:txBody>
-      </p:sp>
-      <p:sp>
-        <p:nvSpPr>
-          <p:cNvPr id="25" name="Text 23"/>
-          <p:cNvSpPr txBox="1"/>
-          <p:nvPr/>
-        </p:nvSpPr>
-        <p:spPr>
-          <a:xfrm>
-            <a:off x="9555251" y="3200400"/>
-            <a:ext cx="2224964" cy="777240"/>
-          </a:xfrm>
-          <a:prstGeom prst="rect">
-            <a:avLst/>
-          </a:prstGeom>
-          <a:noFill/>
-          <a:ln/>
-        </p:spPr>
-        <p:txBody>
-          <a:bodyPr wrap="square" lIns="0" tIns="0" rIns="0" bIns="0" rtlCol="0" anchor="t"/>
-          <a:lstStyle/>
-          <a:p>
-            <a:pPr indent="0" marL="0">
-              <a:buNone/>
-            </a:pPr>
-            <a:r>
-              <a:rPr lang="en-US" sz="1500" b="1" dirty="0">
-                <a:solidFill>
-                  <a:schemeClr val="tx1"/>
-                </a:solidFill>
-              </a:rPr>
-              <a:t>Por que começar agora?</a:t>
-            </a:r>
-            <a:endParaRPr lang="en-US" sz="1500" dirty="0"/>
-          </a:p>
-        </p:txBody>
-      </p:sp>
-      <p:sp>
-        <p:nvSpPr>
-          <p:cNvPr id="26" name="Text 24"/>
-          <p:cNvSpPr txBox="1"/>
-          <p:nvPr/>
-        </p:nvSpPr>
-        <p:spPr>
-          <a:xfrm>
-            <a:off x="9555251" y="4023360"/>
-            <a:ext cx="2224964" cy="566928"/>
-          </a:xfrm>
-          <a:prstGeom prst="rect">
-            <a:avLst/>
-          </a:prstGeom>
-          <a:noFill/>
-          <a:ln/>
-        </p:spPr>
-        <p:txBody>
-          <a:bodyPr wrap="square" lIns="0" tIns="0" rIns="0" bIns="0" rtlCol="0" anchor="t"/>
-          <a:lstStyle/>
-          <a:p>
-            <a:pPr indent="0" marL="0">
-              <a:buNone/>
-            </a:pPr>
-            <a:r>
-              <a:rPr lang="en-US" sz="1300" dirty="0">
-                <a:solidFill>
-                  <a:schemeClr val="tx1"/>
-                </a:solidFill>
-              </a:rPr>
-              <a:t>Provar adesão e convidar o RH a planejar 2027 com cuidado.</a:t>
-            </a:r>
-            <a:endParaRPr lang="en-US" sz="1300" dirty="0"/>
-          </a:p>
-        </p:txBody>
-      </p:sp>
-      <p:sp>
-        <p:nvSpPr>
-          <p:cNvPr id="27" name="Text 25"/>
-          <p:cNvSpPr txBox="1"/>
-          <p:nvPr/>
-        </p:nvSpPr>
-        <p:spPr>
-          <a:xfrm>
-            <a:off x="9555251" y="4663440"/>
-            <a:ext cx="2224964" cy="274320"/>
-          </a:xfrm>
-          <a:prstGeom prst="rect">
-            <a:avLst/>
-          </a:prstGeom>
-          <a:noFill/>
-          <a:ln/>
-        </p:spPr>
-        <p:txBody>
-          <a:bodyPr wrap="square" lIns="0" tIns="0" rIns="0" bIns="0" rtlCol="0" anchor="ctr"/>
-          <a:lstStyle/>
-          <a:p>
-            <a:pPr indent="0" marL="0">
-              <a:buNone/>
-            </a:pPr>
-            <a:r>
-              <a:rPr lang="en-US" sz="1200" b="1" spc="100" kern="0" dirty="0">
-                <a:solidFill>
-                  <a:schemeClr val="tx1"/>
-                </a:solidFill>
-              </a:rPr>
-              <a:t>2 posts · 27 e 30/11</a:t>
-            </a:r>
-            <a:endParaRPr lang="en-US" sz="1200" dirty="0"/>
-          </a:p>
-        </p:txBody>
-      </p:sp>
-      <p:sp>
-        <p:nvSpPr>
-          <p:cNvPr id="28" name="seta-6"/>
-          <p:cNvSpPr/>
-          <p:nvPr/>
-        </p:nvSpPr>
-        <p:spPr>
-          <a:xfrm rot="5400000">
-            <a:off x="9088907" y="1892808"/>
-            <a:ext cx="237744" cy="164592"/>
-          </a:xfrm>
-          <a:prstGeom prst="triangle">
-            <a:avLst/>
-          </a:prstGeom>
-          <a:solidFill>
-            <a:schemeClr val="bg2"/>
-          </a:solidFill>
-          <a:ln w="12700">
-            <a:solidFill>
-              <a:schemeClr val="bg2"/>
-            </a:solidFill>
-            <a:prstDash val="solid"/>
-          </a:ln>
-        </p:spPr>
-      </p:sp>
-      <p:sp>
-        <p:nvSpPr>
-          <p:cNvPr id="29" name="Text 27"/>
-          <p:cNvSpPr txBox="1"/>
-          <p:nvPr/>
-        </p:nvSpPr>
-        <p:spPr>
-          <a:xfrm>
-            <a:off x="411480" y="411480"/>
-            <a:ext cx="2651760" cy="457200"/>
-          </a:xfrm>
-          <a:prstGeom prst="rect">
-            <a:avLst/>
-          </a:prstGeom>
-          <a:noFill/>
-          <a:ln/>
-        </p:spPr>
-        <p:txBody>
-          <a:bodyPr wrap="square" lIns="0" tIns="0" rIns="0" bIns="0" rtlCol="0" anchor="ctr"/>
-          <a:lstStyle/>
-          <a:p>
-            <a:pPr indent="0" marL="0">
-              <a:buNone/>
-            </a:pPr>
-            <a:r>
-              <a:rPr lang="en-US" sz="1000" b="1" spc="200" kern="0" dirty="0">
-                <a:solidFill>
-                  <a:schemeClr val="bg1"/>
-                </a:solidFill>
-              </a:rPr>
-              <a:t>PROGRAMAÇÃO DO INSTAGRAM</a:t>
-            </a:r>
-            <a:endParaRPr lang="en-US" sz="1000" dirty="0"/>
-          </a:p>
-          <a:p>
-            <a:pPr indent="0" marL="0">
-              <a:buNone/>
-            </a:pPr>
-            <a:r>
-              <a:rPr lang="en-US" sz="1000" b="1" spc="200" kern="0" dirty="0">
-                <a:solidFill>
-                  <a:schemeClr val="bg1"/>
-                </a:solidFill>
-              </a:rPr>
-              <a:t>01/11 A 30/11</a:t>
-            </a:r>
-            <a:endParaRPr lang="en-US" sz="1000" dirty="0"/>
-          </a:p>
-        </p:txBody>
-      </p:sp>
-      <p:sp>
-        <p:nvSpPr>
-          <p:cNvPr id="30" name="Text 28"/>
-          <p:cNvSpPr txBox="1"/>
-          <p:nvPr/>
-        </p:nvSpPr>
-        <p:spPr>
-          <a:xfrm>
-            <a:off x="411480" y="1188720"/>
-            <a:ext cx="2224964" cy="1737360"/>
-          </a:xfrm>
-          <a:prstGeom prst="rect">
-            <a:avLst/>
-          </a:prstGeom>
-          <a:noFill/>
-          <a:ln/>
-        </p:spPr>
-        <p:txBody>
-          <a:bodyPr wrap="square" lIns="0" tIns="0" rIns="0" bIns="0" rtlCol="0" anchor="t"/>
-          <a:lstStyle/>
+              <a:t>Nosso objetivo este mês</a:t>
+            </a:r>
+            <a:endParaRPr lang="en-US" sz="1600" dirty="0"/>
+          </a:p>
           <a:p>
             <a:pPr indent="0" marL="0">
               <a:spcAft>
-                <a:spcPts val="400"/>
+                <a:spcPts val="600"/>
               </a:spcAft>
               <a:buNone/>
             </a:pPr>
             <a:r>
-              <a:rPr lang="en-US" sz="1400" b="1" dirty="0">
+              <a:rPr lang="en-US" sz="1600" dirty="0">
                 <a:solidFill>
                   <a:schemeClr val="accent2"/>
                 </a:solidFill>
               </a:rPr>
-              <a:t>Objetivo de novembro</a:t>
-            </a:r>
-            <a:endParaRPr lang="en-US" sz="1400" dirty="0"/>
-          </a:p>
-          <a:p>
-            <a:pPr indent="0" marL="0">
-              <a:spcAft>
-                <a:spcPts val="400"/>
-              </a:spcAft>
-              <a:buNone/>
-            </a:pPr>
-            <a:r>
-              <a:rPr lang="en-US" sz="1400" dirty="0">
-                <a:solidFill>
-                  <a:schemeClr val="accent2"/>
-                </a:solidFill>
-              </a:rPr>
-              <a:t>Sair da apresentação e entrar na conversa com o RH: mostrar o cuidado na prática, provar que funciona e ler o momento das empresas antes do orçamento de 2027.</a:t>
-            </a:r>
-            <a:endParaRPr lang="en-US" sz="1400" dirty="0"/>
-          </a:p>
-        </p:txBody>
-      </p:sp>
+              <a:t>Fechar a apresentação da FairHealth e abrir a conversa com o RH. Primeiro, mostramos o cuidado na prática e as provas de que ele funciona. Depois, usamos temas do momento (Novembro Azul, NR-01, saúde do RH, Geração Z) para mostrar que entendemos o que as empresas estão vivendo e terminamos com o convite ao diagnóstico, enquanto o RH fecha o orçamento de 2027.</a:t>
+            </a:r>
+            <a:endParaRPr lang="en-US" sz="1600" dirty="0"/>
+          </a:p>
+        </p:txBody>
+      </p:sp>
+      <p:pic>
+        <p:nvPicPr>
+          <p:cNvPr id="5" name="Image 0" descr="/home/user/Comunica-o-FH/instagram/marca/logo-circulo.png">    </p:cNvPr>
+          <p:cNvPicPr>
+            <a:picLocks noChangeAspect="1"/>
+          </p:cNvPicPr>
+          <p:nvPr/>
+        </p:nvPicPr>
+        <p:blipFill>
+          <a:blip r:embed="rId1"/>
+          <a:stretch>
+            <a:fillRect/>
+          </a:stretch>
+        </p:blipFill>
+        <p:spPr>
+          <a:xfrm>
+            <a:off x="10817352" y="5833872"/>
+            <a:ext cx="603504" cy="603504"/>
+          </a:xfrm>
+          <a:prstGeom prst="rect">
+            <a:avLst/>
+          </a:prstGeom>
+        </p:spPr>
+      </p:pic>
     </p:spTree>
   </p:cSld>
   <p:clrMapOvr>
@@ -3575,7 +2735,7 @@
         <p:spPr>
           <a:xfrm>
             <a:off x="640080" y="1938528"/>
-            <a:ext cx="1143000" cy="768096"/>
+            <a:ext cx="1143000" cy="896112"/>
           </a:xfrm>
           <a:prstGeom prst="rect">
             <a:avLst/>
@@ -3596,7 +2756,7 @@
                   <a:schemeClr val="tx1"/>
                 </a:solidFill>
               </a:rPr>
-              <a:t>Semana 2</a:t>
+              <a:t>Semana 3</a:t>
             </a:r>
             <a:endParaRPr lang="en-US" sz="1400" dirty="0"/>
           </a:p>
@@ -3610,7 +2770,7 @@
                   <a:schemeClr val="tx1"/>
                 </a:solidFill>
               </a:rPr>
-              <a:t>26/10 a 30/10</a:t>
+              <a:t>02/11 a 06/11</a:t>
             </a:r>
             <a:endParaRPr lang="en-US" sz="1400" dirty="0"/>
           </a:p>
@@ -3618,14 +2778,14 @@
       </p:sp>
       <p:sp>
         <p:nvSpPr>
-          <p:cNvPr id="27" name="celula-26/10"/>
+          <p:cNvPr id="27" name="celula-02/11"/>
           <p:cNvSpPr/>
           <p:nvPr/>
         </p:nvSpPr>
         <p:spPr>
           <a:xfrm>
             <a:off x="1828800" y="1938528"/>
-            <a:ext cx="1388582" cy="768096"/>
+            <a:ext cx="1388582" cy="896112"/>
           </a:xfrm>
           <a:prstGeom prst="rect">
             <a:avLst/>
@@ -3668,10 +2828,10 @@
             <a:r>
               <a:rPr lang="en-US" sz="1000" dirty="0">
                 <a:solidFill>
-                  <a:srgbClr val="B9C4C1"/>
-                </a:solidFill>
-              </a:rPr>
-              <a:t>26</a:t>
+                  <a:schemeClr val="tx2"/>
+                </a:solidFill>
+              </a:rPr>
+              <a:t>02</a:t>
             </a:r>
             <a:endParaRPr lang="en-US" sz="1000" dirty="0"/>
           </a:p>
@@ -3679,14 +2839,50 @@
       </p:sp>
       <p:sp>
         <p:nvSpPr>
-          <p:cNvPr id="29" name="celula-27/10"/>
+          <p:cNvPr id="29" name="Text 27"/>
+          <p:cNvSpPr txBox="1"/>
+          <p:nvPr/>
+        </p:nvSpPr>
+        <p:spPr>
+          <a:xfrm>
+            <a:off x="1892808" y="2194560"/>
+            <a:ext cx="1260566" cy="411480"/>
+          </a:xfrm>
+          <a:prstGeom prst="rect">
+            <a:avLst/>
+          </a:prstGeom>
+          <a:noFill/>
+          <a:ln/>
+        </p:spPr>
+        <p:txBody>
+          <a:bodyPr wrap="square" lIns="0" tIns="0" rIns="0" bIns="0" rtlCol="0" anchor="t"/>
+          <a:lstStyle/>
+          <a:p>
+            <a:pPr indent="0" marL="0">
+              <a:buNone/>
+            </a:pPr>
+            <a:r>
+              <a:rPr lang="en-US" sz="1000" i="1" dirty="0">
+                <a:solidFill>
+                  <a:schemeClr val="tx2"/>
+                </a:solidFill>
+              </a:rPr>
+              <a:t>Finados</a:t>
+            </a:r>
+            <a:endParaRPr lang="en-US" sz="1000" dirty="0"/>
+          </a:p>
+        </p:txBody>
+      </p:sp>
+      <p:sp>
+        <p:nvSpPr>
+          <p:cNvPr id="30" name="celula-03/11"/>
           <p:cNvSpPr/>
           <p:nvPr/>
         </p:nvSpPr>
         <p:spPr>
           <a:xfrm>
             <a:off x="3217382" y="1938528"/>
-            <a:ext cx="1388582" cy="768096"/>
+            <a:ext cx="1388582" cy="896112"/>
           </a:xfrm>
           <a:prstGeom prst="rect">
             <a:avLst/>
@@ -3704,7 +2900,7 @@
       </p:sp>
       <p:sp>
         <p:nvSpPr>
-          <p:cNvPr id="30" name="Text 28"/>
+          <p:cNvPr id="31" name="Text 29"/>
           <p:cNvSpPr txBox="1"/>
           <p:nvPr/>
         </p:nvSpPr>
@@ -3729,10 +2925,10 @@
             <a:r>
               <a:rPr lang="en-US" sz="1000" dirty="0">
                 <a:solidFill>
-                  <a:srgbClr val="B9C4C1"/>
-                </a:solidFill>
-              </a:rPr>
-              <a:t>27</a:t>
+                  <a:schemeClr val="tx2"/>
+                </a:solidFill>
+              </a:rPr>
+              <a:t>03</a:t>
             </a:r>
             <a:endParaRPr lang="en-US" sz="1000" dirty="0"/>
           </a:p>
@@ -3740,14 +2936,140 @@
       </p:sp>
       <p:sp>
         <p:nvSpPr>
-          <p:cNvPr id="31" name="celula-28/10"/>
+          <p:cNvPr id="32" name="post-3"/>
           <p:cNvSpPr/>
           <p:nvPr/>
         </p:nvSpPr>
         <p:spPr>
           <a:xfrm>
+            <a:off x="3281390" y="2157984"/>
+            <a:ext cx="1260566" cy="621792"/>
+          </a:xfrm>
+          <a:prstGeom prst="roundRect">
+            <a:avLst>
+              <a:gd name="adj" fmla="val 11765"/>
+            </a:avLst>
+          </a:prstGeom>
+          <a:solidFill>
+            <a:schemeClr val="tx1"/>
+          </a:solidFill>
+          <a:ln w="12700">
+            <a:solidFill>
+              <a:schemeClr val="tx1"/>
+            </a:solidFill>
+            <a:prstDash val="solid"/>
+          </a:ln>
+        </p:spPr>
+      </p:sp>
+      <p:sp>
+        <p:nvSpPr>
+          <p:cNvPr id="33" name="Text 31"/>
+          <p:cNvSpPr txBox="1"/>
+          <p:nvPr/>
+        </p:nvSpPr>
+        <p:spPr>
+          <a:xfrm>
+            <a:off x="3308822" y="2176272"/>
+            <a:ext cx="1004534" cy="585216"/>
+          </a:xfrm>
+          <a:prstGeom prst="rect">
+            <a:avLst/>
+          </a:prstGeom>
+          <a:noFill/>
+          <a:ln/>
+        </p:spPr>
+        <p:txBody>
+          <a:bodyPr wrap="square" lIns="0" tIns="0" rIns="0" bIns="0" rtlCol="0" anchor="ctr">
+            <a:normAutofit/>
+          </a:bodyPr>
+          <a:lstStyle/>
+          <a:p>
+            <a:pPr algn="ctr" indent="0" marL="0">
+              <a:buNone/>
+            </a:pPr>
+            <a:r>
+              <a:rPr lang="en-US" sz="1100" b="1" dirty="0">
+                <a:solidFill>
+                  <a:schemeClr val="bg1"/>
+                </a:solidFill>
+              </a:rPr>
+              <a:t>Como funciona o cuidado na prática?</a:t>
+            </a:r>
+            <a:endParaRPr lang="en-US" sz="1100" dirty="0"/>
+          </a:p>
+        </p:txBody>
+      </p:sp>
+      <p:sp>
+        <p:nvSpPr>
+          <p:cNvPr id="34" name="tipo-3"/>
+          <p:cNvSpPr/>
+          <p:nvPr/>
+        </p:nvSpPr>
+        <p:spPr>
+          <a:xfrm>
+            <a:off x="4340787" y="2194560"/>
+            <a:ext cx="164592" cy="164592"/>
+          </a:xfrm>
+          <a:prstGeom prst="ellipse">
+            <a:avLst/>
+          </a:prstGeom>
+          <a:solidFill>
+            <a:schemeClr val="bg1"/>
+          </a:solidFill>
+          <a:ln w="9525">
+            <a:solidFill>
+              <a:schemeClr val="tx1"/>
+            </a:solidFill>
+            <a:prstDash val="solid"/>
+          </a:ln>
+        </p:spPr>
+      </p:sp>
+      <p:sp>
+        <p:nvSpPr>
+          <p:cNvPr id="35" name="Text 33"/>
+          <p:cNvSpPr txBox="1"/>
+          <p:nvPr/>
+        </p:nvSpPr>
+        <p:spPr>
+          <a:xfrm>
+            <a:off x="4340787" y="2194560"/>
+            <a:ext cx="164592" cy="164592"/>
+          </a:xfrm>
+          <a:prstGeom prst="rect">
+            <a:avLst/>
+          </a:prstGeom>
+          <a:noFill/>
+          <a:ln/>
+        </p:spPr>
+        <p:txBody>
+          <a:bodyPr wrap="square" lIns="0" tIns="0" rIns="0" bIns="0" rtlCol="0" anchor="ctr"/>
+          <a:lstStyle/>
+          <a:p>
+            <a:pPr algn="ctr" indent="0" marL="0">
+              <a:buNone/>
+            </a:pPr>
+            <a:r>
+              <a:rPr lang="en-US" sz="800" b="1" dirty="0">
+                <a:solidFill>
+                  <a:schemeClr val="tx1"/>
+                </a:solidFill>
+              </a:rPr>
+              <a:t>P</a:t>
+            </a:r>
+            <a:endParaRPr lang="en-US" sz="800" dirty="0"/>
+          </a:p>
+        </p:txBody>
+      </p:sp>
+      <p:sp>
+        <p:nvSpPr>
+          <p:cNvPr id="36" name="celula-04/11"/>
+          <p:cNvSpPr/>
+          <p:nvPr/>
+        </p:nvSpPr>
+        <p:spPr>
+          <a:xfrm>
             <a:off x="4605963" y="1938528"/>
-            <a:ext cx="1388582" cy="768096"/>
+            <a:ext cx="1388582" cy="896112"/>
           </a:xfrm>
           <a:prstGeom prst="rect">
             <a:avLst/>
@@ -3765,7 +3087,7 @@
       </p:sp>
       <p:sp>
         <p:nvSpPr>
-          <p:cNvPr id="32" name="Text 30"/>
+          <p:cNvPr id="37" name="Text 35"/>
           <p:cNvSpPr txBox="1"/>
           <p:nvPr/>
         </p:nvSpPr>
@@ -3790,10 +3112,10 @@
             <a:r>
               <a:rPr lang="en-US" sz="1000" dirty="0">
                 <a:solidFill>
-                  <a:srgbClr val="B9C4C1"/>
-                </a:solidFill>
-              </a:rPr>
-              <a:t>28</a:t>
+                  <a:schemeClr val="tx2"/>
+                </a:solidFill>
+              </a:rPr>
+              <a:t>04</a:t>
             </a:r>
             <a:endParaRPr lang="en-US" sz="1000" dirty="0"/>
           </a:p>
@@ -3801,14 +3123,140 @@
       </p:sp>
       <p:sp>
         <p:nvSpPr>
-          <p:cNvPr id="33" name="celula-29/10"/>
+          <p:cNvPr id="38" name="post-4"/>
           <p:cNvSpPr/>
           <p:nvPr/>
         </p:nvSpPr>
         <p:spPr>
           <a:xfrm>
+            <a:off x="4669971" y="2157984"/>
+            <a:ext cx="1260566" cy="621792"/>
+          </a:xfrm>
+          <a:prstGeom prst="roundRect">
+            <a:avLst>
+              <a:gd name="adj" fmla="val 11765"/>
+            </a:avLst>
+          </a:prstGeom>
+          <a:solidFill>
+            <a:schemeClr val="accent1"/>
+          </a:solidFill>
+          <a:ln w="12700">
+            <a:solidFill>
+              <a:schemeClr val="accent1"/>
+            </a:solidFill>
+            <a:prstDash val="solid"/>
+          </a:ln>
+        </p:spPr>
+      </p:sp>
+      <p:sp>
+        <p:nvSpPr>
+          <p:cNvPr id="39" name="Text 37"/>
+          <p:cNvSpPr txBox="1"/>
+          <p:nvPr/>
+        </p:nvSpPr>
+        <p:spPr>
+          <a:xfrm>
+            <a:off x="4697403" y="2176272"/>
+            <a:ext cx="1004534" cy="585216"/>
+          </a:xfrm>
+          <a:prstGeom prst="rect">
+            <a:avLst/>
+          </a:prstGeom>
+          <a:noFill/>
+          <a:ln/>
+        </p:spPr>
+        <p:txBody>
+          <a:bodyPr wrap="square" lIns="0" tIns="0" rIns="0" bIns="0" rtlCol="0" anchor="ctr">
+            <a:normAutofit/>
+          </a:bodyPr>
+          <a:lstStyle/>
+          <a:p>
+            <a:pPr algn="ctr" indent="0" marL="0">
+              <a:buNone/>
+            </a:pPr>
+            <a:r>
+              <a:rPr lang="en-US" sz="1100" b="1" dirty="0">
+                <a:solidFill>
+                  <a:schemeClr val="tx1"/>
+                </a:solidFill>
+              </a:rPr>
+              <a:t>Quatro frentes, um cuidado conectado</a:t>
+            </a:r>
+            <a:endParaRPr lang="en-US" sz="1100" dirty="0"/>
+          </a:p>
+        </p:txBody>
+      </p:sp>
+      <p:sp>
+        <p:nvSpPr>
+          <p:cNvPr id="40" name="tipo-4"/>
+          <p:cNvSpPr/>
+          <p:nvPr/>
+        </p:nvSpPr>
+        <p:spPr>
+          <a:xfrm>
+            <a:off x="5729369" y="2194560"/>
+            <a:ext cx="164592" cy="164592"/>
+          </a:xfrm>
+          <a:prstGeom prst="ellipse">
+            <a:avLst/>
+          </a:prstGeom>
+          <a:solidFill>
+            <a:schemeClr val="bg1"/>
+          </a:solidFill>
+          <a:ln w="9525">
+            <a:solidFill>
+              <a:schemeClr val="tx1"/>
+            </a:solidFill>
+            <a:prstDash val="solid"/>
+          </a:ln>
+        </p:spPr>
+      </p:sp>
+      <p:sp>
+        <p:nvSpPr>
+          <p:cNvPr id="41" name="Text 39"/>
+          <p:cNvSpPr txBox="1"/>
+          <p:nvPr/>
+        </p:nvSpPr>
+        <p:spPr>
+          <a:xfrm>
+            <a:off x="5729369" y="2194560"/>
+            <a:ext cx="164592" cy="164592"/>
+          </a:xfrm>
+          <a:prstGeom prst="rect">
+            <a:avLst/>
+          </a:prstGeom>
+          <a:noFill/>
+          <a:ln/>
+        </p:spPr>
+        <p:txBody>
+          <a:bodyPr wrap="square" lIns="0" tIns="0" rIns="0" bIns="0" rtlCol="0" anchor="ctr"/>
+          <a:lstStyle/>
+          <a:p>
+            <a:pPr algn="ctr" indent="0" marL="0">
+              <a:buNone/>
+            </a:pPr>
+            <a:r>
+              <a:rPr lang="en-US" sz="800" b="1" dirty="0">
+                <a:solidFill>
+                  <a:schemeClr val="tx1"/>
+                </a:solidFill>
+              </a:rPr>
+              <a:t>P</a:t>
+            </a:r>
+            <a:endParaRPr lang="en-US" sz="800" dirty="0"/>
+          </a:p>
+        </p:txBody>
+      </p:sp>
+      <p:sp>
+        <p:nvSpPr>
+          <p:cNvPr id="42" name="celula-05/11"/>
+          <p:cNvSpPr/>
+          <p:nvPr/>
+        </p:nvSpPr>
+        <p:spPr>
+          <a:xfrm>
             <a:off x="5994545" y="1938528"/>
-            <a:ext cx="1388582" cy="768096"/>
+            <a:ext cx="1388582" cy="896112"/>
           </a:xfrm>
           <a:prstGeom prst="rect">
             <a:avLst/>
@@ -3826,7 +3274,7 @@
       </p:sp>
       <p:sp>
         <p:nvSpPr>
-          <p:cNvPr id="34" name="Text 32"/>
+          <p:cNvPr id="43" name="Text 41"/>
           <p:cNvSpPr txBox="1"/>
           <p:nvPr/>
         </p:nvSpPr>
@@ -3851,10 +3299,10 @@
             <a:r>
               <a:rPr lang="en-US" sz="1000" dirty="0">
                 <a:solidFill>
-                  <a:srgbClr val="B9C4C1"/>
-                </a:solidFill>
-              </a:rPr>
-              <a:t>29</a:t>
+                  <a:schemeClr val="tx2"/>
+                </a:solidFill>
+              </a:rPr>
+              <a:t>05</a:t>
             </a:r>
             <a:endParaRPr lang="en-US" sz="1000" dirty="0"/>
           </a:p>
@@ -3862,14 +3310,14 @@
       </p:sp>
       <p:sp>
         <p:nvSpPr>
-          <p:cNvPr id="35" name="celula-30/10"/>
+          <p:cNvPr id="44" name="celula-06/11"/>
           <p:cNvSpPr/>
           <p:nvPr/>
         </p:nvSpPr>
         <p:spPr>
           <a:xfrm>
             <a:off x="7383127" y="1938528"/>
-            <a:ext cx="1388582" cy="768096"/>
+            <a:ext cx="1388582" cy="896112"/>
           </a:xfrm>
           <a:prstGeom prst="rect">
             <a:avLst/>
@@ -3887,7 +3335,7 @@
       </p:sp>
       <p:sp>
         <p:nvSpPr>
-          <p:cNvPr id="36" name="Text 34"/>
+          <p:cNvPr id="45" name="Text 43"/>
           <p:cNvSpPr txBox="1"/>
           <p:nvPr/>
         </p:nvSpPr>
@@ -3912,10 +3360,10 @@
             <a:r>
               <a:rPr lang="en-US" sz="1000" dirty="0">
                 <a:solidFill>
-                  <a:srgbClr val="B9C4C1"/>
-                </a:solidFill>
-              </a:rPr>
-              <a:t>30</a:t>
+                  <a:schemeClr val="tx2"/>
+                </a:solidFill>
+              </a:rPr>
+              <a:t>06</a:t>
             </a:r>
             <a:endParaRPr lang="en-US" sz="1000" dirty="0"/>
           </a:p>
@@ -3923,14 +3371,140 @@
       </p:sp>
       <p:sp>
         <p:nvSpPr>
-          <p:cNvPr id="37" name="celula-31/10"/>
+          <p:cNvPr id="46" name="post-6"/>
           <p:cNvSpPr/>
           <p:nvPr/>
         </p:nvSpPr>
         <p:spPr>
           <a:xfrm>
+            <a:off x="7447135" y="2157984"/>
+            <a:ext cx="1260566" cy="621792"/>
+          </a:xfrm>
+          <a:prstGeom prst="roundRect">
+            <a:avLst>
+              <a:gd name="adj" fmla="val 11765"/>
+            </a:avLst>
+          </a:prstGeom>
+          <a:solidFill>
+            <a:schemeClr val="tx1"/>
+          </a:solidFill>
+          <a:ln w="12700">
+            <a:solidFill>
+              <a:schemeClr val="tx1"/>
+            </a:solidFill>
+            <a:prstDash val="solid"/>
+          </a:ln>
+        </p:spPr>
+      </p:sp>
+      <p:sp>
+        <p:nvSpPr>
+          <p:cNvPr id="47" name="Text 45"/>
+          <p:cNvSpPr txBox="1"/>
+          <p:nvPr/>
+        </p:nvSpPr>
+        <p:spPr>
+          <a:xfrm>
+            <a:off x="7474567" y="2176272"/>
+            <a:ext cx="1004534" cy="585216"/>
+          </a:xfrm>
+          <a:prstGeom prst="rect">
+            <a:avLst/>
+          </a:prstGeom>
+          <a:noFill/>
+          <a:ln/>
+        </p:spPr>
+        <p:txBody>
+          <a:bodyPr wrap="square" lIns="0" tIns="0" rIns="0" bIns="0" rtlCol="0" anchor="ctr">
+            <a:normAutofit/>
+          </a:bodyPr>
+          <a:lstStyle/>
+          <a:p>
+            <a:pPr algn="ctr" indent="0" marL="0">
+              <a:buNone/>
+            </a:pPr>
+            <a:r>
+              <a:rPr lang="en-US" sz="1100" b="1" dirty="0">
+                <a:solidFill>
+                  <a:schemeClr val="bg1"/>
+                </a:solidFill>
+              </a:rPr>
+              <a:t>Uma história de cuidado desde 2009</a:t>
+            </a:r>
+            <a:endParaRPr lang="en-US" sz="1100" dirty="0"/>
+          </a:p>
+        </p:txBody>
+      </p:sp>
+      <p:sp>
+        <p:nvSpPr>
+          <p:cNvPr id="48" name="tipo-6"/>
+          <p:cNvSpPr/>
+          <p:nvPr/>
+        </p:nvSpPr>
+        <p:spPr>
+          <a:xfrm>
+            <a:off x="8506533" y="2194560"/>
+            <a:ext cx="164592" cy="164592"/>
+          </a:xfrm>
+          <a:prstGeom prst="ellipse">
+            <a:avLst/>
+          </a:prstGeom>
+          <a:solidFill>
+            <a:schemeClr val="bg1"/>
+          </a:solidFill>
+          <a:ln w="9525">
+            <a:solidFill>
+              <a:schemeClr val="tx1"/>
+            </a:solidFill>
+            <a:prstDash val="solid"/>
+          </a:ln>
+        </p:spPr>
+      </p:sp>
+      <p:sp>
+        <p:nvSpPr>
+          <p:cNvPr id="49" name="Text 47"/>
+          <p:cNvSpPr txBox="1"/>
+          <p:nvPr/>
+        </p:nvSpPr>
+        <p:spPr>
+          <a:xfrm>
+            <a:off x="8506533" y="2194560"/>
+            <a:ext cx="164592" cy="164592"/>
+          </a:xfrm>
+          <a:prstGeom prst="rect">
+            <a:avLst/>
+          </a:prstGeom>
+          <a:noFill/>
+          <a:ln/>
+        </p:spPr>
+        <p:txBody>
+          <a:bodyPr wrap="square" lIns="0" tIns="0" rIns="0" bIns="0" rtlCol="0" anchor="ctr"/>
+          <a:lstStyle/>
+          <a:p>
+            <a:pPr algn="ctr" indent="0" marL="0">
+              <a:buNone/>
+            </a:pPr>
+            <a:r>
+              <a:rPr lang="en-US" sz="800" b="1" dirty="0">
+                <a:solidFill>
+                  <a:schemeClr val="tx1"/>
+                </a:solidFill>
+              </a:rPr>
+              <a:t>I</a:t>
+            </a:r>
+            <a:endParaRPr lang="en-US" sz="800" dirty="0"/>
+          </a:p>
+        </p:txBody>
+      </p:sp>
+      <p:sp>
+        <p:nvSpPr>
+          <p:cNvPr id="50" name="celula-07/11"/>
+          <p:cNvSpPr/>
+          <p:nvPr/>
+        </p:nvSpPr>
+        <p:spPr>
+          <a:xfrm>
             <a:off x="8771709" y="1938528"/>
-            <a:ext cx="1388582" cy="768096"/>
+            <a:ext cx="1388582" cy="896112"/>
           </a:xfrm>
           <a:prstGeom prst="rect">
             <a:avLst/>
@@ -3948,7 +3522,7 @@
       </p:sp>
       <p:sp>
         <p:nvSpPr>
-          <p:cNvPr id="38" name="Text 36"/>
+          <p:cNvPr id="51" name="Text 49"/>
           <p:cNvSpPr txBox="1"/>
           <p:nvPr/>
         </p:nvSpPr>
@@ -3973,10 +3547,10 @@
             <a:r>
               <a:rPr lang="en-US" sz="1000" dirty="0">
                 <a:solidFill>
-                  <a:srgbClr val="B9C4C1"/>
-                </a:solidFill>
-              </a:rPr>
-              <a:t>31</a:t>
+                  <a:schemeClr val="tx2"/>
+                </a:solidFill>
+              </a:rPr>
+              <a:t>07</a:t>
             </a:r>
             <a:endParaRPr lang="en-US" sz="1000" dirty="0"/>
           </a:p>
@@ -3984,14 +3558,14 @@
       </p:sp>
       <p:sp>
         <p:nvSpPr>
-          <p:cNvPr id="39" name="celula-01/11"/>
+          <p:cNvPr id="52" name="celula-08/11"/>
           <p:cNvSpPr/>
           <p:nvPr/>
         </p:nvSpPr>
         <p:spPr>
           <a:xfrm>
             <a:off x="10160290" y="1938528"/>
-            <a:ext cx="1388582" cy="768096"/>
+            <a:ext cx="1388582" cy="896112"/>
           </a:xfrm>
           <a:prstGeom prst="rect">
             <a:avLst/>
@@ -4009,7 +3583,7 @@
       </p:sp>
       <p:sp>
         <p:nvSpPr>
-          <p:cNvPr id="40" name="Text 38"/>
+          <p:cNvPr id="53" name="Text 51"/>
           <p:cNvSpPr txBox="1"/>
           <p:nvPr/>
         </p:nvSpPr>
@@ -4037,7 +3611,7 @@
                   <a:schemeClr val="tx2"/>
                 </a:solidFill>
               </a:rPr>
-              <a:t>01</a:t>
+              <a:t>08</a:t>
             </a:r>
             <a:endParaRPr lang="en-US" sz="1000" dirty="0"/>
           </a:p>
@@ -4045,50 +3619,14 @@
       </p:sp>
       <p:sp>
         <p:nvSpPr>
-          <p:cNvPr id="41" name="Text 39"/>
-          <p:cNvSpPr txBox="1"/>
-          <p:nvPr/>
-        </p:nvSpPr>
-        <p:spPr>
-          <a:xfrm>
-            <a:off x="10224298" y="2194560"/>
-            <a:ext cx="1260566" cy="411480"/>
-          </a:xfrm>
-          <a:prstGeom prst="rect">
-            <a:avLst/>
-          </a:prstGeom>
-          <a:noFill/>
-          <a:ln/>
-        </p:spPr>
-        <p:txBody>
-          <a:bodyPr wrap="square" lIns="0" tIns="0" rIns="0" bIns="0" rtlCol="0" anchor="t"/>
-          <a:lstStyle/>
-          <a:p>
-            <a:pPr indent="0" marL="0">
-              <a:buNone/>
-            </a:pPr>
-            <a:r>
-              <a:rPr lang="en-US" sz="1000" i="1" dirty="0">
-                <a:solidFill>
-                  <a:schemeClr val="tx2"/>
-                </a:solidFill>
-              </a:rPr>
-              <a:t>Início do Novembro Azul</a:t>
-            </a:r>
-            <a:endParaRPr lang="en-US" sz="1000" dirty="0"/>
-          </a:p>
-        </p:txBody>
-      </p:sp>
-      <p:sp>
-        <p:nvSpPr>
-          <p:cNvPr id="42" name="Text 40"/>
-          <p:cNvSpPr txBox="1"/>
-          <p:nvPr/>
-        </p:nvSpPr>
-        <p:spPr>
-          <a:xfrm>
-            <a:off x="640080" y="2706624"/>
-            <a:ext cx="1143000" cy="768096"/>
+          <p:cNvPr id="54" name="Text 52"/>
+          <p:cNvSpPr txBox="1"/>
+          <p:nvPr/>
+        </p:nvSpPr>
+        <p:spPr>
+          <a:xfrm>
+            <a:off x="640080" y="2834640"/>
+            <a:ext cx="1143000" cy="896112"/>
           </a:xfrm>
           <a:prstGeom prst="rect">
             <a:avLst/>
@@ -4109,7 +3647,7 @@
                   <a:schemeClr val="tx1"/>
                 </a:solidFill>
               </a:rPr>
-              <a:t>Semana 3</a:t>
+              <a:t>Semana 4</a:t>
             </a:r>
             <a:endParaRPr lang="en-US" sz="1400" dirty="0"/>
           </a:p>
@@ -4123,7 +3661,7 @@
                   <a:schemeClr val="tx1"/>
                 </a:solidFill>
               </a:rPr>
-              <a:t>02/11 a 06/11</a:t>
+              <a:t>09/11 a 13/11</a:t>
             </a:r>
             <a:endParaRPr lang="en-US" sz="1400" dirty="0"/>
           </a:p>
@@ -4131,14 +3669,14 @@
       </p:sp>
       <p:sp>
         <p:nvSpPr>
-          <p:cNvPr id="43" name="celula-02/11"/>
+          <p:cNvPr id="55" name="celula-09/11"/>
           <p:cNvSpPr/>
           <p:nvPr/>
         </p:nvSpPr>
         <p:spPr>
           <a:xfrm>
-            <a:off x="1828800" y="2706624"/>
-            <a:ext cx="1388582" cy="768096"/>
+            <a:off x="1828800" y="2834640"/>
+            <a:ext cx="1388582" cy="896112"/>
           </a:xfrm>
           <a:prstGeom prst="rect">
             <a:avLst/>
@@ -4156,13 +3694,13 @@
       </p:sp>
       <p:sp>
         <p:nvSpPr>
-          <p:cNvPr id="44" name="Text 42"/>
-          <p:cNvSpPr txBox="1"/>
-          <p:nvPr/>
-        </p:nvSpPr>
-        <p:spPr>
-          <a:xfrm>
-            <a:off x="1892808" y="2743200"/>
+          <p:cNvPr id="56" name="Text 54"/>
+          <p:cNvSpPr txBox="1"/>
+          <p:nvPr/>
+        </p:nvSpPr>
+        <p:spPr>
+          <a:xfrm>
+            <a:off x="1892808" y="2871216"/>
             <a:ext cx="365760" cy="182880"/>
           </a:xfrm>
           <a:prstGeom prst="rect">
@@ -4184,7 +3722,7 @@
                   <a:schemeClr val="tx2"/>
                 </a:solidFill>
               </a:rPr>
-              <a:t>02</a:t>
+              <a:t>09</a:t>
             </a:r>
             <a:endParaRPr lang="en-US" sz="1000" dirty="0"/>
           </a:p>
@@ -4192,50 +3730,140 @@
       </p:sp>
       <p:sp>
         <p:nvSpPr>
-          <p:cNvPr id="45" name="Text 43"/>
-          <p:cNvSpPr txBox="1"/>
-          <p:nvPr/>
-        </p:nvSpPr>
-        <p:spPr>
-          <a:xfrm>
-            <a:off x="1892808" y="2962656"/>
-            <a:ext cx="1260566" cy="411480"/>
-          </a:xfrm>
-          <a:prstGeom prst="rect">
-            <a:avLst/>
-          </a:prstGeom>
-          <a:noFill/>
-          <a:ln/>
-        </p:spPr>
-        <p:txBody>
-          <a:bodyPr wrap="square" lIns="0" tIns="0" rIns="0" bIns="0" rtlCol="0" anchor="t"/>
-          <a:lstStyle/>
-          <a:p>
-            <a:pPr indent="0" marL="0">
-              <a:buNone/>
-            </a:pPr>
-            <a:r>
-              <a:rPr lang="en-US" sz="1000" i="1" dirty="0">
-                <a:solidFill>
-                  <a:schemeClr val="tx2"/>
-                </a:solidFill>
-              </a:rPr>
-              <a:t>Finados</a:t>
-            </a:r>
-            <a:endParaRPr lang="en-US" sz="1000" dirty="0"/>
-          </a:p>
-        </p:txBody>
-      </p:sp>
-      <p:sp>
-        <p:nvSpPr>
-          <p:cNvPr id="46" name="celula-03/11"/>
+          <p:cNvPr id="57" name="post-9"/>
           <p:cNvSpPr/>
           <p:nvPr/>
         </p:nvSpPr>
         <p:spPr>
           <a:xfrm>
-            <a:off x="3217382" y="2706624"/>
-            <a:ext cx="1388582" cy="768096"/>
+            <a:off x="1892808" y="3054096"/>
+            <a:ext cx="1260566" cy="621792"/>
+          </a:xfrm>
+          <a:prstGeom prst="roundRect">
+            <a:avLst>
+              <a:gd name="adj" fmla="val 11765"/>
+            </a:avLst>
+          </a:prstGeom>
+          <a:solidFill>
+            <a:schemeClr val="accent1"/>
+          </a:solidFill>
+          <a:ln w="12700">
+            <a:solidFill>
+              <a:schemeClr val="accent1"/>
+            </a:solidFill>
+            <a:prstDash val="solid"/>
+          </a:ln>
+        </p:spPr>
+      </p:sp>
+      <p:sp>
+        <p:nvSpPr>
+          <p:cNvPr id="58" name="Text 56"/>
+          <p:cNvSpPr txBox="1"/>
+          <p:nvPr/>
+        </p:nvSpPr>
+        <p:spPr>
+          <a:xfrm>
+            <a:off x="1920240" y="3072384"/>
+            <a:ext cx="1004534" cy="585216"/>
+          </a:xfrm>
+          <a:prstGeom prst="rect">
+            <a:avLst/>
+          </a:prstGeom>
+          <a:noFill/>
+          <a:ln/>
+        </p:spPr>
+        <p:txBody>
+          <a:bodyPr wrap="square" lIns="0" tIns="0" rIns="0" bIns="0" rtlCol="0" anchor="ctr">
+            <a:normAutofit/>
+          </a:bodyPr>
+          <a:lstStyle/>
+          <a:p>
+            <a:pPr algn="ctr" indent="0" marL="0">
+              <a:buNone/>
+            </a:pPr>
+            <a:r>
+              <a:rPr lang="en-US" sz="1100" b="1" dirty="0">
+                <a:solidFill>
+                  <a:schemeClr val="tx1"/>
+                </a:solidFill>
+              </a:rPr>
+              <a:t>Cuidado na prática: resultados reais</a:t>
+            </a:r>
+            <a:endParaRPr lang="en-US" sz="1100" dirty="0"/>
+          </a:p>
+        </p:txBody>
+      </p:sp>
+      <p:sp>
+        <p:nvSpPr>
+          <p:cNvPr id="59" name="tipo-9"/>
+          <p:cNvSpPr/>
+          <p:nvPr/>
+        </p:nvSpPr>
+        <p:spPr>
+          <a:xfrm>
+            <a:off x="2952206" y="3090672"/>
+            <a:ext cx="164592" cy="164592"/>
+          </a:xfrm>
+          <a:prstGeom prst="ellipse">
+            <a:avLst/>
+          </a:prstGeom>
+          <a:solidFill>
+            <a:schemeClr val="bg1"/>
+          </a:solidFill>
+          <a:ln w="9525">
+            <a:solidFill>
+              <a:schemeClr val="tx1"/>
+            </a:solidFill>
+            <a:prstDash val="solid"/>
+          </a:ln>
+        </p:spPr>
+      </p:sp>
+      <p:sp>
+        <p:nvSpPr>
+          <p:cNvPr id="60" name="Text 58"/>
+          <p:cNvSpPr txBox="1"/>
+          <p:nvPr/>
+        </p:nvSpPr>
+        <p:spPr>
+          <a:xfrm>
+            <a:off x="2952206" y="3090672"/>
+            <a:ext cx="164592" cy="164592"/>
+          </a:xfrm>
+          <a:prstGeom prst="rect">
+            <a:avLst/>
+          </a:prstGeom>
+          <a:noFill/>
+          <a:ln/>
+        </p:spPr>
+        <p:txBody>
+          <a:bodyPr wrap="square" lIns="0" tIns="0" rIns="0" bIns="0" rtlCol="0" anchor="ctr"/>
+          <a:lstStyle/>
+          <a:p>
+            <a:pPr algn="ctr" indent="0" marL="0">
+              <a:buNone/>
+            </a:pPr>
+            <a:r>
+              <a:rPr lang="en-US" sz="800" b="1" dirty="0">
+                <a:solidFill>
+                  <a:schemeClr val="tx1"/>
+                </a:solidFill>
+              </a:rPr>
+              <a:t>P</a:t>
+            </a:r>
+            <a:endParaRPr lang="en-US" sz="800" dirty="0"/>
+          </a:p>
+        </p:txBody>
+      </p:sp>
+      <p:sp>
+        <p:nvSpPr>
+          <p:cNvPr id="61" name="celula-10/11"/>
+          <p:cNvSpPr/>
+          <p:nvPr/>
+        </p:nvSpPr>
+        <p:spPr>
+          <a:xfrm>
+            <a:off x="3217382" y="2834640"/>
+            <a:ext cx="1388582" cy="896112"/>
           </a:xfrm>
           <a:prstGeom prst="rect">
             <a:avLst/>
@@ -4253,13 +3881,13 @@
       </p:sp>
       <p:sp>
         <p:nvSpPr>
-          <p:cNvPr id="47" name="Text 45"/>
-          <p:cNvSpPr txBox="1"/>
-          <p:nvPr/>
-        </p:nvSpPr>
-        <p:spPr>
-          <a:xfrm>
-            <a:off x="3281390" y="2743200"/>
+          <p:cNvPr id="62" name="Text 60"/>
+          <p:cNvSpPr txBox="1"/>
+          <p:nvPr/>
+        </p:nvSpPr>
+        <p:spPr>
+          <a:xfrm>
+            <a:off x="3281390" y="2871216"/>
             <a:ext cx="365760" cy="182880"/>
           </a:xfrm>
           <a:prstGeom prst="rect">
@@ -4281,7 +3909,7 @@
                   <a:schemeClr val="tx2"/>
                 </a:solidFill>
               </a:rPr>
-              <a:t>03</a:t>
+              <a:t>10</a:t>
             </a:r>
             <a:endParaRPr lang="en-US" sz="1000" dirty="0"/>
           </a:p>
@@ -4289,18 +3917,79 @@
       </p:sp>
       <p:sp>
         <p:nvSpPr>
-          <p:cNvPr id="48" name="post-3"/>
+          <p:cNvPr id="63" name="celula-11/11"/>
           <p:cNvSpPr/>
           <p:nvPr/>
         </p:nvSpPr>
         <p:spPr>
           <a:xfrm>
-            <a:off x="3281390" y="2926080"/>
-            <a:ext cx="1260566" cy="493776"/>
+            <a:off x="4605963" y="2834640"/>
+            <a:ext cx="1388582" cy="896112"/>
+          </a:xfrm>
+          <a:prstGeom prst="rect">
+            <a:avLst/>
+          </a:prstGeom>
+          <a:solidFill>
+            <a:schemeClr val="bg2"/>
+          </a:solidFill>
+          <a:ln w="9525">
+            <a:solidFill>
+              <a:srgbClr val="A9CFC6"/>
+            </a:solidFill>
+            <a:prstDash val="solid"/>
+          </a:ln>
+        </p:spPr>
+      </p:sp>
+      <p:sp>
+        <p:nvSpPr>
+          <p:cNvPr id="64" name="Text 62"/>
+          <p:cNvSpPr txBox="1"/>
+          <p:nvPr/>
+        </p:nvSpPr>
+        <p:spPr>
+          <a:xfrm>
+            <a:off x="4669971" y="2871216"/>
+            <a:ext cx="365760" cy="182880"/>
+          </a:xfrm>
+          <a:prstGeom prst="rect">
+            <a:avLst/>
+          </a:prstGeom>
+          <a:noFill/>
+          <a:ln/>
+        </p:spPr>
+        <p:txBody>
+          <a:bodyPr wrap="square" lIns="0" tIns="0" rIns="0" bIns="0" rtlCol="0" anchor="ctr"/>
+          <a:lstStyle/>
+          <a:p>
+            <a:pPr indent="0" marL="0">
+              <a:buNone/>
+            </a:pPr>
+            <a:r>
+              <a:rPr lang="en-US" sz="1000" dirty="0">
+                <a:solidFill>
+                  <a:schemeClr val="tx2"/>
+                </a:solidFill>
+              </a:rPr>
+              <a:t>11</a:t>
+            </a:r>
+            <a:endParaRPr lang="en-US" sz="1000" dirty="0"/>
+          </a:p>
+        </p:txBody>
+      </p:sp>
+      <p:sp>
+        <p:nvSpPr>
+          <p:cNvPr id="65" name="post-11"/>
+          <p:cNvSpPr/>
+          <p:nvPr/>
+        </p:nvSpPr>
+        <p:spPr>
+          <a:xfrm>
+            <a:off x="4669971" y="3054096"/>
+            <a:ext cx="1260566" cy="621792"/>
           </a:xfrm>
           <a:prstGeom prst="roundRect">
             <a:avLst>
-              <a:gd name="adj" fmla="val 14815"/>
+              <a:gd name="adj" fmla="val 11765"/>
             </a:avLst>
           </a:prstGeom>
           <a:solidFill>
@@ -4316,14 +4005,14 @@
       </p:sp>
       <p:sp>
         <p:nvSpPr>
-          <p:cNvPr id="49" name="Text 47"/>
-          <p:cNvSpPr txBox="1"/>
-          <p:nvPr/>
-        </p:nvSpPr>
-        <p:spPr>
-          <a:xfrm>
-            <a:off x="3308822" y="2944368"/>
-            <a:ext cx="1004534" cy="457200"/>
+          <p:cNvPr id="66" name="Text 64"/>
+          <p:cNvSpPr txBox="1"/>
+          <p:nvPr/>
+        </p:nvSpPr>
+        <p:spPr>
+          <a:xfrm>
+            <a:off x="4697403" y="3072384"/>
+            <a:ext cx="1004534" cy="585216"/>
           </a:xfrm>
           <a:prstGeom prst="rect">
             <a:avLst/>
@@ -4341,26 +4030,26 @@
               <a:buNone/>
             </a:pPr>
             <a:r>
-              <a:rPr lang="en-US" sz="1000" b="1" dirty="0">
+              <a:rPr lang="en-US" sz="1100" b="1" dirty="0">
                 <a:solidFill>
                   <a:schemeClr val="bg1"/>
                 </a:solidFill>
               </a:rPr>
-              <a:t>Como funciona o cuidado na prática?</a:t>
-            </a:r>
-            <a:endParaRPr lang="en-US" sz="1000" dirty="0"/>
-          </a:p>
-        </p:txBody>
-      </p:sp>
-      <p:sp>
-        <p:nvSpPr>
-          <p:cNvPr id="50" name="tipo-3"/>
+              <a:t>Estilo de vida também é tratamento sério</a:t>
+            </a:r>
+            <a:endParaRPr lang="en-US" sz="1100" dirty="0"/>
+          </a:p>
+        </p:txBody>
+      </p:sp>
+      <p:sp>
+        <p:nvSpPr>
+          <p:cNvPr id="67" name="tipo-11"/>
           <p:cNvSpPr/>
           <p:nvPr/>
         </p:nvSpPr>
         <p:spPr>
           <a:xfrm>
-            <a:off x="4340787" y="2962656"/>
+            <a:off x="5729369" y="3090672"/>
             <a:ext cx="164592" cy="164592"/>
           </a:xfrm>
           <a:prstGeom prst="ellipse">
@@ -4379,13 +4068,13 @@
       </p:sp>
       <p:sp>
         <p:nvSpPr>
-          <p:cNvPr id="51" name="Text 49"/>
-          <p:cNvSpPr txBox="1"/>
-          <p:nvPr/>
-        </p:nvSpPr>
-        <p:spPr>
-          <a:xfrm>
-            <a:off x="4340787" y="2962656"/>
+          <p:cNvPr id="68" name="Text 66"/>
+          <p:cNvSpPr txBox="1"/>
+          <p:nvPr/>
+        </p:nvSpPr>
+        <p:spPr>
+          <a:xfrm>
+            <a:off x="5729369" y="3090672"/>
             <a:ext cx="164592" cy="164592"/>
           </a:xfrm>
           <a:prstGeom prst="rect">
@@ -4415,14 +4104,14 @@
       </p:sp>
       <p:sp>
         <p:nvSpPr>
-          <p:cNvPr id="52" name="celula-04/11"/>
+          <p:cNvPr id="69" name="celula-12/11"/>
           <p:cNvSpPr/>
           <p:nvPr/>
         </p:nvSpPr>
         <p:spPr>
           <a:xfrm>
-            <a:off x="4605963" y="2706624"/>
-            <a:ext cx="1388582" cy="768096"/>
+            <a:off x="5994545" y="2834640"/>
+            <a:ext cx="1388582" cy="896112"/>
           </a:xfrm>
           <a:prstGeom prst="rect">
             <a:avLst/>
@@ -4440,13 +4129,13 @@
       </p:sp>
       <p:sp>
         <p:nvSpPr>
-          <p:cNvPr id="53" name="Text 51"/>
-          <p:cNvSpPr txBox="1"/>
-          <p:nvPr/>
-        </p:nvSpPr>
-        <p:spPr>
-          <a:xfrm>
-            <a:off x="4669971" y="2743200"/>
+          <p:cNvPr id="70" name="Text 68"/>
+          <p:cNvSpPr txBox="1"/>
+          <p:nvPr/>
+        </p:nvSpPr>
+        <p:spPr>
+          <a:xfrm>
+            <a:off x="6058553" y="2871216"/>
             <a:ext cx="365760" cy="182880"/>
           </a:xfrm>
           <a:prstGeom prst="rect">
@@ -4468,7 +4157,7 @@
                   <a:schemeClr val="tx2"/>
                 </a:solidFill>
               </a:rPr>
-              <a:t>04</a:t>
+              <a:t>12</a:t>
             </a:r>
             <a:endParaRPr lang="en-US" sz="1000" dirty="0"/>
           </a:p>
@@ -4476,18 +4165,510 @@
       </p:sp>
       <p:sp>
         <p:nvSpPr>
-          <p:cNvPr id="54" name="post-4"/>
+          <p:cNvPr id="71" name="celula-13/11"/>
           <p:cNvSpPr/>
           <p:nvPr/>
         </p:nvSpPr>
         <p:spPr>
           <a:xfrm>
-            <a:off x="4669971" y="2926080"/>
-            <a:ext cx="1260566" cy="493776"/>
+            <a:off x="7383127" y="2834640"/>
+            <a:ext cx="1388582" cy="896112"/>
+          </a:xfrm>
+          <a:prstGeom prst="rect">
+            <a:avLst/>
+          </a:prstGeom>
+          <a:solidFill>
+            <a:schemeClr val="bg2"/>
+          </a:solidFill>
+          <a:ln w="9525">
+            <a:solidFill>
+              <a:srgbClr val="A9CFC6"/>
+            </a:solidFill>
+            <a:prstDash val="solid"/>
+          </a:ln>
+        </p:spPr>
+      </p:sp>
+      <p:sp>
+        <p:nvSpPr>
+          <p:cNvPr id="72" name="Text 70"/>
+          <p:cNvSpPr txBox="1"/>
+          <p:nvPr/>
+        </p:nvSpPr>
+        <p:spPr>
+          <a:xfrm>
+            <a:off x="7447135" y="2871216"/>
+            <a:ext cx="365760" cy="182880"/>
+          </a:xfrm>
+          <a:prstGeom prst="rect">
+            <a:avLst/>
+          </a:prstGeom>
+          <a:noFill/>
+          <a:ln/>
+        </p:spPr>
+        <p:txBody>
+          <a:bodyPr wrap="square" lIns="0" tIns="0" rIns="0" bIns="0" rtlCol="0" anchor="ctr"/>
+          <a:lstStyle/>
+          <a:p>
+            <a:pPr indent="0" marL="0">
+              <a:buNone/>
+            </a:pPr>
+            <a:r>
+              <a:rPr lang="en-US" sz="1000" dirty="0">
+                <a:solidFill>
+                  <a:schemeClr val="tx2"/>
+                </a:solidFill>
+              </a:rPr>
+              <a:t>13</a:t>
+            </a:r>
+            <a:endParaRPr lang="en-US" sz="1000" dirty="0"/>
+          </a:p>
+        </p:txBody>
+      </p:sp>
+      <p:sp>
+        <p:nvSpPr>
+          <p:cNvPr id="73" name="post-13"/>
+          <p:cNvSpPr/>
+          <p:nvPr/>
+        </p:nvSpPr>
+        <p:spPr>
+          <a:xfrm>
+            <a:off x="7447135" y="3054096"/>
+            <a:ext cx="1260566" cy="621792"/>
           </a:xfrm>
           <a:prstGeom prst="roundRect">
             <a:avLst>
-              <a:gd name="adj" fmla="val 14815"/>
+              <a:gd name="adj" fmla="val 11765"/>
+            </a:avLst>
+          </a:prstGeom>
+          <a:solidFill>
+            <a:schemeClr val="tx1"/>
+          </a:solidFill>
+          <a:ln w="12700">
+            <a:solidFill>
+              <a:schemeClr val="tx1"/>
+            </a:solidFill>
+            <a:prstDash val="solid"/>
+          </a:ln>
+        </p:spPr>
+      </p:sp>
+      <p:sp>
+        <p:nvSpPr>
+          <p:cNvPr id="74" name="Text 72"/>
+          <p:cNvSpPr txBox="1"/>
+          <p:nvPr/>
+        </p:nvSpPr>
+        <p:spPr>
+          <a:xfrm>
+            <a:off x="7474567" y="3072384"/>
+            <a:ext cx="1004534" cy="585216"/>
+          </a:xfrm>
+          <a:prstGeom prst="rect">
+            <a:avLst/>
+          </a:prstGeom>
+          <a:noFill/>
+          <a:ln/>
+        </p:spPr>
+        <p:txBody>
+          <a:bodyPr wrap="square" lIns="0" tIns="0" rIns="0" bIns="0" rtlCol="0" anchor="ctr">
+            <a:normAutofit/>
+          </a:bodyPr>
+          <a:lstStyle/>
+          <a:p>
+            <a:pPr algn="ctr" indent="0" marL="0">
+              <a:buNone/>
+            </a:pPr>
+            <a:r>
+              <a:rPr lang="en-US" sz="1100" b="1" dirty="0">
+                <a:solidFill>
+                  <a:schemeClr val="bg1"/>
+                </a:solidFill>
+              </a:rPr>
+              <a:t>Como levar a FairHealth para sua empresa?</a:t>
+            </a:r>
+            <a:endParaRPr lang="en-US" sz="1100" dirty="0"/>
+          </a:p>
+        </p:txBody>
+      </p:sp>
+      <p:sp>
+        <p:nvSpPr>
+          <p:cNvPr id="75" name="tipo-13"/>
+          <p:cNvSpPr/>
+          <p:nvPr/>
+        </p:nvSpPr>
+        <p:spPr>
+          <a:xfrm>
+            <a:off x="8506533" y="3090672"/>
+            <a:ext cx="164592" cy="164592"/>
+          </a:xfrm>
+          <a:prstGeom prst="ellipse">
+            <a:avLst/>
+          </a:prstGeom>
+          <a:solidFill>
+            <a:schemeClr val="bg1"/>
+          </a:solidFill>
+          <a:ln w="9525">
+            <a:solidFill>
+              <a:schemeClr val="tx1"/>
+            </a:solidFill>
+            <a:prstDash val="solid"/>
+          </a:ln>
+        </p:spPr>
+      </p:sp>
+      <p:sp>
+        <p:nvSpPr>
+          <p:cNvPr id="76" name="Text 74"/>
+          <p:cNvSpPr txBox="1"/>
+          <p:nvPr/>
+        </p:nvSpPr>
+        <p:spPr>
+          <a:xfrm>
+            <a:off x="8506533" y="3090672"/>
+            <a:ext cx="164592" cy="164592"/>
+          </a:xfrm>
+          <a:prstGeom prst="rect">
+            <a:avLst/>
+          </a:prstGeom>
+          <a:noFill/>
+          <a:ln/>
+        </p:spPr>
+        <p:txBody>
+          <a:bodyPr wrap="square" lIns="0" tIns="0" rIns="0" bIns="0" rtlCol="0" anchor="ctr"/>
+          <a:lstStyle/>
+          <a:p>
+            <a:pPr algn="ctr" indent="0" marL="0">
+              <a:buNone/>
+            </a:pPr>
+            <a:r>
+              <a:rPr lang="en-US" sz="800" b="1" dirty="0">
+                <a:solidFill>
+                  <a:schemeClr val="tx1"/>
+                </a:solidFill>
+              </a:rPr>
+              <a:t>P</a:t>
+            </a:r>
+            <a:endParaRPr lang="en-US" sz="800" dirty="0"/>
+          </a:p>
+        </p:txBody>
+      </p:sp>
+      <p:sp>
+        <p:nvSpPr>
+          <p:cNvPr id="77" name="celula-14/11"/>
+          <p:cNvSpPr/>
+          <p:nvPr/>
+        </p:nvSpPr>
+        <p:spPr>
+          <a:xfrm>
+            <a:off x="8771709" y="2834640"/>
+            <a:ext cx="1388582" cy="896112"/>
+          </a:xfrm>
+          <a:prstGeom prst="rect">
+            <a:avLst/>
+          </a:prstGeom>
+          <a:solidFill>
+            <a:schemeClr val="bg2"/>
+          </a:solidFill>
+          <a:ln w="9525">
+            <a:solidFill>
+              <a:srgbClr val="A9CFC6"/>
+            </a:solidFill>
+            <a:prstDash val="solid"/>
+          </a:ln>
+        </p:spPr>
+      </p:sp>
+      <p:sp>
+        <p:nvSpPr>
+          <p:cNvPr id="78" name="Text 76"/>
+          <p:cNvSpPr txBox="1"/>
+          <p:nvPr/>
+        </p:nvSpPr>
+        <p:spPr>
+          <a:xfrm>
+            <a:off x="8835717" y="2871216"/>
+            <a:ext cx="365760" cy="182880"/>
+          </a:xfrm>
+          <a:prstGeom prst="rect">
+            <a:avLst/>
+          </a:prstGeom>
+          <a:noFill/>
+          <a:ln/>
+        </p:spPr>
+        <p:txBody>
+          <a:bodyPr wrap="square" lIns="0" tIns="0" rIns="0" bIns="0" rtlCol="0" anchor="ctr"/>
+          <a:lstStyle/>
+          <a:p>
+            <a:pPr indent="0" marL="0">
+              <a:buNone/>
+            </a:pPr>
+            <a:r>
+              <a:rPr lang="en-US" sz="1000" dirty="0">
+                <a:solidFill>
+                  <a:schemeClr val="tx2"/>
+                </a:solidFill>
+              </a:rPr>
+              <a:t>14</a:t>
+            </a:r>
+            <a:endParaRPr lang="en-US" sz="1000" dirty="0"/>
+          </a:p>
+        </p:txBody>
+      </p:sp>
+      <p:sp>
+        <p:nvSpPr>
+          <p:cNvPr id="79" name="Text 77"/>
+          <p:cNvSpPr txBox="1"/>
+          <p:nvPr/>
+        </p:nvSpPr>
+        <p:spPr>
+          <a:xfrm>
+            <a:off x="8835717" y="3090672"/>
+            <a:ext cx="1260566" cy="411480"/>
+          </a:xfrm>
+          <a:prstGeom prst="rect">
+            <a:avLst/>
+          </a:prstGeom>
+          <a:noFill/>
+          <a:ln/>
+        </p:spPr>
+        <p:txBody>
+          <a:bodyPr wrap="square" lIns="0" tIns="0" rIns="0" bIns="0" rtlCol="0" anchor="t"/>
+          <a:lstStyle/>
+          <a:p>
+            <a:pPr indent="0" marL="0">
+              <a:buNone/>
+            </a:pPr>
+            <a:r>
+              <a:rPr lang="en-US" sz="1000" i="1" dirty="0">
+                <a:solidFill>
+                  <a:schemeClr val="tx2"/>
+                </a:solidFill>
+              </a:rPr>
+              <a:t>Dia Mundial do Diabetes</a:t>
+            </a:r>
+            <a:endParaRPr lang="en-US" sz="1000" dirty="0"/>
+          </a:p>
+        </p:txBody>
+      </p:sp>
+      <p:sp>
+        <p:nvSpPr>
+          <p:cNvPr id="80" name="celula-15/11"/>
+          <p:cNvSpPr/>
+          <p:nvPr/>
+        </p:nvSpPr>
+        <p:spPr>
+          <a:xfrm>
+            <a:off x="10160290" y="2834640"/>
+            <a:ext cx="1388582" cy="896112"/>
+          </a:xfrm>
+          <a:prstGeom prst="rect">
+            <a:avLst/>
+          </a:prstGeom>
+          <a:solidFill>
+            <a:schemeClr val="bg2"/>
+          </a:solidFill>
+          <a:ln w="9525">
+            <a:solidFill>
+              <a:srgbClr val="A9CFC6"/>
+            </a:solidFill>
+            <a:prstDash val="solid"/>
+          </a:ln>
+        </p:spPr>
+      </p:sp>
+      <p:sp>
+        <p:nvSpPr>
+          <p:cNvPr id="81" name="Text 79"/>
+          <p:cNvSpPr txBox="1"/>
+          <p:nvPr/>
+        </p:nvSpPr>
+        <p:spPr>
+          <a:xfrm>
+            <a:off x="10224298" y="2871216"/>
+            <a:ext cx="365760" cy="182880"/>
+          </a:xfrm>
+          <a:prstGeom prst="rect">
+            <a:avLst/>
+          </a:prstGeom>
+          <a:noFill/>
+          <a:ln/>
+        </p:spPr>
+        <p:txBody>
+          <a:bodyPr wrap="square" lIns="0" tIns="0" rIns="0" bIns="0" rtlCol="0" anchor="ctr"/>
+          <a:lstStyle/>
+          <a:p>
+            <a:pPr indent="0" marL="0">
+              <a:buNone/>
+            </a:pPr>
+            <a:r>
+              <a:rPr lang="en-US" sz="1000" dirty="0">
+                <a:solidFill>
+                  <a:schemeClr val="tx2"/>
+                </a:solidFill>
+              </a:rPr>
+              <a:t>15</a:t>
+            </a:r>
+            <a:endParaRPr lang="en-US" sz="1000" dirty="0"/>
+          </a:p>
+        </p:txBody>
+      </p:sp>
+      <p:sp>
+        <p:nvSpPr>
+          <p:cNvPr id="82" name="Text 80"/>
+          <p:cNvSpPr txBox="1"/>
+          <p:nvPr/>
+        </p:nvSpPr>
+        <p:spPr>
+          <a:xfrm>
+            <a:off x="10224298" y="3090672"/>
+            <a:ext cx="1260566" cy="411480"/>
+          </a:xfrm>
+          <a:prstGeom prst="rect">
+            <a:avLst/>
+          </a:prstGeom>
+          <a:noFill/>
+          <a:ln/>
+        </p:spPr>
+        <p:txBody>
+          <a:bodyPr wrap="square" lIns="0" tIns="0" rIns="0" bIns="0" rtlCol="0" anchor="t"/>
+          <a:lstStyle/>
+          <a:p>
+            <a:pPr indent="0" marL="0">
+              <a:buNone/>
+            </a:pPr>
+            <a:r>
+              <a:rPr lang="en-US" sz="1000" i="1" dirty="0">
+                <a:solidFill>
+                  <a:schemeClr val="tx2"/>
+                </a:solidFill>
+              </a:rPr>
+              <a:t>Proclamação da República</a:t>
+            </a:r>
+            <a:endParaRPr lang="en-US" sz="1000" dirty="0"/>
+          </a:p>
+        </p:txBody>
+      </p:sp>
+      <p:sp>
+        <p:nvSpPr>
+          <p:cNvPr id="83" name="Text 81"/>
+          <p:cNvSpPr txBox="1"/>
+          <p:nvPr/>
+        </p:nvSpPr>
+        <p:spPr>
+          <a:xfrm>
+            <a:off x="640080" y="3730752"/>
+            <a:ext cx="1143000" cy="896112"/>
+          </a:xfrm>
+          <a:prstGeom prst="rect">
+            <a:avLst/>
+          </a:prstGeom>
+          <a:noFill/>
+          <a:ln/>
+        </p:spPr>
+        <p:txBody>
+          <a:bodyPr wrap="square" lIns="0" tIns="0" rIns="0" bIns="0" rtlCol="0" anchor="ctr"/>
+          <a:lstStyle/>
+          <a:p>
+            <a:pPr indent="0" marL="0">
+              <a:buNone/>
+            </a:pPr>
+            <a:r>
+              <a:rPr lang="en-US" sz="1400" b="1" dirty="0">
+                <a:solidFill>
+                  <a:schemeClr val="tx1"/>
+                </a:solidFill>
+              </a:rPr>
+              <a:t>Semana 5</a:t>
+            </a:r>
+            <a:endParaRPr lang="en-US" sz="1400" dirty="0"/>
+          </a:p>
+          <a:p>
+            <a:pPr indent="0" marL="0">
+              <a:buNone/>
+            </a:pPr>
+            <a:r>
+              <a:rPr lang="en-US" sz="1100" dirty="0">
+                <a:solidFill>
+                  <a:schemeClr val="tx1"/>
+                </a:solidFill>
+              </a:rPr>
+              <a:t>16/11 a 20/11</a:t>
+            </a:r>
+            <a:endParaRPr lang="en-US" sz="1400" dirty="0"/>
+          </a:p>
+        </p:txBody>
+      </p:sp>
+      <p:sp>
+        <p:nvSpPr>
+          <p:cNvPr id="84" name="celula-16/11"/>
+          <p:cNvSpPr/>
+          <p:nvPr/>
+        </p:nvSpPr>
+        <p:spPr>
+          <a:xfrm>
+            <a:off x="1828800" y="3730752"/>
+            <a:ext cx="1388582" cy="896112"/>
+          </a:xfrm>
+          <a:prstGeom prst="rect">
+            <a:avLst/>
+          </a:prstGeom>
+          <a:solidFill>
+            <a:schemeClr val="bg2"/>
+          </a:solidFill>
+          <a:ln w="9525">
+            <a:solidFill>
+              <a:srgbClr val="A9CFC6"/>
+            </a:solidFill>
+            <a:prstDash val="solid"/>
+          </a:ln>
+        </p:spPr>
+      </p:sp>
+      <p:sp>
+        <p:nvSpPr>
+          <p:cNvPr id="85" name="Text 83"/>
+          <p:cNvSpPr txBox="1"/>
+          <p:nvPr/>
+        </p:nvSpPr>
+        <p:spPr>
+          <a:xfrm>
+            <a:off x="1892808" y="3767328"/>
+            <a:ext cx="365760" cy="182880"/>
+          </a:xfrm>
+          <a:prstGeom prst="rect">
+            <a:avLst/>
+          </a:prstGeom>
+          <a:noFill/>
+          <a:ln/>
+        </p:spPr>
+        <p:txBody>
+          <a:bodyPr wrap="square" lIns="0" tIns="0" rIns="0" bIns="0" rtlCol="0" anchor="ctr"/>
+          <a:lstStyle/>
+          <a:p>
+            <a:pPr indent="0" marL="0">
+              <a:buNone/>
+            </a:pPr>
+            <a:r>
+              <a:rPr lang="en-US" sz="1000" dirty="0">
+                <a:solidFill>
+                  <a:schemeClr val="tx2"/>
+                </a:solidFill>
+              </a:rPr>
+              <a:t>16</a:t>
+            </a:r>
+            <a:endParaRPr lang="en-US" sz="1000" dirty="0"/>
+          </a:p>
+        </p:txBody>
+      </p:sp>
+      <p:sp>
+        <p:nvSpPr>
+          <p:cNvPr id="86" name="post-16"/>
+          <p:cNvSpPr/>
+          <p:nvPr/>
+        </p:nvSpPr>
+        <p:spPr>
+          <a:xfrm>
+            <a:off x="1892808" y="3950208"/>
+            <a:ext cx="1260566" cy="621792"/>
+          </a:xfrm>
+          <a:prstGeom prst="roundRect">
+            <a:avLst>
+              <a:gd name="adj" fmla="val 11765"/>
             </a:avLst>
           </a:prstGeom>
           <a:solidFill>
@@ -4503,14 +4684,14 @@
       </p:sp>
       <p:sp>
         <p:nvSpPr>
-          <p:cNvPr id="55" name="Text 53"/>
-          <p:cNvSpPr txBox="1"/>
-          <p:nvPr/>
-        </p:nvSpPr>
-        <p:spPr>
-          <a:xfrm>
-            <a:off x="4697403" y="2944368"/>
-            <a:ext cx="1004534" cy="457200"/>
+          <p:cNvPr id="87" name="Text 85"/>
+          <p:cNvSpPr txBox="1"/>
+          <p:nvPr/>
+        </p:nvSpPr>
+        <p:spPr>
+          <a:xfrm>
+            <a:off x="1920240" y="3968496"/>
+            <a:ext cx="1004534" cy="585216"/>
           </a:xfrm>
           <a:prstGeom prst="rect">
             <a:avLst/>
@@ -4528,26 +4709,26 @@
               <a:buNone/>
             </a:pPr>
             <a:r>
-              <a:rPr lang="en-US" sz="1000" b="1" dirty="0">
+              <a:rPr lang="en-US" sz="1100" b="1" dirty="0">
                 <a:solidFill>
                   <a:schemeClr val="tx1"/>
                 </a:solidFill>
               </a:rPr>
-              <a:t>Quatro frentes, um cuidado conectado</a:t>
-            </a:r>
-            <a:endParaRPr lang="en-US" sz="1000" dirty="0"/>
-          </a:p>
-        </p:txBody>
-      </p:sp>
-      <p:sp>
-        <p:nvSpPr>
-          <p:cNvPr id="56" name="tipo-4"/>
+              <a:t>Novembro Azul: ele só vai ao médico quando dói</a:t>
+            </a:r>
+            <a:endParaRPr lang="en-US" sz="1100" dirty="0"/>
+          </a:p>
+        </p:txBody>
+      </p:sp>
+      <p:sp>
+        <p:nvSpPr>
+          <p:cNvPr id="88" name="tipo-16"/>
           <p:cNvSpPr/>
           <p:nvPr/>
         </p:nvSpPr>
         <p:spPr>
           <a:xfrm>
-            <a:off x="5729369" y="2962656"/>
+            <a:off x="2952206" y="3986784"/>
             <a:ext cx="164592" cy="164592"/>
           </a:xfrm>
           <a:prstGeom prst="ellipse">
@@ -4566,13 +4747,13 @@
       </p:sp>
       <p:sp>
         <p:nvSpPr>
-          <p:cNvPr id="57" name="Text 55"/>
-          <p:cNvSpPr txBox="1"/>
-          <p:nvPr/>
-        </p:nvSpPr>
-        <p:spPr>
-          <a:xfrm>
-            <a:off x="5729369" y="2962656"/>
+          <p:cNvPr id="89" name="Text 87"/>
+          <p:cNvSpPr txBox="1"/>
+          <p:nvPr/>
+        </p:nvSpPr>
+        <p:spPr>
+          <a:xfrm>
+            <a:off x="2952206" y="3986784"/>
             <a:ext cx="164592" cy="164592"/>
           </a:xfrm>
           <a:prstGeom prst="rect">
@@ -4594,7 +4775,7 @@
                   <a:schemeClr val="tx1"/>
                 </a:solidFill>
               </a:rPr>
-              <a:t>P</a:t>
+              <a:t>E</a:t>
             </a:r>
             <a:endParaRPr lang="en-US" sz="800" dirty="0"/>
           </a:p>
@@ -4602,14 +4783,14 @@
       </p:sp>
       <p:sp>
         <p:nvSpPr>
-          <p:cNvPr id="58" name="celula-05/11"/>
+          <p:cNvPr id="90" name="celula-17/11"/>
           <p:cNvSpPr/>
           <p:nvPr/>
         </p:nvSpPr>
         <p:spPr>
           <a:xfrm>
-            <a:off x="5994545" y="2706624"/>
-            <a:ext cx="1388582" cy="768096"/>
+            <a:off x="3217382" y="3730752"/>
+            <a:ext cx="1388582" cy="896112"/>
           </a:xfrm>
           <a:prstGeom prst="rect">
             <a:avLst/>
@@ -4627,13 +4808,13 @@
       </p:sp>
       <p:sp>
         <p:nvSpPr>
-          <p:cNvPr id="59" name="Text 57"/>
-          <p:cNvSpPr txBox="1"/>
-          <p:nvPr/>
-        </p:nvSpPr>
-        <p:spPr>
-          <a:xfrm>
-            <a:off x="6058553" y="2743200"/>
+          <p:cNvPr id="91" name="Text 89"/>
+          <p:cNvSpPr txBox="1"/>
+          <p:nvPr/>
+        </p:nvSpPr>
+        <p:spPr>
+          <a:xfrm>
+            <a:off x="3281390" y="3767328"/>
             <a:ext cx="365760" cy="182880"/>
           </a:xfrm>
           <a:prstGeom prst="rect">
@@ -4655,7 +4836,7 @@
                   <a:schemeClr val="tx2"/>
                 </a:solidFill>
               </a:rPr>
-              <a:t>05</a:t>
+              <a:t>17</a:t>
             </a:r>
             <a:endParaRPr lang="en-US" sz="1000" dirty="0"/>
           </a:p>
@@ -4663,14 +4844,14 @@
       </p:sp>
       <p:sp>
         <p:nvSpPr>
-          <p:cNvPr id="60" name="celula-06/11"/>
+          <p:cNvPr id="92" name="celula-18/11"/>
           <p:cNvSpPr/>
           <p:nvPr/>
         </p:nvSpPr>
         <p:spPr>
           <a:xfrm>
-            <a:off x="7383127" y="2706624"/>
-            <a:ext cx="1388582" cy="768096"/>
+            <a:off x="4605963" y="3730752"/>
+            <a:ext cx="1388582" cy="896112"/>
           </a:xfrm>
           <a:prstGeom prst="rect">
             <a:avLst/>
@@ -4688,13 +4869,13 @@
       </p:sp>
       <p:sp>
         <p:nvSpPr>
-          <p:cNvPr id="61" name="Text 59"/>
-          <p:cNvSpPr txBox="1"/>
-          <p:nvPr/>
-        </p:nvSpPr>
-        <p:spPr>
-          <a:xfrm>
-            <a:off x="7447135" y="2743200"/>
+          <p:cNvPr id="93" name="Text 91"/>
+          <p:cNvSpPr txBox="1"/>
+          <p:nvPr/>
+        </p:nvSpPr>
+        <p:spPr>
+          <a:xfrm>
+            <a:off x="4669971" y="3767328"/>
             <a:ext cx="365760" cy="182880"/>
           </a:xfrm>
           <a:prstGeom prst="rect">
@@ -4716,7 +4897,7 @@
                   <a:schemeClr val="tx2"/>
                 </a:solidFill>
               </a:rPr>
-              <a:t>06</a:t>
+              <a:t>18</a:t>
             </a:r>
             <a:endParaRPr lang="en-US" sz="1000" dirty="0"/>
           </a:p>
@@ -4724,18 +4905,18 @@
       </p:sp>
       <p:sp>
         <p:nvSpPr>
-          <p:cNvPr id="62" name="post-6"/>
+          <p:cNvPr id="94" name="post-18"/>
           <p:cNvSpPr/>
           <p:nvPr/>
         </p:nvSpPr>
         <p:spPr>
           <a:xfrm>
-            <a:off x="7447135" y="2926080"/>
-            <a:ext cx="1260566" cy="493776"/>
+            <a:off x="4669971" y="3950208"/>
+            <a:ext cx="1260566" cy="621792"/>
           </a:xfrm>
           <a:prstGeom prst="roundRect">
             <a:avLst>
-              <a:gd name="adj" fmla="val 14815"/>
+              <a:gd name="adj" fmla="val 11765"/>
             </a:avLst>
           </a:prstGeom>
           <a:solidFill>
@@ -4751,14 +4932,14 @@
       </p:sp>
       <p:sp>
         <p:nvSpPr>
-          <p:cNvPr id="63" name="Text 61"/>
-          <p:cNvSpPr txBox="1"/>
-          <p:nvPr/>
-        </p:nvSpPr>
-        <p:spPr>
-          <a:xfrm>
-            <a:off x="7474567" y="2944368"/>
-            <a:ext cx="1004534" cy="457200"/>
+          <p:cNvPr id="95" name="Text 93"/>
+          <p:cNvSpPr txBox="1"/>
+          <p:nvPr/>
+        </p:nvSpPr>
+        <p:spPr>
+          <a:xfrm>
+            <a:off x="4697403" y="3968496"/>
+            <a:ext cx="1004534" cy="585216"/>
           </a:xfrm>
           <a:prstGeom prst="rect">
             <a:avLst/>
@@ -4776,26 +4957,26 @@
               <a:buNone/>
             </a:pPr>
             <a:r>
-              <a:rPr lang="en-US" sz="1000" b="1" dirty="0">
+              <a:rPr lang="en-US" sz="1100" b="1" dirty="0">
                 <a:solidFill>
                   <a:schemeClr val="bg1"/>
                 </a:solidFill>
               </a:rPr>
-              <a:t>Uma história de cuidado desde 2009</a:t>
-            </a:r>
-            <a:endParaRPr lang="en-US" sz="1000" dirty="0"/>
-          </a:p>
-        </p:txBody>
-      </p:sp>
-      <p:sp>
-        <p:nvSpPr>
-          <p:cNvPr id="64" name="tipo-6"/>
+              <a:t>Afastamentos por saúde mental e a NR-01</a:t>
+            </a:r>
+            <a:endParaRPr lang="en-US" sz="1100" dirty="0"/>
+          </a:p>
+        </p:txBody>
+      </p:sp>
+      <p:sp>
+        <p:nvSpPr>
+          <p:cNvPr id="96" name="tipo-18"/>
           <p:cNvSpPr/>
           <p:nvPr/>
         </p:nvSpPr>
         <p:spPr>
           <a:xfrm>
-            <a:off x="8506533" y="2962656"/>
+            <a:off x="5729369" y="3986784"/>
             <a:ext cx="164592" cy="164592"/>
           </a:xfrm>
           <a:prstGeom prst="ellipse">
@@ -4814,13 +4995,13 @@
       </p:sp>
       <p:sp>
         <p:nvSpPr>
-          <p:cNvPr id="65" name="Text 63"/>
-          <p:cNvSpPr txBox="1"/>
-          <p:nvPr/>
-        </p:nvSpPr>
-        <p:spPr>
-          <a:xfrm>
-            <a:off x="8506533" y="2962656"/>
+          <p:cNvPr id="97" name="Text 95"/>
+          <p:cNvSpPr txBox="1"/>
+          <p:nvPr/>
+        </p:nvSpPr>
+        <p:spPr>
+          <a:xfrm>
+            <a:off x="5729369" y="3986784"/>
             <a:ext cx="164592" cy="164592"/>
           </a:xfrm>
           <a:prstGeom prst="rect">
@@ -4842,7 +5023,7 @@
                   <a:schemeClr val="tx1"/>
                 </a:solidFill>
               </a:rPr>
-              <a:t>I</a:t>
+              <a:t>P</a:t>
             </a:r>
             <a:endParaRPr lang="en-US" sz="800" dirty="0"/>
           </a:p>
@@ -4850,14 +5031,14 @@
       </p:sp>
       <p:sp>
         <p:nvSpPr>
-          <p:cNvPr id="66" name="celula-07/11"/>
+          <p:cNvPr id="98" name="celula-19/11"/>
           <p:cNvSpPr/>
           <p:nvPr/>
         </p:nvSpPr>
         <p:spPr>
           <a:xfrm>
-            <a:off x="8771709" y="2706624"/>
-            <a:ext cx="1388582" cy="768096"/>
+            <a:off x="5994545" y="3730752"/>
+            <a:ext cx="1388582" cy="896112"/>
           </a:xfrm>
           <a:prstGeom prst="rect">
             <a:avLst/>
@@ -4875,13 +5056,13 @@
       </p:sp>
       <p:sp>
         <p:nvSpPr>
-          <p:cNvPr id="67" name="Text 65"/>
-          <p:cNvSpPr txBox="1"/>
-          <p:nvPr/>
-        </p:nvSpPr>
-        <p:spPr>
-          <a:xfrm>
-            <a:off x="8835717" y="2743200"/>
+          <p:cNvPr id="99" name="Text 97"/>
+          <p:cNvSpPr txBox="1"/>
+          <p:nvPr/>
+        </p:nvSpPr>
+        <p:spPr>
+          <a:xfrm>
+            <a:off x="6058553" y="3767328"/>
             <a:ext cx="365760" cy="182880"/>
           </a:xfrm>
           <a:prstGeom prst="rect">
@@ -4903,7 +5084,7 @@
                   <a:schemeClr val="tx2"/>
                 </a:solidFill>
               </a:rPr>
-              <a:t>07</a:t>
+              <a:t>19</a:t>
             </a:r>
             <a:endParaRPr lang="en-US" sz="1000" dirty="0"/>
           </a:p>
@@ -4911,14 +5092,140 @@
       </p:sp>
       <p:sp>
         <p:nvSpPr>
-          <p:cNvPr id="68" name="celula-08/11"/>
+          <p:cNvPr id="100" name="post-19"/>
           <p:cNvSpPr/>
           <p:nvPr/>
         </p:nvSpPr>
         <p:spPr>
           <a:xfrm>
-            <a:off x="10160290" y="2706624"/>
-            <a:ext cx="1388582" cy="768096"/>
+            <a:off x="6058553" y="3950208"/>
+            <a:ext cx="1260566" cy="621792"/>
+          </a:xfrm>
+          <a:prstGeom prst="roundRect">
+            <a:avLst>
+              <a:gd name="adj" fmla="val 11765"/>
+            </a:avLst>
+          </a:prstGeom>
+          <a:solidFill>
+            <a:schemeClr val="bg1"/>
+          </a:solidFill>
+          <a:ln w="12700">
+            <a:solidFill>
+              <a:schemeClr val="tx1"/>
+            </a:solidFill>
+            <a:prstDash val="solid"/>
+          </a:ln>
+        </p:spPr>
+      </p:sp>
+      <p:sp>
+        <p:nvSpPr>
+          <p:cNvPr id="101" name="Text 99"/>
+          <p:cNvSpPr txBox="1"/>
+          <p:nvPr/>
+        </p:nvSpPr>
+        <p:spPr>
+          <a:xfrm>
+            <a:off x="6085985" y="3968496"/>
+            <a:ext cx="1004534" cy="585216"/>
+          </a:xfrm>
+          <a:prstGeom prst="rect">
+            <a:avLst/>
+          </a:prstGeom>
+          <a:noFill/>
+          <a:ln/>
+        </p:spPr>
+        <p:txBody>
+          <a:bodyPr wrap="square" lIns="0" tIns="0" rIns="0" bIns="0" rtlCol="0" anchor="ctr">
+            <a:normAutofit/>
+          </a:bodyPr>
+          <a:lstStyle/>
+          <a:p>
+            <a:pPr algn="ctr" indent="0" marL="0">
+              <a:buNone/>
+            </a:pPr>
+            <a:r>
+              <a:rPr lang="en-US" sz="1100" b="1" dirty="0">
+                <a:solidFill>
+                  <a:schemeClr val="tx1"/>
+                </a:solidFill>
+              </a:rPr>
+              <a:t>Depoimento: “Os meus hábitos mudaram”</a:t>
+            </a:r>
+            <a:endParaRPr lang="en-US" sz="1100" dirty="0"/>
+          </a:p>
+        </p:txBody>
+      </p:sp>
+      <p:sp>
+        <p:nvSpPr>
+          <p:cNvPr id="102" name="tipo-19"/>
+          <p:cNvSpPr/>
+          <p:nvPr/>
+        </p:nvSpPr>
+        <p:spPr>
+          <a:xfrm>
+            <a:off x="7117951" y="3986784"/>
+            <a:ext cx="164592" cy="164592"/>
+          </a:xfrm>
+          <a:prstGeom prst="ellipse">
+            <a:avLst/>
+          </a:prstGeom>
+          <a:solidFill>
+            <a:schemeClr val="bg1"/>
+          </a:solidFill>
+          <a:ln w="9525">
+            <a:solidFill>
+              <a:schemeClr val="tx1"/>
+            </a:solidFill>
+            <a:prstDash val="solid"/>
+          </a:ln>
+        </p:spPr>
+      </p:sp>
+      <p:sp>
+        <p:nvSpPr>
+          <p:cNvPr id="103" name="Text 101"/>
+          <p:cNvSpPr txBox="1"/>
+          <p:nvPr/>
+        </p:nvSpPr>
+        <p:spPr>
+          <a:xfrm>
+            <a:off x="7117951" y="3986784"/>
+            <a:ext cx="164592" cy="164592"/>
+          </a:xfrm>
+          <a:prstGeom prst="rect">
+            <a:avLst/>
+          </a:prstGeom>
+          <a:noFill/>
+          <a:ln/>
+        </p:spPr>
+        <p:txBody>
+          <a:bodyPr wrap="square" lIns="0" tIns="0" rIns="0" bIns="0" rtlCol="0" anchor="ctr"/>
+          <a:lstStyle/>
+          <a:p>
+            <a:pPr algn="ctr" indent="0" marL="0">
+              <a:buNone/>
+            </a:pPr>
+            <a:r>
+              <a:rPr lang="en-US" sz="800" b="1" dirty="0">
+                <a:solidFill>
+                  <a:schemeClr val="tx1"/>
+                </a:solidFill>
+              </a:rPr>
+              <a:t>P</a:t>
+            </a:r>
+            <a:endParaRPr lang="en-US" sz="800" dirty="0"/>
+          </a:p>
+        </p:txBody>
+      </p:sp>
+      <p:sp>
+        <p:nvSpPr>
+          <p:cNvPr id="104" name="celula-20/11"/>
+          <p:cNvSpPr/>
+          <p:nvPr/>
+        </p:nvSpPr>
+        <p:spPr>
+          <a:xfrm>
+            <a:off x="7383127" y="3730752"/>
+            <a:ext cx="1388582" cy="896112"/>
           </a:xfrm>
           <a:prstGeom prst="rect">
             <a:avLst/>
@@ -4936,13 +5243,13 @@
       </p:sp>
       <p:sp>
         <p:nvSpPr>
-          <p:cNvPr id="69" name="Text 67"/>
-          <p:cNvSpPr txBox="1"/>
-          <p:nvPr/>
-        </p:nvSpPr>
-        <p:spPr>
-          <a:xfrm>
-            <a:off x="10224298" y="2743200"/>
+          <p:cNvPr id="105" name="Text 103"/>
+          <p:cNvSpPr txBox="1"/>
+          <p:nvPr/>
+        </p:nvSpPr>
+        <p:spPr>
+          <a:xfrm>
+            <a:off x="7447135" y="3767328"/>
             <a:ext cx="365760" cy="182880"/>
           </a:xfrm>
           <a:prstGeom prst="rect">
@@ -4964,7 +5271,7 @@
                   <a:schemeClr val="tx2"/>
                 </a:solidFill>
               </a:rPr>
-              <a:t>08</a:t>
+              <a:t>20</a:t>
             </a:r>
             <a:endParaRPr lang="en-US" sz="1000" dirty="0"/>
           </a:p>
@@ -4972,64 +5279,50 @@
       </p:sp>
       <p:sp>
         <p:nvSpPr>
-          <p:cNvPr id="70" name="Text 68"/>
-          <p:cNvSpPr txBox="1"/>
-          <p:nvPr/>
-        </p:nvSpPr>
-        <p:spPr>
-          <a:xfrm>
-            <a:off x="640080" y="3474720"/>
-            <a:ext cx="1143000" cy="768096"/>
-          </a:xfrm>
-          <a:prstGeom prst="rect">
-            <a:avLst/>
-          </a:prstGeom>
-          <a:noFill/>
-          <a:ln/>
-        </p:spPr>
-        <p:txBody>
-          <a:bodyPr wrap="square" lIns="0" tIns="0" rIns="0" bIns="0" rtlCol="0" anchor="ctr"/>
-          <a:lstStyle/>
-          <a:p>
-            <a:pPr indent="0" marL="0">
-              <a:buNone/>
-            </a:pPr>
-            <a:r>
-              <a:rPr lang="en-US" sz="1400" b="1" dirty="0">
-                <a:solidFill>
-                  <a:schemeClr val="tx1"/>
-                </a:solidFill>
-              </a:rPr>
-              <a:t>Semana 4</a:t>
-            </a:r>
-            <a:endParaRPr lang="en-US" sz="1400" dirty="0"/>
-          </a:p>
-          <a:p>
-            <a:pPr indent="0" marL="0">
-              <a:buNone/>
-            </a:pPr>
-            <a:r>
-              <a:rPr lang="en-US" sz="1100" dirty="0">
-                <a:solidFill>
-                  <a:schemeClr val="tx1"/>
-                </a:solidFill>
-              </a:rPr>
-              <a:t>09/11 a 13/11</a:t>
-            </a:r>
-            <a:endParaRPr lang="en-US" sz="1400" dirty="0"/>
-          </a:p>
-        </p:txBody>
-      </p:sp>
-      <p:sp>
-        <p:nvSpPr>
-          <p:cNvPr id="71" name="celula-09/11"/>
+          <p:cNvPr id="106" name="Text 104"/>
+          <p:cNvSpPr txBox="1"/>
+          <p:nvPr/>
+        </p:nvSpPr>
+        <p:spPr>
+          <a:xfrm>
+            <a:off x="7447135" y="3986784"/>
+            <a:ext cx="1260566" cy="411480"/>
+          </a:xfrm>
+          <a:prstGeom prst="rect">
+            <a:avLst/>
+          </a:prstGeom>
+          <a:noFill/>
+          <a:ln/>
+        </p:spPr>
+        <p:txBody>
+          <a:bodyPr wrap="square" lIns="0" tIns="0" rIns="0" bIns="0" rtlCol="0" anchor="t"/>
+          <a:lstStyle/>
+          <a:p>
+            <a:pPr indent="0" marL="0">
+              <a:buNone/>
+            </a:pPr>
+            <a:r>
+              <a:rPr lang="en-US" sz="1000" i="1" dirty="0">
+                <a:solidFill>
+                  <a:schemeClr val="tx2"/>
+                </a:solidFill>
+              </a:rPr>
+              <a:t>Consciência Negra (feriado)</a:t>
+            </a:r>
+            <a:endParaRPr lang="en-US" sz="1000" dirty="0"/>
+          </a:p>
+        </p:txBody>
+      </p:sp>
+      <p:sp>
+        <p:nvSpPr>
+          <p:cNvPr id="107" name="celula-21/11"/>
           <p:cNvSpPr/>
           <p:nvPr/>
         </p:nvSpPr>
         <p:spPr>
           <a:xfrm>
-            <a:off x="1828800" y="3474720"/>
-            <a:ext cx="1388582" cy="768096"/>
+            <a:off x="8771709" y="3730752"/>
+            <a:ext cx="1388582" cy="896112"/>
           </a:xfrm>
           <a:prstGeom prst="rect">
             <a:avLst/>
@@ -5047,13 +5340,13 @@
       </p:sp>
       <p:sp>
         <p:nvSpPr>
-          <p:cNvPr id="72" name="Text 70"/>
-          <p:cNvSpPr txBox="1"/>
-          <p:nvPr/>
-        </p:nvSpPr>
-        <p:spPr>
-          <a:xfrm>
-            <a:off x="1892808" y="3511296"/>
+          <p:cNvPr id="108" name="Text 106"/>
+          <p:cNvSpPr txBox="1"/>
+          <p:nvPr/>
+        </p:nvSpPr>
+        <p:spPr>
+          <a:xfrm>
+            <a:off x="8835717" y="3767328"/>
             <a:ext cx="365760" cy="182880"/>
           </a:xfrm>
           <a:prstGeom prst="rect">
@@ -5075,7 +5368,7 @@
                   <a:schemeClr val="tx2"/>
                 </a:solidFill>
               </a:rPr>
-              <a:t>09</a:t>
+              <a:t>21</a:t>
             </a:r>
             <a:endParaRPr lang="en-US" sz="1000" dirty="0"/>
           </a:p>
@@ -5083,18 +5376,190 @@
       </p:sp>
       <p:sp>
         <p:nvSpPr>
-          <p:cNvPr id="73" name="post-9"/>
+          <p:cNvPr id="109" name="celula-22/11"/>
           <p:cNvSpPr/>
           <p:nvPr/>
         </p:nvSpPr>
         <p:spPr>
           <a:xfrm>
-            <a:off x="1892808" y="3694176"/>
-            <a:ext cx="1260566" cy="493776"/>
+            <a:off x="10160290" y="3730752"/>
+            <a:ext cx="1388582" cy="896112"/>
+          </a:xfrm>
+          <a:prstGeom prst="rect">
+            <a:avLst/>
+          </a:prstGeom>
+          <a:solidFill>
+            <a:schemeClr val="bg2"/>
+          </a:solidFill>
+          <a:ln w="9525">
+            <a:solidFill>
+              <a:srgbClr val="A9CFC6"/>
+            </a:solidFill>
+            <a:prstDash val="solid"/>
+          </a:ln>
+        </p:spPr>
+      </p:sp>
+      <p:sp>
+        <p:nvSpPr>
+          <p:cNvPr id="110" name="Text 108"/>
+          <p:cNvSpPr txBox="1"/>
+          <p:nvPr/>
+        </p:nvSpPr>
+        <p:spPr>
+          <a:xfrm>
+            <a:off x="10224298" y="3767328"/>
+            <a:ext cx="365760" cy="182880"/>
+          </a:xfrm>
+          <a:prstGeom prst="rect">
+            <a:avLst/>
+          </a:prstGeom>
+          <a:noFill/>
+          <a:ln/>
+        </p:spPr>
+        <p:txBody>
+          <a:bodyPr wrap="square" lIns="0" tIns="0" rIns="0" bIns="0" rtlCol="0" anchor="ctr"/>
+          <a:lstStyle/>
+          <a:p>
+            <a:pPr indent="0" marL="0">
+              <a:buNone/>
+            </a:pPr>
+            <a:r>
+              <a:rPr lang="en-US" sz="1000" dirty="0">
+                <a:solidFill>
+                  <a:schemeClr val="tx2"/>
+                </a:solidFill>
+              </a:rPr>
+              <a:t>22</a:t>
+            </a:r>
+            <a:endParaRPr lang="en-US" sz="1000" dirty="0"/>
+          </a:p>
+        </p:txBody>
+      </p:sp>
+      <p:sp>
+        <p:nvSpPr>
+          <p:cNvPr id="111" name="Text 109"/>
+          <p:cNvSpPr txBox="1"/>
+          <p:nvPr/>
+        </p:nvSpPr>
+        <p:spPr>
+          <a:xfrm>
+            <a:off x="640080" y="4626864"/>
+            <a:ext cx="1143000" cy="896112"/>
+          </a:xfrm>
+          <a:prstGeom prst="rect">
+            <a:avLst/>
+          </a:prstGeom>
+          <a:noFill/>
+          <a:ln/>
+        </p:spPr>
+        <p:txBody>
+          <a:bodyPr wrap="square" lIns="0" tIns="0" rIns="0" bIns="0" rtlCol="0" anchor="ctr"/>
+          <a:lstStyle/>
+          <a:p>
+            <a:pPr indent="0" marL="0">
+              <a:buNone/>
+            </a:pPr>
+            <a:r>
+              <a:rPr lang="en-US" sz="1400" b="1" dirty="0">
+                <a:solidFill>
+                  <a:schemeClr val="tx1"/>
+                </a:solidFill>
+              </a:rPr>
+              <a:t>Semana 6</a:t>
+            </a:r>
+            <a:endParaRPr lang="en-US" sz="1400" dirty="0"/>
+          </a:p>
+          <a:p>
+            <a:pPr indent="0" marL="0">
+              <a:buNone/>
+            </a:pPr>
+            <a:r>
+              <a:rPr lang="en-US" sz="1100" dirty="0">
+                <a:solidFill>
+                  <a:schemeClr val="tx1"/>
+                </a:solidFill>
+              </a:rPr>
+              <a:t>23/11 a 27/11</a:t>
+            </a:r>
+            <a:endParaRPr lang="en-US" sz="1400" dirty="0"/>
+          </a:p>
+        </p:txBody>
+      </p:sp>
+      <p:sp>
+        <p:nvSpPr>
+          <p:cNvPr id="112" name="celula-23/11"/>
+          <p:cNvSpPr/>
+          <p:nvPr/>
+        </p:nvSpPr>
+        <p:spPr>
+          <a:xfrm>
+            <a:off x="1828800" y="4626864"/>
+            <a:ext cx="1388582" cy="896112"/>
+          </a:xfrm>
+          <a:prstGeom prst="rect">
+            <a:avLst/>
+          </a:prstGeom>
+          <a:solidFill>
+            <a:schemeClr val="bg2"/>
+          </a:solidFill>
+          <a:ln w="9525">
+            <a:solidFill>
+              <a:srgbClr val="A9CFC6"/>
+            </a:solidFill>
+            <a:prstDash val="solid"/>
+          </a:ln>
+        </p:spPr>
+      </p:sp>
+      <p:sp>
+        <p:nvSpPr>
+          <p:cNvPr id="113" name="Text 111"/>
+          <p:cNvSpPr txBox="1"/>
+          <p:nvPr/>
+        </p:nvSpPr>
+        <p:spPr>
+          <a:xfrm>
+            <a:off x="1892808" y="4663440"/>
+            <a:ext cx="365760" cy="182880"/>
+          </a:xfrm>
+          <a:prstGeom prst="rect">
+            <a:avLst/>
+          </a:prstGeom>
+          <a:noFill/>
+          <a:ln/>
+        </p:spPr>
+        <p:txBody>
+          <a:bodyPr wrap="square" lIns="0" tIns="0" rIns="0" bIns="0" rtlCol="0" anchor="ctr"/>
+          <a:lstStyle/>
+          <a:p>
+            <a:pPr indent="0" marL="0">
+              <a:buNone/>
+            </a:pPr>
+            <a:r>
+              <a:rPr lang="en-US" sz="1000" dirty="0">
+                <a:solidFill>
+                  <a:schemeClr val="tx2"/>
+                </a:solidFill>
+              </a:rPr>
+              <a:t>23</a:t>
+            </a:r>
+            <a:endParaRPr lang="en-US" sz="1000" dirty="0"/>
+          </a:p>
+        </p:txBody>
+      </p:sp>
+      <p:sp>
+        <p:nvSpPr>
+          <p:cNvPr id="114" name="post-23"/>
+          <p:cNvSpPr/>
+          <p:nvPr/>
+        </p:nvSpPr>
+        <p:spPr>
+          <a:xfrm>
+            <a:off x="1892808" y="4846320"/>
+            <a:ext cx="1260566" cy="621792"/>
           </a:xfrm>
           <a:prstGeom prst="roundRect">
             <a:avLst>
-              <a:gd name="adj" fmla="val 14815"/>
+              <a:gd name="adj" fmla="val 11765"/>
             </a:avLst>
           </a:prstGeom>
           <a:solidFill>
@@ -5110,14 +5575,14 @@
       </p:sp>
       <p:sp>
         <p:nvSpPr>
-          <p:cNvPr id="74" name="Text 72"/>
-          <p:cNvSpPr txBox="1"/>
-          <p:nvPr/>
-        </p:nvSpPr>
-        <p:spPr>
-          <a:xfrm>
-            <a:off x="1920240" y="3712464"/>
-            <a:ext cx="1004534" cy="457200"/>
+          <p:cNvPr id="115" name="Text 113"/>
+          <p:cNvSpPr txBox="1"/>
+          <p:nvPr/>
+        </p:nvSpPr>
+        <p:spPr>
+          <a:xfrm>
+            <a:off x="1920240" y="4864608"/>
+            <a:ext cx="1004534" cy="585216"/>
           </a:xfrm>
           <a:prstGeom prst="rect">
             <a:avLst/>
@@ -5135,26 +5600,26 @@
               <a:buNone/>
             </a:pPr>
             <a:r>
-              <a:rPr lang="en-US" sz="1000" b="1" dirty="0">
+              <a:rPr lang="en-US" sz="1100" b="1" dirty="0">
                 <a:solidFill>
                   <a:schemeClr val="tx1"/>
                 </a:solidFill>
               </a:rPr>
-              <a:t>Cuidado na prática: resultados reais</a:t>
-            </a:r>
-            <a:endParaRPr lang="en-US" sz="1000" dirty="0"/>
-          </a:p>
-        </p:txBody>
-      </p:sp>
-      <p:sp>
-        <p:nvSpPr>
-          <p:cNvPr id="75" name="tipo-9"/>
+              <a:t>O RH cuida de todo mundo. Quem cuida do RH?</a:t>
+            </a:r>
+            <a:endParaRPr lang="en-US" sz="1100" dirty="0"/>
+          </a:p>
+        </p:txBody>
+      </p:sp>
+      <p:sp>
+        <p:nvSpPr>
+          <p:cNvPr id="116" name="tipo-23"/>
           <p:cNvSpPr/>
           <p:nvPr/>
         </p:nvSpPr>
         <p:spPr>
           <a:xfrm>
-            <a:off x="2952206" y="3730752"/>
+            <a:off x="2952206" y="4882896"/>
             <a:ext cx="164592" cy="164592"/>
           </a:xfrm>
           <a:prstGeom prst="ellipse">
@@ -5173,13 +5638,13 @@
       </p:sp>
       <p:sp>
         <p:nvSpPr>
-          <p:cNvPr id="76" name="Text 74"/>
-          <p:cNvSpPr txBox="1"/>
-          <p:nvPr/>
-        </p:nvSpPr>
-        <p:spPr>
-          <a:xfrm>
-            <a:off x="2952206" y="3730752"/>
+          <p:cNvPr id="117" name="Text 115"/>
+          <p:cNvSpPr txBox="1"/>
+          <p:nvPr/>
+        </p:nvSpPr>
+        <p:spPr>
+          <a:xfrm>
+            <a:off x="2952206" y="4882896"/>
             <a:ext cx="164592" cy="164592"/>
           </a:xfrm>
           <a:prstGeom prst="rect">
@@ -5209,14 +5674,14 @@
       </p:sp>
       <p:sp>
         <p:nvSpPr>
-          <p:cNvPr id="77" name="celula-10/11"/>
+          <p:cNvPr id="118" name="celula-24/11"/>
           <p:cNvSpPr/>
           <p:nvPr/>
         </p:nvSpPr>
         <p:spPr>
           <a:xfrm>
-            <a:off x="3217382" y="3474720"/>
-            <a:ext cx="1388582" cy="768096"/>
+            <a:off x="3217382" y="4626864"/>
+            <a:ext cx="1388582" cy="896112"/>
           </a:xfrm>
           <a:prstGeom prst="rect">
             <a:avLst/>
@@ -5234,13 +5699,13 @@
       </p:sp>
       <p:sp>
         <p:nvSpPr>
-          <p:cNvPr id="78" name="Text 76"/>
-          <p:cNvSpPr txBox="1"/>
-          <p:nvPr/>
-        </p:nvSpPr>
-        <p:spPr>
-          <a:xfrm>
-            <a:off x="3281390" y="3511296"/>
+          <p:cNvPr id="119" name="Text 117"/>
+          <p:cNvSpPr txBox="1"/>
+          <p:nvPr/>
+        </p:nvSpPr>
+        <p:spPr>
+          <a:xfrm>
+            <a:off x="3281390" y="4663440"/>
             <a:ext cx="365760" cy="182880"/>
           </a:xfrm>
           <a:prstGeom prst="rect">
@@ -5262,7 +5727,7 @@
                   <a:schemeClr val="tx2"/>
                 </a:solidFill>
               </a:rPr>
-              <a:t>10</a:t>
+              <a:t>24</a:t>
             </a:r>
             <a:endParaRPr lang="en-US" sz="1000" dirty="0"/>
           </a:p>
@@ -5270,14 +5735,14 @@
       </p:sp>
       <p:sp>
         <p:nvSpPr>
-          <p:cNvPr id="79" name="celula-11/11"/>
+          <p:cNvPr id="120" name="celula-25/11"/>
           <p:cNvSpPr/>
           <p:nvPr/>
         </p:nvSpPr>
         <p:spPr>
           <a:xfrm>
-            <a:off x="4605963" y="3474720"/>
-            <a:ext cx="1388582" cy="768096"/>
+            <a:off x="4605963" y="4626864"/>
+            <a:ext cx="1388582" cy="896112"/>
           </a:xfrm>
           <a:prstGeom prst="rect">
             <a:avLst/>
@@ -5295,13 +5760,13 @@
       </p:sp>
       <p:sp>
         <p:nvSpPr>
-          <p:cNvPr id="80" name="Text 78"/>
-          <p:cNvSpPr txBox="1"/>
-          <p:nvPr/>
-        </p:nvSpPr>
-        <p:spPr>
-          <a:xfrm>
-            <a:off x="4669971" y="3511296"/>
+          <p:cNvPr id="121" name="Text 119"/>
+          <p:cNvSpPr txBox="1"/>
+          <p:nvPr/>
+        </p:nvSpPr>
+        <p:spPr>
+          <a:xfrm>
+            <a:off x="4669971" y="4663440"/>
             <a:ext cx="365760" cy="182880"/>
           </a:xfrm>
           <a:prstGeom prst="rect">
@@ -5323,7 +5788,7 @@
                   <a:schemeClr val="tx2"/>
                 </a:solidFill>
               </a:rPr>
-              <a:t>11</a:t>
+              <a:t>25</a:t>
             </a:r>
             <a:endParaRPr lang="en-US" sz="1000" dirty="0"/>
           </a:p>
@@ -5331,18 +5796,18 @@
       </p:sp>
       <p:sp>
         <p:nvSpPr>
-          <p:cNvPr id="81" name="post-11"/>
+          <p:cNvPr id="122" name="post-25"/>
           <p:cNvSpPr/>
           <p:nvPr/>
         </p:nvSpPr>
         <p:spPr>
           <a:xfrm>
-            <a:off x="4669971" y="3694176"/>
-            <a:ext cx="1260566" cy="493776"/>
+            <a:off x="4669971" y="4846320"/>
+            <a:ext cx="1260566" cy="621792"/>
           </a:xfrm>
           <a:prstGeom prst="roundRect">
             <a:avLst>
-              <a:gd name="adj" fmla="val 14815"/>
+              <a:gd name="adj" fmla="val 11765"/>
             </a:avLst>
           </a:prstGeom>
           <a:solidFill>
@@ -5358,14 +5823,14 @@
       </p:sp>
       <p:sp>
         <p:nvSpPr>
-          <p:cNvPr id="82" name="Text 80"/>
-          <p:cNvSpPr txBox="1"/>
-          <p:nvPr/>
-        </p:nvSpPr>
-        <p:spPr>
-          <a:xfrm>
-            <a:off x="4697403" y="3712464"/>
-            <a:ext cx="1004534" cy="457200"/>
+          <p:cNvPr id="123" name="Text 121"/>
+          <p:cNvSpPr txBox="1"/>
+          <p:nvPr/>
+        </p:nvSpPr>
+        <p:spPr>
+          <a:xfrm>
+            <a:off x="4697403" y="4864608"/>
+            <a:ext cx="1004534" cy="585216"/>
           </a:xfrm>
           <a:prstGeom prst="rect">
             <a:avLst/>
@@ -5383,26 +5848,26 @@
               <a:buNone/>
             </a:pPr>
             <a:r>
-              <a:rPr lang="en-US" sz="1000" b="1" dirty="0">
+              <a:rPr lang="en-US" sz="1100" b="1" dirty="0">
                 <a:solidFill>
                   <a:schemeClr val="bg1"/>
                 </a:solidFill>
               </a:rPr>
-              <a:t>Estilo de vida também é tratamento sério</a:t>
-            </a:r>
-            <a:endParaRPr lang="en-US" sz="1000" dirty="0"/>
-          </a:p>
-        </p:txBody>
-      </p:sp>
-      <p:sp>
-        <p:nvSpPr>
-          <p:cNvPr id="83" name="tipo-11"/>
+              <a:t>Por que a Geração Z está tão desconectada do trabalho?</a:t>
+            </a:r>
+            <a:endParaRPr lang="en-US" sz="1100" dirty="0"/>
+          </a:p>
+        </p:txBody>
+      </p:sp>
+      <p:sp>
+        <p:nvSpPr>
+          <p:cNvPr id="124" name="tipo-25"/>
           <p:cNvSpPr/>
           <p:nvPr/>
         </p:nvSpPr>
         <p:spPr>
           <a:xfrm>
-            <a:off x="5729369" y="3730752"/>
+            <a:off x="5729369" y="4882896"/>
             <a:ext cx="164592" cy="164592"/>
           </a:xfrm>
           <a:prstGeom prst="ellipse">
@@ -5421,13 +5886,13 @@
       </p:sp>
       <p:sp>
         <p:nvSpPr>
-          <p:cNvPr id="84" name="Text 82"/>
-          <p:cNvSpPr txBox="1"/>
-          <p:nvPr/>
-        </p:nvSpPr>
-        <p:spPr>
-          <a:xfrm>
-            <a:off x="5729369" y="3730752"/>
+          <p:cNvPr id="125" name="Text 123"/>
+          <p:cNvSpPr txBox="1"/>
+          <p:nvPr/>
+        </p:nvSpPr>
+        <p:spPr>
+          <a:xfrm>
+            <a:off x="5729369" y="4882896"/>
             <a:ext cx="164592" cy="164592"/>
           </a:xfrm>
           <a:prstGeom prst="rect">
@@ -5457,14 +5922,14 @@
       </p:sp>
       <p:sp>
         <p:nvSpPr>
-          <p:cNvPr id="85" name="celula-12/11"/>
+          <p:cNvPr id="126" name="celula-26/11"/>
           <p:cNvSpPr/>
           <p:nvPr/>
         </p:nvSpPr>
         <p:spPr>
           <a:xfrm>
-            <a:off x="5994545" y="3474720"/>
-            <a:ext cx="1388582" cy="768096"/>
+            <a:off x="5994545" y="4626864"/>
+            <a:ext cx="1388582" cy="896112"/>
           </a:xfrm>
           <a:prstGeom prst="rect">
             <a:avLst/>
@@ -5482,13 +5947,13 @@
       </p:sp>
       <p:sp>
         <p:nvSpPr>
-          <p:cNvPr id="86" name="Text 84"/>
-          <p:cNvSpPr txBox="1"/>
-          <p:nvPr/>
-        </p:nvSpPr>
-        <p:spPr>
-          <a:xfrm>
-            <a:off x="6058553" y="3511296"/>
+          <p:cNvPr id="127" name="Text 125"/>
+          <p:cNvSpPr txBox="1"/>
+          <p:nvPr/>
+        </p:nvSpPr>
+        <p:spPr>
+          <a:xfrm>
+            <a:off x="6058553" y="4663440"/>
             <a:ext cx="365760" cy="182880"/>
           </a:xfrm>
           <a:prstGeom prst="rect">
@@ -5510,7 +5975,7 @@
                   <a:schemeClr val="tx2"/>
                 </a:solidFill>
               </a:rPr>
-              <a:t>12</a:t>
+              <a:t>26</a:t>
             </a:r>
             <a:endParaRPr lang="en-US" sz="1000" dirty="0"/>
           </a:p>
@@ -5518,14 +5983,14 @@
       </p:sp>
       <p:sp>
         <p:nvSpPr>
-          <p:cNvPr id="87" name="celula-13/11"/>
+          <p:cNvPr id="128" name="celula-27/11"/>
           <p:cNvSpPr/>
           <p:nvPr/>
         </p:nvSpPr>
         <p:spPr>
           <a:xfrm>
-            <a:off x="7383127" y="3474720"/>
-            <a:ext cx="1388582" cy="768096"/>
+            <a:off x="7383127" y="4626864"/>
+            <a:ext cx="1388582" cy="896112"/>
           </a:xfrm>
           <a:prstGeom prst="rect">
             <a:avLst/>
@@ -5543,13 +6008,13 @@
       </p:sp>
       <p:sp>
         <p:nvSpPr>
-          <p:cNvPr id="88" name="Text 86"/>
-          <p:cNvSpPr txBox="1"/>
-          <p:nvPr/>
-        </p:nvSpPr>
-        <p:spPr>
-          <a:xfrm>
-            <a:off x="7447135" y="3511296"/>
+          <p:cNvPr id="129" name="Text 127"/>
+          <p:cNvSpPr txBox="1"/>
+          <p:nvPr/>
+        </p:nvSpPr>
+        <p:spPr>
+          <a:xfrm>
+            <a:off x="7447135" y="4663440"/>
             <a:ext cx="365760" cy="182880"/>
           </a:xfrm>
           <a:prstGeom prst="rect">
@@ -5571,7 +6036,7 @@
                   <a:schemeClr val="tx2"/>
                 </a:solidFill>
               </a:rPr>
-              <a:t>13</a:t>
+              <a:t>27</a:t>
             </a:r>
             <a:endParaRPr lang="en-US" sz="1000" dirty="0"/>
           </a:p>
@@ -5579,18 +6044,18 @@
       </p:sp>
       <p:sp>
         <p:nvSpPr>
-          <p:cNvPr id="89" name="post-13"/>
+          <p:cNvPr id="130" name="post-27"/>
           <p:cNvSpPr/>
           <p:nvPr/>
         </p:nvSpPr>
         <p:spPr>
           <a:xfrm>
-            <a:off x="7447135" y="3694176"/>
-            <a:ext cx="1260566" cy="493776"/>
+            <a:off x="7447135" y="4846320"/>
+            <a:ext cx="1260566" cy="621792"/>
           </a:xfrm>
           <a:prstGeom prst="roundRect">
             <a:avLst>
-              <a:gd name="adj" fmla="val 14815"/>
+              <a:gd name="adj" fmla="val 11765"/>
             </a:avLst>
           </a:prstGeom>
           <a:solidFill>
@@ -5606,14 +6071,14 @@
       </p:sp>
       <p:sp>
         <p:nvSpPr>
-          <p:cNvPr id="90" name="Text 88"/>
-          <p:cNvSpPr txBox="1"/>
-          <p:nvPr/>
-        </p:nvSpPr>
-        <p:spPr>
-          <a:xfrm>
-            <a:off x="7474567" y="3712464"/>
-            <a:ext cx="1004534" cy="457200"/>
+          <p:cNvPr id="131" name="Text 129"/>
+          <p:cNvSpPr txBox="1"/>
+          <p:nvPr/>
+        </p:nvSpPr>
+        <p:spPr>
+          <a:xfrm>
+            <a:off x="7474567" y="4864608"/>
+            <a:ext cx="1004534" cy="585216"/>
           </a:xfrm>
           <a:prstGeom prst="rect">
             <a:avLst/>
@@ -5631,26 +6096,26 @@
               <a:buNone/>
             </a:pPr>
             <a:r>
-              <a:rPr lang="en-US" sz="1000" b="1" dirty="0">
+              <a:rPr lang="en-US" sz="1100" b="1" dirty="0">
                 <a:solidFill>
                   <a:schemeClr val="bg1"/>
                 </a:solidFill>
               </a:rPr>
-              <a:t>Como levar a FairHealth para sua empresa?</a:t>
-            </a:r>
-            <a:endParaRPr lang="en-US" sz="1000" dirty="0"/>
-          </a:p>
-        </p:txBody>
-      </p:sp>
-      <p:sp>
-        <p:nvSpPr>
-          <p:cNvPr id="91" name="tipo-13"/>
+              <a:t>Case Chemitec: 98% de adesão</a:t>
+            </a:r>
+            <a:endParaRPr lang="en-US" sz="1100" dirty="0"/>
+          </a:p>
+        </p:txBody>
+      </p:sp>
+      <p:sp>
+        <p:nvSpPr>
+          <p:cNvPr id="132" name="tipo-27"/>
           <p:cNvSpPr/>
           <p:nvPr/>
         </p:nvSpPr>
         <p:spPr>
           <a:xfrm>
-            <a:off x="8506533" y="3730752"/>
+            <a:off x="8506533" y="4882896"/>
             <a:ext cx="164592" cy="164592"/>
           </a:xfrm>
           <a:prstGeom prst="ellipse">
@@ -5669,13 +6134,13 @@
       </p:sp>
       <p:sp>
         <p:nvSpPr>
-          <p:cNvPr id="92" name="Text 90"/>
-          <p:cNvSpPr txBox="1"/>
-          <p:nvPr/>
-        </p:nvSpPr>
-        <p:spPr>
-          <a:xfrm>
-            <a:off x="8506533" y="3730752"/>
+          <p:cNvPr id="133" name="Text 131"/>
+          <p:cNvSpPr txBox="1"/>
+          <p:nvPr/>
+        </p:nvSpPr>
+        <p:spPr>
+          <a:xfrm>
+            <a:off x="8506533" y="4882896"/>
             <a:ext cx="164592" cy="164592"/>
           </a:xfrm>
           <a:prstGeom prst="rect">
@@ -5705,14 +6170,14 @@
       </p:sp>
       <p:sp>
         <p:nvSpPr>
-          <p:cNvPr id="93" name="celula-14/11"/>
+          <p:cNvPr id="134" name="celula-28/11"/>
           <p:cNvSpPr/>
           <p:nvPr/>
         </p:nvSpPr>
         <p:spPr>
           <a:xfrm>
-            <a:off x="8771709" y="3474720"/>
-            <a:ext cx="1388582" cy="768096"/>
+            <a:off x="8771709" y="4626864"/>
+            <a:ext cx="1388582" cy="896112"/>
           </a:xfrm>
           <a:prstGeom prst="rect">
             <a:avLst/>
@@ -5730,13 +6195,13 @@
       </p:sp>
       <p:sp>
         <p:nvSpPr>
-          <p:cNvPr id="94" name="Text 92"/>
-          <p:cNvSpPr txBox="1"/>
-          <p:nvPr/>
-        </p:nvSpPr>
-        <p:spPr>
-          <a:xfrm>
-            <a:off x="8835717" y="3511296"/>
+          <p:cNvPr id="135" name="Text 133"/>
+          <p:cNvSpPr txBox="1"/>
+          <p:nvPr/>
+        </p:nvSpPr>
+        <p:spPr>
+          <a:xfrm>
+            <a:off x="8835717" y="4663440"/>
             <a:ext cx="365760" cy="182880"/>
           </a:xfrm>
           <a:prstGeom prst="rect">
@@ -5758,7 +6223,7 @@
                   <a:schemeClr val="tx2"/>
                 </a:solidFill>
               </a:rPr>
-              <a:t>14</a:t>
+              <a:t>28</a:t>
             </a:r>
             <a:endParaRPr lang="en-US" sz="1000" dirty="0"/>
           </a:p>
@@ -5766,50 +6231,14 @@
       </p:sp>
       <p:sp>
         <p:nvSpPr>
-          <p:cNvPr id="95" name="Text 93"/>
-          <p:cNvSpPr txBox="1"/>
-          <p:nvPr/>
-        </p:nvSpPr>
-        <p:spPr>
-          <a:xfrm>
-            <a:off x="8835717" y="3730752"/>
-            <a:ext cx="1260566" cy="411480"/>
-          </a:xfrm>
-          <a:prstGeom prst="rect">
-            <a:avLst/>
-          </a:prstGeom>
-          <a:noFill/>
-          <a:ln/>
-        </p:spPr>
-        <p:txBody>
-          <a:bodyPr wrap="square" lIns="0" tIns="0" rIns="0" bIns="0" rtlCol="0" anchor="t"/>
-          <a:lstStyle/>
-          <a:p>
-            <a:pPr indent="0" marL="0">
-              <a:buNone/>
-            </a:pPr>
-            <a:r>
-              <a:rPr lang="en-US" sz="1000" i="1" dirty="0">
-                <a:solidFill>
-                  <a:schemeClr val="tx2"/>
-                </a:solidFill>
-              </a:rPr>
-              <a:t>Dia Mundial do Diabetes</a:t>
-            </a:r>
-            <a:endParaRPr lang="en-US" sz="1000" dirty="0"/>
-          </a:p>
-        </p:txBody>
-      </p:sp>
-      <p:sp>
-        <p:nvSpPr>
-          <p:cNvPr id="96" name="celula-15/11"/>
+          <p:cNvPr id="136" name="celula-29/11"/>
           <p:cNvSpPr/>
           <p:nvPr/>
         </p:nvSpPr>
         <p:spPr>
           <a:xfrm>
-            <a:off x="10160290" y="3474720"/>
-            <a:ext cx="1388582" cy="768096"/>
+            <a:off x="10160290" y="4626864"/>
+            <a:ext cx="1388582" cy="896112"/>
           </a:xfrm>
           <a:prstGeom prst="rect">
             <a:avLst/>
@@ -5827,13 +6256,13 @@
       </p:sp>
       <p:sp>
         <p:nvSpPr>
-          <p:cNvPr id="97" name="Text 95"/>
-          <p:cNvSpPr txBox="1"/>
-          <p:nvPr/>
-        </p:nvSpPr>
-        <p:spPr>
-          <a:xfrm>
-            <a:off x="10224298" y="3511296"/>
+          <p:cNvPr id="137" name="Text 135"/>
+          <p:cNvSpPr txBox="1"/>
+          <p:nvPr/>
+        </p:nvSpPr>
+        <p:spPr>
+          <a:xfrm>
+            <a:off x="10224298" y="4663440"/>
             <a:ext cx="365760" cy="182880"/>
           </a:xfrm>
           <a:prstGeom prst="rect">
@@ -5855,7 +6284,7 @@
                   <a:schemeClr val="tx2"/>
                 </a:solidFill>
               </a:rPr>
-              <a:t>15</a:t>
+              <a:t>29</a:t>
             </a:r>
             <a:endParaRPr lang="en-US" sz="1000" dirty="0"/>
           </a:p>
@@ -5863,50 +6292,14 @@
       </p:sp>
       <p:sp>
         <p:nvSpPr>
-          <p:cNvPr id="98" name="Text 96"/>
-          <p:cNvSpPr txBox="1"/>
-          <p:nvPr/>
-        </p:nvSpPr>
-        <p:spPr>
-          <a:xfrm>
-            <a:off x="10224298" y="3730752"/>
-            <a:ext cx="1260566" cy="411480"/>
-          </a:xfrm>
-          <a:prstGeom prst="rect">
-            <a:avLst/>
-          </a:prstGeom>
-          <a:noFill/>
-          <a:ln/>
-        </p:spPr>
-        <p:txBody>
-          <a:bodyPr wrap="square" lIns="0" tIns="0" rIns="0" bIns="0" rtlCol="0" anchor="t"/>
-          <a:lstStyle/>
-          <a:p>
-            <a:pPr indent="0" marL="0">
-              <a:buNone/>
-            </a:pPr>
-            <a:r>
-              <a:rPr lang="en-US" sz="1000" i="1" dirty="0">
-                <a:solidFill>
-                  <a:schemeClr val="tx2"/>
-                </a:solidFill>
-              </a:rPr>
-              <a:t>Proclamação da República</a:t>
-            </a:r>
-            <a:endParaRPr lang="en-US" sz="1000" dirty="0"/>
-          </a:p>
-        </p:txBody>
-      </p:sp>
-      <p:sp>
-        <p:nvSpPr>
-          <p:cNvPr id="99" name="Text 97"/>
-          <p:cNvSpPr txBox="1"/>
-          <p:nvPr/>
-        </p:nvSpPr>
-        <p:spPr>
-          <a:xfrm>
-            <a:off x="640080" y="4242816"/>
-            <a:ext cx="1143000" cy="768096"/>
+          <p:cNvPr id="138" name="Text 136"/>
+          <p:cNvSpPr txBox="1"/>
+          <p:nvPr/>
+        </p:nvSpPr>
+        <p:spPr>
+          <a:xfrm>
+            <a:off x="640080" y="5522976"/>
+            <a:ext cx="1143000" cy="896112"/>
           </a:xfrm>
           <a:prstGeom prst="rect">
             <a:avLst/>
@@ -5927,7 +6320,7 @@
                   <a:schemeClr val="tx1"/>
                 </a:solidFill>
               </a:rPr>
-              <a:t>Semana 5</a:t>
+              <a:t>Semana 7</a:t>
             </a:r>
             <a:endParaRPr lang="en-US" sz="1400" dirty="0"/>
           </a:p>
@@ -5941,7 +6334,7 @@
                   <a:schemeClr val="tx1"/>
                 </a:solidFill>
               </a:rPr>
-              <a:t>16/11 a 20/11</a:t>
+              <a:t>30/11 a 04/12</a:t>
             </a:r>
             <a:endParaRPr lang="en-US" sz="1400" dirty="0"/>
           </a:p>
@@ -5949,14 +6342,14 @@
       </p:sp>
       <p:sp>
         <p:nvSpPr>
-          <p:cNvPr id="100" name="celula-16/11"/>
+          <p:cNvPr id="139" name="celula-30/11"/>
           <p:cNvSpPr/>
           <p:nvPr/>
         </p:nvSpPr>
         <p:spPr>
           <a:xfrm>
-            <a:off x="1828800" y="4242816"/>
-            <a:ext cx="1388582" cy="768096"/>
+            <a:off x="1828800" y="5522976"/>
+            <a:ext cx="1388582" cy="896112"/>
           </a:xfrm>
           <a:prstGeom prst="rect">
             <a:avLst/>
@@ -5974,13 +6367,13 @@
       </p:sp>
       <p:sp>
         <p:nvSpPr>
-          <p:cNvPr id="101" name="Text 99"/>
-          <p:cNvSpPr txBox="1"/>
-          <p:nvPr/>
-        </p:nvSpPr>
-        <p:spPr>
-          <a:xfrm>
-            <a:off x="1892808" y="4279392"/>
+          <p:cNvPr id="140" name="Text 138"/>
+          <p:cNvSpPr txBox="1"/>
+          <p:nvPr/>
+        </p:nvSpPr>
+        <p:spPr>
+          <a:xfrm>
+            <a:off x="1892808" y="5559552"/>
             <a:ext cx="365760" cy="182880"/>
           </a:xfrm>
           <a:prstGeom prst="rect">
@@ -6002,7 +6395,7 @@
                   <a:schemeClr val="tx2"/>
                 </a:solidFill>
               </a:rPr>
-              <a:t>16</a:t>
+              <a:t>30</a:t>
             </a:r>
             <a:endParaRPr lang="en-US" sz="1000" dirty="0"/>
           </a:p>
@@ -6010,18 +6403,18 @@
       </p:sp>
       <p:sp>
         <p:nvSpPr>
-          <p:cNvPr id="102" name="post-16"/>
+          <p:cNvPr id="141" name="post-30"/>
           <p:cNvSpPr/>
           <p:nvPr/>
         </p:nvSpPr>
         <p:spPr>
           <a:xfrm>
-            <a:off x="1892808" y="4462272"/>
-            <a:ext cx="1260566" cy="493776"/>
+            <a:off x="1892808" y="5742432"/>
+            <a:ext cx="1260566" cy="621792"/>
           </a:xfrm>
           <a:prstGeom prst="roundRect">
             <a:avLst>
-              <a:gd name="adj" fmla="val 14815"/>
+              <a:gd name="adj" fmla="val 11765"/>
             </a:avLst>
           </a:prstGeom>
           <a:solidFill>
@@ -6037,14 +6430,14 @@
       </p:sp>
       <p:sp>
         <p:nvSpPr>
-          <p:cNvPr id="103" name="Text 101"/>
-          <p:cNvSpPr txBox="1"/>
-          <p:nvPr/>
-        </p:nvSpPr>
-        <p:spPr>
-          <a:xfrm>
-            <a:off x="1920240" y="4480560"/>
-            <a:ext cx="1004534" cy="457200"/>
+          <p:cNvPr id="142" name="Text 140"/>
+          <p:cNvSpPr txBox="1"/>
+          <p:nvPr/>
+        </p:nvSpPr>
+        <p:spPr>
+          <a:xfrm>
+            <a:off x="1920240" y="5760720"/>
+            <a:ext cx="1004534" cy="585216"/>
           </a:xfrm>
           <a:prstGeom prst="rect">
             <a:avLst/>
@@ -6062,26 +6455,26 @@
               <a:buNone/>
             </a:pPr>
             <a:r>
-              <a:rPr lang="en-US" sz="1000" b="1" dirty="0">
+              <a:rPr lang="en-US" sz="1100" b="1" dirty="0">
                 <a:solidFill>
                   <a:schemeClr val="tx1"/>
                 </a:solidFill>
               </a:rPr>
-              <a:t>Novembro Azul: ele só vai ao médico quando dói</a:t>
-            </a:r>
-            <a:endParaRPr lang="en-US" sz="1000" dirty="0"/>
-          </a:p>
-        </p:txBody>
-      </p:sp>
-      <p:sp>
-        <p:nvSpPr>
-          <p:cNvPr id="104" name="tipo-16"/>
+              <a:t>Dezembro chegou: a corrida das metas também adoece</a:t>
+            </a:r>
+            <a:endParaRPr lang="en-US" sz="1100" dirty="0"/>
+          </a:p>
+        </p:txBody>
+      </p:sp>
+      <p:sp>
+        <p:nvSpPr>
+          <p:cNvPr id="143" name="tipo-30"/>
           <p:cNvSpPr/>
           <p:nvPr/>
         </p:nvSpPr>
         <p:spPr>
           <a:xfrm>
-            <a:off x="2952206" y="4498848"/>
+            <a:off x="2952206" y="5779008"/>
             <a:ext cx="164592" cy="164592"/>
           </a:xfrm>
           <a:prstGeom prst="ellipse">
@@ -6100,13 +6493,13 @@
       </p:sp>
       <p:sp>
         <p:nvSpPr>
-          <p:cNvPr id="105" name="Text 103"/>
-          <p:cNvSpPr txBox="1"/>
-          <p:nvPr/>
-        </p:nvSpPr>
-        <p:spPr>
-          <a:xfrm>
-            <a:off x="2952206" y="4498848"/>
+          <p:cNvPr id="144" name="Text 142"/>
+          <p:cNvSpPr txBox="1"/>
+          <p:nvPr/>
+        </p:nvSpPr>
+        <p:spPr>
+          <a:xfrm>
+            <a:off x="2952206" y="5779008"/>
             <a:ext cx="164592" cy="164592"/>
           </a:xfrm>
           <a:prstGeom prst="rect">
@@ -6136,14 +6529,14 @@
       </p:sp>
       <p:sp>
         <p:nvSpPr>
-          <p:cNvPr id="106" name="celula-17/11"/>
+          <p:cNvPr id="145" name="celula-01/12"/>
           <p:cNvSpPr/>
           <p:nvPr/>
         </p:nvSpPr>
         <p:spPr>
           <a:xfrm>
-            <a:off x="3217382" y="4242816"/>
-            <a:ext cx="1388582" cy="768096"/>
+            <a:off x="3217382" y="5522976"/>
+            <a:ext cx="1388582" cy="896112"/>
           </a:xfrm>
           <a:prstGeom prst="rect">
             <a:avLst/>
@@ -6161,13 +6554,13 @@
       </p:sp>
       <p:sp>
         <p:nvSpPr>
-          <p:cNvPr id="107" name="Text 105"/>
-          <p:cNvSpPr txBox="1"/>
-          <p:nvPr/>
-        </p:nvSpPr>
-        <p:spPr>
-          <a:xfrm>
-            <a:off x="3281390" y="4279392"/>
+          <p:cNvPr id="146" name="Text 144"/>
+          <p:cNvSpPr txBox="1"/>
+          <p:nvPr/>
+        </p:nvSpPr>
+        <p:spPr>
+          <a:xfrm>
+            <a:off x="3281390" y="5559552"/>
             <a:ext cx="365760" cy="182880"/>
           </a:xfrm>
           <a:prstGeom prst="rect">
@@ -6186,10 +6579,10 @@
             <a:r>
               <a:rPr lang="en-US" sz="1000" dirty="0">
                 <a:solidFill>
-                  <a:schemeClr val="tx2"/>
-                </a:solidFill>
-              </a:rPr>
-              <a:t>17</a:t>
+                  <a:srgbClr val="B9C4C1"/>
+                </a:solidFill>
+              </a:rPr>
+              <a:t>01</a:t>
             </a:r>
             <a:endParaRPr lang="en-US" sz="1000" dirty="0"/>
           </a:p>
@@ -6197,14 +6590,14 @@
       </p:sp>
       <p:sp>
         <p:nvSpPr>
-          <p:cNvPr id="108" name="celula-18/11"/>
+          <p:cNvPr id="147" name="celula-02/12"/>
           <p:cNvSpPr/>
           <p:nvPr/>
         </p:nvSpPr>
         <p:spPr>
           <a:xfrm>
-            <a:off x="4605963" y="4242816"/>
-            <a:ext cx="1388582" cy="768096"/>
+            <a:off x="4605963" y="5522976"/>
+            <a:ext cx="1388582" cy="896112"/>
           </a:xfrm>
           <a:prstGeom prst="rect">
             <a:avLst/>
@@ -6222,13 +6615,13 @@
       </p:sp>
       <p:sp>
         <p:nvSpPr>
-          <p:cNvPr id="109" name="Text 107"/>
-          <p:cNvSpPr txBox="1"/>
-          <p:nvPr/>
-        </p:nvSpPr>
-        <p:spPr>
-          <a:xfrm>
-            <a:off x="4669971" y="4279392"/>
+          <p:cNvPr id="148" name="Text 146"/>
+          <p:cNvSpPr txBox="1"/>
+          <p:nvPr/>
+        </p:nvSpPr>
+        <p:spPr>
+          <a:xfrm>
+            <a:off x="4669971" y="5559552"/>
             <a:ext cx="365760" cy="182880"/>
           </a:xfrm>
           <a:prstGeom prst="rect">
@@ -6247,10 +6640,10 @@
             <a:r>
               <a:rPr lang="en-US" sz="1000" dirty="0">
                 <a:solidFill>
-                  <a:schemeClr val="tx2"/>
-                </a:solidFill>
-              </a:rPr>
-              <a:t>18</a:t>
+                  <a:srgbClr val="B9C4C1"/>
+                </a:solidFill>
+              </a:rPr>
+              <a:t>02</a:t>
             </a:r>
             <a:endParaRPr lang="en-US" sz="1000" dirty="0"/>
           </a:p>
@@ -6258,140 +6651,14 @@
       </p:sp>
       <p:sp>
         <p:nvSpPr>
-          <p:cNvPr id="110" name="post-18"/>
+          <p:cNvPr id="149" name="celula-03/12"/>
           <p:cNvSpPr/>
           <p:nvPr/>
         </p:nvSpPr>
         <p:spPr>
           <a:xfrm>
-            <a:off x="4669971" y="4462272"/>
-            <a:ext cx="1260566" cy="493776"/>
-          </a:xfrm>
-          <a:prstGeom prst="roundRect">
-            <a:avLst>
-              <a:gd name="adj" fmla="val 14815"/>
-            </a:avLst>
-          </a:prstGeom>
-          <a:solidFill>
-            <a:schemeClr val="tx1"/>
-          </a:solidFill>
-          <a:ln w="12700">
-            <a:solidFill>
-              <a:schemeClr val="tx1"/>
-            </a:solidFill>
-            <a:prstDash val="solid"/>
-          </a:ln>
-        </p:spPr>
-      </p:sp>
-      <p:sp>
-        <p:nvSpPr>
-          <p:cNvPr id="111" name="Text 109"/>
-          <p:cNvSpPr txBox="1"/>
-          <p:nvPr/>
-        </p:nvSpPr>
-        <p:spPr>
-          <a:xfrm>
-            <a:off x="4697403" y="4480560"/>
-            <a:ext cx="1004534" cy="457200"/>
-          </a:xfrm>
-          <a:prstGeom prst="rect">
-            <a:avLst/>
-          </a:prstGeom>
-          <a:noFill/>
-          <a:ln/>
-        </p:spPr>
-        <p:txBody>
-          <a:bodyPr wrap="square" lIns="0" tIns="0" rIns="0" bIns="0" rtlCol="0" anchor="ctr">
-            <a:normAutofit/>
-          </a:bodyPr>
-          <a:lstStyle/>
-          <a:p>
-            <a:pPr algn="ctr" indent="0" marL="0">
-              <a:buNone/>
-            </a:pPr>
-            <a:r>
-              <a:rPr lang="en-US" sz="1000" b="1" dirty="0">
-                <a:solidFill>
-                  <a:schemeClr val="bg1"/>
-                </a:solidFill>
-              </a:rPr>
-              <a:t>Afastamentos por saúde mental e a NR-01</a:t>
-            </a:r>
-            <a:endParaRPr lang="en-US" sz="1000" dirty="0"/>
-          </a:p>
-        </p:txBody>
-      </p:sp>
-      <p:sp>
-        <p:nvSpPr>
-          <p:cNvPr id="112" name="tipo-18"/>
-          <p:cNvSpPr/>
-          <p:nvPr/>
-        </p:nvSpPr>
-        <p:spPr>
-          <a:xfrm>
-            <a:off x="5729369" y="4498848"/>
-            <a:ext cx="164592" cy="164592"/>
-          </a:xfrm>
-          <a:prstGeom prst="ellipse">
-            <a:avLst/>
-          </a:prstGeom>
-          <a:solidFill>
-            <a:schemeClr val="bg1"/>
-          </a:solidFill>
-          <a:ln w="9525">
-            <a:solidFill>
-              <a:schemeClr val="tx1"/>
-            </a:solidFill>
-            <a:prstDash val="solid"/>
-          </a:ln>
-        </p:spPr>
-      </p:sp>
-      <p:sp>
-        <p:nvSpPr>
-          <p:cNvPr id="113" name="Text 111"/>
-          <p:cNvSpPr txBox="1"/>
-          <p:nvPr/>
-        </p:nvSpPr>
-        <p:spPr>
-          <a:xfrm>
-            <a:off x="5729369" y="4498848"/>
-            <a:ext cx="164592" cy="164592"/>
-          </a:xfrm>
-          <a:prstGeom prst="rect">
-            <a:avLst/>
-          </a:prstGeom>
-          <a:noFill/>
-          <a:ln/>
-        </p:spPr>
-        <p:txBody>
-          <a:bodyPr wrap="square" lIns="0" tIns="0" rIns="0" bIns="0" rtlCol="0" anchor="ctr"/>
-          <a:lstStyle/>
-          <a:p>
-            <a:pPr algn="ctr" indent="0" marL="0">
-              <a:buNone/>
-            </a:pPr>
-            <a:r>
-              <a:rPr lang="en-US" sz="800" b="1" dirty="0">
-                <a:solidFill>
-                  <a:schemeClr val="tx1"/>
-                </a:solidFill>
-              </a:rPr>
-              <a:t>P</a:t>
-            </a:r>
-            <a:endParaRPr lang="en-US" sz="800" dirty="0"/>
-          </a:p>
-        </p:txBody>
-      </p:sp>
-      <p:sp>
-        <p:nvSpPr>
-          <p:cNvPr id="114" name="celula-19/11"/>
-          <p:cNvSpPr/>
-          <p:nvPr/>
-        </p:nvSpPr>
-        <p:spPr>
-          <a:xfrm>
-            <a:off x="5994545" y="4242816"/>
-            <a:ext cx="1388582" cy="768096"/>
+            <a:off x="5994545" y="5522976"/>
+            <a:ext cx="1388582" cy="896112"/>
           </a:xfrm>
           <a:prstGeom prst="rect">
             <a:avLst/>
@@ -6409,13 +6676,13 @@
       </p:sp>
       <p:sp>
         <p:nvSpPr>
-          <p:cNvPr id="115" name="Text 113"/>
-          <p:cNvSpPr txBox="1"/>
-          <p:nvPr/>
-        </p:nvSpPr>
-        <p:spPr>
-          <a:xfrm>
-            <a:off x="6058553" y="4279392"/>
+          <p:cNvPr id="150" name="Text 148"/>
+          <p:cNvSpPr txBox="1"/>
+          <p:nvPr/>
+        </p:nvSpPr>
+        <p:spPr>
+          <a:xfrm>
+            <a:off x="6058553" y="5559552"/>
             <a:ext cx="365760" cy="182880"/>
           </a:xfrm>
           <a:prstGeom prst="rect">
@@ -6434,10 +6701,10 @@
             <a:r>
               <a:rPr lang="en-US" sz="1000" dirty="0">
                 <a:solidFill>
-                  <a:schemeClr val="tx2"/>
-                </a:solidFill>
-              </a:rPr>
-              <a:t>19</a:t>
+                  <a:srgbClr val="B9C4C1"/>
+                </a:solidFill>
+              </a:rPr>
+              <a:t>03</a:t>
             </a:r>
             <a:endParaRPr lang="en-US" sz="1000" dirty="0"/>
           </a:p>
@@ -6445,140 +6712,14 @@
       </p:sp>
       <p:sp>
         <p:nvSpPr>
-          <p:cNvPr id="116" name="post-19"/>
+          <p:cNvPr id="151" name="celula-04/12"/>
           <p:cNvSpPr/>
           <p:nvPr/>
         </p:nvSpPr>
         <p:spPr>
           <a:xfrm>
-            <a:off x="6058553" y="4462272"/>
-            <a:ext cx="1260566" cy="493776"/>
-          </a:xfrm>
-          <a:prstGeom prst="roundRect">
-            <a:avLst>
-              <a:gd name="adj" fmla="val 14815"/>
-            </a:avLst>
-          </a:prstGeom>
-          <a:solidFill>
-            <a:schemeClr val="bg1"/>
-          </a:solidFill>
-          <a:ln w="12700">
-            <a:solidFill>
-              <a:schemeClr val="tx1"/>
-            </a:solidFill>
-            <a:prstDash val="solid"/>
-          </a:ln>
-        </p:spPr>
-      </p:sp>
-      <p:sp>
-        <p:nvSpPr>
-          <p:cNvPr id="117" name="Text 115"/>
-          <p:cNvSpPr txBox="1"/>
-          <p:nvPr/>
-        </p:nvSpPr>
-        <p:spPr>
-          <a:xfrm>
-            <a:off x="6085985" y="4480560"/>
-            <a:ext cx="1004534" cy="457200"/>
-          </a:xfrm>
-          <a:prstGeom prst="rect">
-            <a:avLst/>
-          </a:prstGeom>
-          <a:noFill/>
-          <a:ln/>
-        </p:spPr>
-        <p:txBody>
-          <a:bodyPr wrap="square" lIns="0" tIns="0" rIns="0" bIns="0" rtlCol="0" anchor="ctr">
-            <a:normAutofit/>
-          </a:bodyPr>
-          <a:lstStyle/>
-          <a:p>
-            <a:pPr algn="ctr" indent="0" marL="0">
-              <a:buNone/>
-            </a:pPr>
-            <a:r>
-              <a:rPr lang="en-US" sz="1000" b="1" dirty="0">
-                <a:solidFill>
-                  <a:schemeClr val="tx1"/>
-                </a:solidFill>
-              </a:rPr>
-              <a:t>Depoimento: “Os meus hábitos mudaram”</a:t>
-            </a:r>
-            <a:endParaRPr lang="en-US" sz="1000" dirty="0"/>
-          </a:p>
-        </p:txBody>
-      </p:sp>
-      <p:sp>
-        <p:nvSpPr>
-          <p:cNvPr id="118" name="tipo-19"/>
-          <p:cNvSpPr/>
-          <p:nvPr/>
-        </p:nvSpPr>
-        <p:spPr>
-          <a:xfrm>
-            <a:off x="7117951" y="4498848"/>
-            <a:ext cx="164592" cy="164592"/>
-          </a:xfrm>
-          <a:prstGeom prst="ellipse">
-            <a:avLst/>
-          </a:prstGeom>
-          <a:solidFill>
-            <a:schemeClr val="bg1"/>
-          </a:solidFill>
-          <a:ln w="9525">
-            <a:solidFill>
-              <a:schemeClr val="tx1"/>
-            </a:solidFill>
-            <a:prstDash val="solid"/>
-          </a:ln>
-        </p:spPr>
-      </p:sp>
-      <p:sp>
-        <p:nvSpPr>
-          <p:cNvPr id="119" name="Text 117"/>
-          <p:cNvSpPr txBox="1"/>
-          <p:nvPr/>
-        </p:nvSpPr>
-        <p:spPr>
-          <a:xfrm>
-            <a:off x="7117951" y="4498848"/>
-            <a:ext cx="164592" cy="164592"/>
-          </a:xfrm>
-          <a:prstGeom prst="rect">
-            <a:avLst/>
-          </a:prstGeom>
-          <a:noFill/>
-          <a:ln/>
-        </p:spPr>
-        <p:txBody>
-          <a:bodyPr wrap="square" lIns="0" tIns="0" rIns="0" bIns="0" rtlCol="0" anchor="ctr"/>
-          <a:lstStyle/>
-          <a:p>
-            <a:pPr algn="ctr" indent="0" marL="0">
-              <a:buNone/>
-            </a:pPr>
-            <a:r>
-              <a:rPr lang="en-US" sz="800" b="1" dirty="0">
-                <a:solidFill>
-                  <a:schemeClr val="tx1"/>
-                </a:solidFill>
-              </a:rPr>
-              <a:t>P</a:t>
-            </a:r>
-            <a:endParaRPr lang="en-US" sz="800" dirty="0"/>
-          </a:p>
-        </p:txBody>
-      </p:sp>
-      <p:sp>
-        <p:nvSpPr>
-          <p:cNvPr id="120" name="celula-20/11"/>
-          <p:cNvSpPr/>
-          <p:nvPr/>
-        </p:nvSpPr>
-        <p:spPr>
-          <a:xfrm>
-            <a:off x="7383127" y="4242816"/>
-            <a:ext cx="1388582" cy="768096"/>
+            <a:off x="7383127" y="5522976"/>
+            <a:ext cx="1388582" cy="896112"/>
           </a:xfrm>
           <a:prstGeom prst="rect">
             <a:avLst/>
@@ -6596,13 +6737,13 @@
       </p:sp>
       <p:sp>
         <p:nvSpPr>
-          <p:cNvPr id="121" name="Text 119"/>
-          <p:cNvSpPr txBox="1"/>
-          <p:nvPr/>
-        </p:nvSpPr>
-        <p:spPr>
-          <a:xfrm>
-            <a:off x="7447135" y="4279392"/>
+          <p:cNvPr id="152" name="Text 150"/>
+          <p:cNvSpPr txBox="1"/>
+          <p:nvPr/>
+        </p:nvSpPr>
+        <p:spPr>
+          <a:xfrm>
+            <a:off x="7447135" y="5559552"/>
             <a:ext cx="365760" cy="182880"/>
           </a:xfrm>
           <a:prstGeom prst="rect">
@@ -6621,10 +6762,10 @@
             <a:r>
               <a:rPr lang="en-US" sz="1000" dirty="0">
                 <a:solidFill>
-                  <a:schemeClr val="tx2"/>
-                </a:solidFill>
-              </a:rPr>
-              <a:t>20</a:t>
+                  <a:srgbClr val="B9C4C1"/>
+                </a:solidFill>
+              </a:rPr>
+              <a:t>04</a:t>
             </a:r>
             <a:endParaRPr lang="en-US" sz="1000" dirty="0"/>
           </a:p>
@@ -6632,50 +6773,14 @@
       </p:sp>
       <p:sp>
         <p:nvSpPr>
-          <p:cNvPr id="122" name="Text 120"/>
-          <p:cNvSpPr txBox="1"/>
-          <p:nvPr/>
-        </p:nvSpPr>
-        <p:spPr>
-          <a:xfrm>
-            <a:off x="7447135" y="4498848"/>
-            <a:ext cx="1260566" cy="411480"/>
-          </a:xfrm>
-          <a:prstGeom prst="rect">
-            <a:avLst/>
-          </a:prstGeom>
-          <a:noFill/>
-          <a:ln/>
-        </p:spPr>
-        <p:txBody>
-          <a:bodyPr wrap="square" lIns="0" tIns="0" rIns="0" bIns="0" rtlCol="0" anchor="t"/>
-          <a:lstStyle/>
-          <a:p>
-            <a:pPr indent="0" marL="0">
-              <a:buNone/>
-            </a:pPr>
-            <a:r>
-              <a:rPr lang="en-US" sz="1000" i="1" dirty="0">
-                <a:solidFill>
-                  <a:schemeClr val="tx2"/>
-                </a:solidFill>
-              </a:rPr>
-              <a:t>Consciência Negra (feriado)</a:t>
-            </a:r>
-            <a:endParaRPr lang="en-US" sz="1000" dirty="0"/>
-          </a:p>
-        </p:txBody>
-      </p:sp>
-      <p:sp>
-        <p:nvSpPr>
-          <p:cNvPr id="123" name="celula-21/11"/>
+          <p:cNvPr id="153" name="celula-05/12"/>
           <p:cNvSpPr/>
           <p:nvPr/>
         </p:nvSpPr>
         <p:spPr>
           <a:xfrm>
-            <a:off x="8771709" y="4242816"/>
-            <a:ext cx="1388582" cy="768096"/>
+            <a:off x="8771709" y="5522976"/>
+            <a:ext cx="1388582" cy="896112"/>
           </a:xfrm>
           <a:prstGeom prst="rect">
             <a:avLst/>
@@ -6693,13 +6798,13 @@
       </p:sp>
       <p:sp>
         <p:nvSpPr>
-          <p:cNvPr id="124" name="Text 122"/>
-          <p:cNvSpPr txBox="1"/>
-          <p:nvPr/>
-        </p:nvSpPr>
-        <p:spPr>
-          <a:xfrm>
-            <a:off x="8835717" y="4279392"/>
+          <p:cNvPr id="154" name="Text 152"/>
+          <p:cNvSpPr txBox="1"/>
+          <p:nvPr/>
+        </p:nvSpPr>
+        <p:spPr>
+          <a:xfrm>
+            <a:off x="8835717" y="5559552"/>
             <a:ext cx="365760" cy="182880"/>
           </a:xfrm>
           <a:prstGeom prst="rect">
@@ -6718,10 +6823,10 @@
             <a:r>
               <a:rPr lang="en-US" sz="1000" dirty="0">
                 <a:solidFill>
-                  <a:schemeClr val="tx2"/>
-                </a:solidFill>
-              </a:rPr>
-              <a:t>21</a:t>
+                  <a:srgbClr val="B9C4C1"/>
+                </a:solidFill>
+              </a:rPr>
+              <a:t>05</a:t>
             </a:r>
             <a:endParaRPr lang="en-US" sz="1000" dirty="0"/>
           </a:p>
@@ -6729,14 +6834,14 @@
       </p:sp>
       <p:sp>
         <p:nvSpPr>
-          <p:cNvPr id="125" name="celula-22/11"/>
+          <p:cNvPr id="155" name="celula-06/12"/>
           <p:cNvSpPr/>
           <p:nvPr/>
         </p:nvSpPr>
         <p:spPr>
           <a:xfrm>
-            <a:off x="10160290" y="4242816"/>
-            <a:ext cx="1388582" cy="768096"/>
+            <a:off x="10160290" y="5522976"/>
+            <a:ext cx="1388582" cy="896112"/>
           </a:xfrm>
           <a:prstGeom prst="rect">
             <a:avLst/>
@@ -6754,13 +6859,13 @@
       </p:sp>
       <p:sp>
         <p:nvSpPr>
-          <p:cNvPr id="126" name="Text 124"/>
-          <p:cNvSpPr txBox="1"/>
-          <p:nvPr/>
-        </p:nvSpPr>
-        <p:spPr>
-          <a:xfrm>
-            <a:off x="10224298" y="4279392"/>
+          <p:cNvPr id="156" name="Text 154"/>
+          <p:cNvSpPr txBox="1"/>
+          <p:nvPr/>
+        </p:nvSpPr>
+        <p:spPr>
+          <a:xfrm>
+            <a:off x="10224298" y="5559552"/>
             <a:ext cx="365760" cy="182880"/>
           </a:xfrm>
           <a:prstGeom prst="rect">
@@ -6779,10 +6884,10 @@
             <a:r>
               <a:rPr lang="en-US" sz="1000" dirty="0">
                 <a:solidFill>
-                  <a:schemeClr val="tx2"/>
-                </a:solidFill>
-              </a:rPr>
-              <a:t>22</a:t>
+                  <a:srgbClr val="B9C4C1"/>
+                </a:solidFill>
+              </a:rPr>
+              <a:t>06</a:t>
             </a:r>
             <a:endParaRPr lang="en-US" sz="1000" dirty="0"/>
           </a:p>
@@ -6790,1465 +6895,7 @@
       </p:sp>
       <p:sp>
         <p:nvSpPr>
-          <p:cNvPr id="127" name="Text 125"/>
-          <p:cNvSpPr txBox="1"/>
-          <p:nvPr/>
-        </p:nvSpPr>
-        <p:spPr>
-          <a:xfrm>
-            <a:off x="640080" y="5010912"/>
-            <a:ext cx="1143000" cy="768096"/>
-          </a:xfrm>
-          <a:prstGeom prst="rect">
-            <a:avLst/>
-          </a:prstGeom>
-          <a:noFill/>
-          <a:ln/>
-        </p:spPr>
-        <p:txBody>
-          <a:bodyPr wrap="square" lIns="0" tIns="0" rIns="0" bIns="0" rtlCol="0" anchor="ctr"/>
-          <a:lstStyle/>
-          <a:p>
-            <a:pPr indent="0" marL="0">
-              <a:buNone/>
-            </a:pPr>
-            <a:r>
-              <a:rPr lang="en-US" sz="1400" b="1" dirty="0">
-                <a:solidFill>
-                  <a:schemeClr val="tx1"/>
-                </a:solidFill>
-              </a:rPr>
-              <a:t>Semana 6</a:t>
-            </a:r>
-            <a:endParaRPr lang="en-US" sz="1400" dirty="0"/>
-          </a:p>
-          <a:p>
-            <a:pPr indent="0" marL="0">
-              <a:buNone/>
-            </a:pPr>
-            <a:r>
-              <a:rPr lang="en-US" sz="1100" dirty="0">
-                <a:solidFill>
-                  <a:schemeClr val="tx1"/>
-                </a:solidFill>
-              </a:rPr>
-              <a:t>23/11 a 27/11</a:t>
-            </a:r>
-            <a:endParaRPr lang="en-US" sz="1400" dirty="0"/>
-          </a:p>
-        </p:txBody>
-      </p:sp>
-      <p:sp>
-        <p:nvSpPr>
-          <p:cNvPr id="128" name="celula-23/11"/>
-          <p:cNvSpPr/>
-          <p:nvPr/>
-        </p:nvSpPr>
-        <p:spPr>
-          <a:xfrm>
-            <a:off x="1828800" y="5010912"/>
-            <a:ext cx="1388582" cy="768096"/>
-          </a:xfrm>
-          <a:prstGeom prst="rect">
-            <a:avLst/>
-          </a:prstGeom>
-          <a:solidFill>
-            <a:schemeClr val="bg2"/>
-          </a:solidFill>
-          <a:ln w="9525">
-            <a:solidFill>
-              <a:srgbClr val="A9CFC6"/>
-            </a:solidFill>
-            <a:prstDash val="solid"/>
-          </a:ln>
-        </p:spPr>
-      </p:sp>
-      <p:sp>
-        <p:nvSpPr>
-          <p:cNvPr id="129" name="Text 127"/>
-          <p:cNvSpPr txBox="1"/>
-          <p:nvPr/>
-        </p:nvSpPr>
-        <p:spPr>
-          <a:xfrm>
-            <a:off x="1892808" y="5047488"/>
-            <a:ext cx="365760" cy="182880"/>
-          </a:xfrm>
-          <a:prstGeom prst="rect">
-            <a:avLst/>
-          </a:prstGeom>
-          <a:noFill/>
-          <a:ln/>
-        </p:spPr>
-        <p:txBody>
-          <a:bodyPr wrap="square" lIns="0" tIns="0" rIns="0" bIns="0" rtlCol="0" anchor="ctr"/>
-          <a:lstStyle/>
-          <a:p>
-            <a:pPr indent="0" marL="0">
-              <a:buNone/>
-            </a:pPr>
-            <a:r>
-              <a:rPr lang="en-US" sz="1000" dirty="0">
-                <a:solidFill>
-                  <a:schemeClr val="tx2"/>
-                </a:solidFill>
-              </a:rPr>
-              <a:t>23</a:t>
-            </a:r>
-            <a:endParaRPr lang="en-US" sz="1000" dirty="0"/>
-          </a:p>
-        </p:txBody>
-      </p:sp>
-      <p:sp>
-        <p:nvSpPr>
-          <p:cNvPr id="130" name="post-23"/>
-          <p:cNvSpPr/>
-          <p:nvPr/>
-        </p:nvSpPr>
-        <p:spPr>
-          <a:xfrm>
-            <a:off x="1892808" y="5230368"/>
-            <a:ext cx="1260566" cy="493776"/>
-          </a:xfrm>
-          <a:prstGeom prst="roundRect">
-            <a:avLst>
-              <a:gd name="adj" fmla="val 14815"/>
-            </a:avLst>
-          </a:prstGeom>
-          <a:solidFill>
-            <a:schemeClr val="accent1"/>
-          </a:solidFill>
-          <a:ln w="12700">
-            <a:solidFill>
-              <a:schemeClr val="accent1"/>
-            </a:solidFill>
-            <a:prstDash val="solid"/>
-          </a:ln>
-        </p:spPr>
-      </p:sp>
-      <p:sp>
-        <p:nvSpPr>
-          <p:cNvPr id="131" name="Text 129"/>
-          <p:cNvSpPr txBox="1"/>
-          <p:nvPr/>
-        </p:nvSpPr>
-        <p:spPr>
-          <a:xfrm>
-            <a:off x="1920240" y="5248656"/>
-            <a:ext cx="1004534" cy="457200"/>
-          </a:xfrm>
-          <a:prstGeom prst="rect">
-            <a:avLst/>
-          </a:prstGeom>
-          <a:noFill/>
-          <a:ln/>
-        </p:spPr>
-        <p:txBody>
-          <a:bodyPr wrap="square" lIns="0" tIns="0" rIns="0" bIns="0" rtlCol="0" anchor="ctr">
-            <a:normAutofit/>
-          </a:bodyPr>
-          <a:lstStyle/>
-          <a:p>
-            <a:pPr algn="ctr" indent="0" marL="0">
-              <a:buNone/>
-            </a:pPr>
-            <a:r>
-              <a:rPr lang="en-US" sz="1000" b="1" dirty="0">
-                <a:solidFill>
-                  <a:schemeClr val="tx1"/>
-                </a:solidFill>
-              </a:rPr>
-              <a:t>O RH cuida de todo mundo. Quem cuida do RH?</a:t>
-            </a:r>
-            <a:endParaRPr lang="en-US" sz="1000" dirty="0"/>
-          </a:p>
-        </p:txBody>
-      </p:sp>
-      <p:sp>
-        <p:nvSpPr>
-          <p:cNvPr id="132" name="tipo-23"/>
-          <p:cNvSpPr/>
-          <p:nvPr/>
-        </p:nvSpPr>
-        <p:spPr>
-          <a:xfrm>
-            <a:off x="2952206" y="5266944"/>
-            <a:ext cx="164592" cy="164592"/>
-          </a:xfrm>
-          <a:prstGeom prst="ellipse">
-            <a:avLst/>
-          </a:prstGeom>
-          <a:solidFill>
-            <a:schemeClr val="bg1"/>
-          </a:solidFill>
-          <a:ln w="9525">
-            <a:solidFill>
-              <a:schemeClr val="tx1"/>
-            </a:solidFill>
-            <a:prstDash val="solid"/>
-          </a:ln>
-        </p:spPr>
-      </p:sp>
-      <p:sp>
-        <p:nvSpPr>
-          <p:cNvPr id="133" name="Text 131"/>
-          <p:cNvSpPr txBox="1"/>
-          <p:nvPr/>
-        </p:nvSpPr>
-        <p:spPr>
-          <a:xfrm>
-            <a:off x="2952206" y="5266944"/>
-            <a:ext cx="164592" cy="164592"/>
-          </a:xfrm>
-          <a:prstGeom prst="rect">
-            <a:avLst/>
-          </a:prstGeom>
-          <a:noFill/>
-          <a:ln/>
-        </p:spPr>
-        <p:txBody>
-          <a:bodyPr wrap="square" lIns="0" tIns="0" rIns="0" bIns="0" rtlCol="0" anchor="ctr"/>
-          <a:lstStyle/>
-          <a:p>
-            <a:pPr algn="ctr" indent="0" marL="0">
-              <a:buNone/>
-            </a:pPr>
-            <a:r>
-              <a:rPr lang="en-US" sz="800" b="1" dirty="0">
-                <a:solidFill>
-                  <a:schemeClr val="tx1"/>
-                </a:solidFill>
-              </a:rPr>
-              <a:t>P</a:t>
-            </a:r>
-            <a:endParaRPr lang="en-US" sz="800" dirty="0"/>
-          </a:p>
-        </p:txBody>
-      </p:sp>
-      <p:sp>
-        <p:nvSpPr>
-          <p:cNvPr id="134" name="celula-24/11"/>
-          <p:cNvSpPr/>
-          <p:nvPr/>
-        </p:nvSpPr>
-        <p:spPr>
-          <a:xfrm>
-            <a:off x="3217382" y="5010912"/>
-            <a:ext cx="1388582" cy="768096"/>
-          </a:xfrm>
-          <a:prstGeom prst="rect">
-            <a:avLst/>
-          </a:prstGeom>
-          <a:solidFill>
-            <a:schemeClr val="bg2"/>
-          </a:solidFill>
-          <a:ln w="9525">
-            <a:solidFill>
-              <a:srgbClr val="A9CFC6"/>
-            </a:solidFill>
-            <a:prstDash val="solid"/>
-          </a:ln>
-        </p:spPr>
-      </p:sp>
-      <p:sp>
-        <p:nvSpPr>
-          <p:cNvPr id="135" name="Text 133"/>
-          <p:cNvSpPr txBox="1"/>
-          <p:nvPr/>
-        </p:nvSpPr>
-        <p:spPr>
-          <a:xfrm>
-            <a:off x="3281390" y="5047488"/>
-            <a:ext cx="365760" cy="182880"/>
-          </a:xfrm>
-          <a:prstGeom prst="rect">
-            <a:avLst/>
-          </a:prstGeom>
-          <a:noFill/>
-          <a:ln/>
-        </p:spPr>
-        <p:txBody>
-          <a:bodyPr wrap="square" lIns="0" tIns="0" rIns="0" bIns="0" rtlCol="0" anchor="ctr"/>
-          <a:lstStyle/>
-          <a:p>
-            <a:pPr indent="0" marL="0">
-              <a:buNone/>
-            </a:pPr>
-            <a:r>
-              <a:rPr lang="en-US" sz="1000" dirty="0">
-                <a:solidFill>
-                  <a:schemeClr val="tx2"/>
-                </a:solidFill>
-              </a:rPr>
-              <a:t>24</a:t>
-            </a:r>
-            <a:endParaRPr lang="en-US" sz="1000" dirty="0"/>
-          </a:p>
-        </p:txBody>
-      </p:sp>
-      <p:sp>
-        <p:nvSpPr>
-          <p:cNvPr id="136" name="celula-25/11"/>
-          <p:cNvSpPr/>
-          <p:nvPr/>
-        </p:nvSpPr>
-        <p:spPr>
-          <a:xfrm>
-            <a:off x="4605963" y="5010912"/>
-            <a:ext cx="1388582" cy="768096"/>
-          </a:xfrm>
-          <a:prstGeom prst="rect">
-            <a:avLst/>
-          </a:prstGeom>
-          <a:solidFill>
-            <a:schemeClr val="bg2"/>
-          </a:solidFill>
-          <a:ln w="9525">
-            <a:solidFill>
-              <a:srgbClr val="A9CFC6"/>
-            </a:solidFill>
-            <a:prstDash val="solid"/>
-          </a:ln>
-        </p:spPr>
-      </p:sp>
-      <p:sp>
-        <p:nvSpPr>
-          <p:cNvPr id="137" name="Text 135"/>
-          <p:cNvSpPr txBox="1"/>
-          <p:nvPr/>
-        </p:nvSpPr>
-        <p:spPr>
-          <a:xfrm>
-            <a:off x="4669971" y="5047488"/>
-            <a:ext cx="365760" cy="182880"/>
-          </a:xfrm>
-          <a:prstGeom prst="rect">
-            <a:avLst/>
-          </a:prstGeom>
-          <a:noFill/>
-          <a:ln/>
-        </p:spPr>
-        <p:txBody>
-          <a:bodyPr wrap="square" lIns="0" tIns="0" rIns="0" bIns="0" rtlCol="0" anchor="ctr"/>
-          <a:lstStyle/>
-          <a:p>
-            <a:pPr indent="0" marL="0">
-              <a:buNone/>
-            </a:pPr>
-            <a:r>
-              <a:rPr lang="en-US" sz="1000" dirty="0">
-                <a:solidFill>
-                  <a:schemeClr val="tx2"/>
-                </a:solidFill>
-              </a:rPr>
-              <a:t>25</a:t>
-            </a:r>
-            <a:endParaRPr lang="en-US" sz="1000" dirty="0"/>
-          </a:p>
-        </p:txBody>
-      </p:sp>
-      <p:sp>
-        <p:nvSpPr>
-          <p:cNvPr id="138" name="post-25"/>
-          <p:cNvSpPr/>
-          <p:nvPr/>
-        </p:nvSpPr>
-        <p:spPr>
-          <a:xfrm>
-            <a:off x="4669971" y="5230368"/>
-            <a:ext cx="1260566" cy="493776"/>
-          </a:xfrm>
-          <a:prstGeom prst="roundRect">
-            <a:avLst>
-              <a:gd name="adj" fmla="val 14815"/>
-            </a:avLst>
-          </a:prstGeom>
-          <a:solidFill>
-            <a:schemeClr val="tx1"/>
-          </a:solidFill>
-          <a:ln w="12700">
-            <a:solidFill>
-              <a:schemeClr val="tx1"/>
-            </a:solidFill>
-            <a:prstDash val="solid"/>
-          </a:ln>
-        </p:spPr>
-      </p:sp>
-      <p:sp>
-        <p:nvSpPr>
-          <p:cNvPr id="139" name="Text 137"/>
-          <p:cNvSpPr txBox="1"/>
-          <p:nvPr/>
-        </p:nvSpPr>
-        <p:spPr>
-          <a:xfrm>
-            <a:off x="4697403" y="5248656"/>
-            <a:ext cx="1004534" cy="457200"/>
-          </a:xfrm>
-          <a:prstGeom prst="rect">
-            <a:avLst/>
-          </a:prstGeom>
-          <a:noFill/>
-          <a:ln/>
-        </p:spPr>
-        <p:txBody>
-          <a:bodyPr wrap="square" lIns="0" tIns="0" rIns="0" bIns="0" rtlCol="0" anchor="ctr">
-            <a:normAutofit/>
-          </a:bodyPr>
-          <a:lstStyle/>
-          <a:p>
-            <a:pPr algn="ctr" indent="0" marL="0">
-              <a:buNone/>
-            </a:pPr>
-            <a:r>
-              <a:rPr lang="en-US" sz="1000" b="1" dirty="0">
-                <a:solidFill>
-                  <a:schemeClr val="bg1"/>
-                </a:solidFill>
-              </a:rPr>
-              <a:t>Por que a Geração Z está tão desconectada do trabalho?</a:t>
-            </a:r>
-            <a:endParaRPr lang="en-US" sz="1000" dirty="0"/>
-          </a:p>
-        </p:txBody>
-      </p:sp>
-      <p:sp>
-        <p:nvSpPr>
-          <p:cNvPr id="140" name="tipo-25"/>
-          <p:cNvSpPr/>
-          <p:nvPr/>
-        </p:nvSpPr>
-        <p:spPr>
-          <a:xfrm>
-            <a:off x="5729369" y="5266944"/>
-            <a:ext cx="164592" cy="164592"/>
-          </a:xfrm>
-          <a:prstGeom prst="ellipse">
-            <a:avLst/>
-          </a:prstGeom>
-          <a:solidFill>
-            <a:schemeClr val="bg1"/>
-          </a:solidFill>
-          <a:ln w="9525">
-            <a:solidFill>
-              <a:schemeClr val="tx1"/>
-            </a:solidFill>
-            <a:prstDash val="solid"/>
-          </a:ln>
-        </p:spPr>
-      </p:sp>
-      <p:sp>
-        <p:nvSpPr>
-          <p:cNvPr id="141" name="Text 139"/>
-          <p:cNvSpPr txBox="1"/>
-          <p:nvPr/>
-        </p:nvSpPr>
-        <p:spPr>
-          <a:xfrm>
-            <a:off x="5729369" y="5266944"/>
-            <a:ext cx="164592" cy="164592"/>
-          </a:xfrm>
-          <a:prstGeom prst="rect">
-            <a:avLst/>
-          </a:prstGeom>
-          <a:noFill/>
-          <a:ln/>
-        </p:spPr>
-        <p:txBody>
-          <a:bodyPr wrap="square" lIns="0" tIns="0" rIns="0" bIns="0" rtlCol="0" anchor="ctr"/>
-          <a:lstStyle/>
-          <a:p>
-            <a:pPr algn="ctr" indent="0" marL="0">
-              <a:buNone/>
-            </a:pPr>
-            <a:r>
-              <a:rPr lang="en-US" sz="800" b="1" dirty="0">
-                <a:solidFill>
-                  <a:schemeClr val="tx1"/>
-                </a:solidFill>
-              </a:rPr>
-              <a:t>P</a:t>
-            </a:r>
-            <a:endParaRPr lang="en-US" sz="800" dirty="0"/>
-          </a:p>
-        </p:txBody>
-      </p:sp>
-      <p:sp>
-        <p:nvSpPr>
-          <p:cNvPr id="142" name="celula-26/11"/>
-          <p:cNvSpPr/>
-          <p:nvPr/>
-        </p:nvSpPr>
-        <p:spPr>
-          <a:xfrm>
-            <a:off x="5994545" y="5010912"/>
-            <a:ext cx="1388582" cy="768096"/>
-          </a:xfrm>
-          <a:prstGeom prst="rect">
-            <a:avLst/>
-          </a:prstGeom>
-          <a:solidFill>
-            <a:schemeClr val="bg2"/>
-          </a:solidFill>
-          <a:ln w="9525">
-            <a:solidFill>
-              <a:srgbClr val="A9CFC6"/>
-            </a:solidFill>
-            <a:prstDash val="solid"/>
-          </a:ln>
-        </p:spPr>
-      </p:sp>
-      <p:sp>
-        <p:nvSpPr>
-          <p:cNvPr id="143" name="Text 141"/>
-          <p:cNvSpPr txBox="1"/>
-          <p:nvPr/>
-        </p:nvSpPr>
-        <p:spPr>
-          <a:xfrm>
-            <a:off x="6058553" y="5047488"/>
-            <a:ext cx="365760" cy="182880"/>
-          </a:xfrm>
-          <a:prstGeom prst="rect">
-            <a:avLst/>
-          </a:prstGeom>
-          <a:noFill/>
-          <a:ln/>
-        </p:spPr>
-        <p:txBody>
-          <a:bodyPr wrap="square" lIns="0" tIns="0" rIns="0" bIns="0" rtlCol="0" anchor="ctr"/>
-          <a:lstStyle/>
-          <a:p>
-            <a:pPr indent="0" marL="0">
-              <a:buNone/>
-            </a:pPr>
-            <a:r>
-              <a:rPr lang="en-US" sz="1000" dirty="0">
-                <a:solidFill>
-                  <a:schemeClr val="tx2"/>
-                </a:solidFill>
-              </a:rPr>
-              <a:t>26</a:t>
-            </a:r>
-            <a:endParaRPr lang="en-US" sz="1000" dirty="0"/>
-          </a:p>
-        </p:txBody>
-      </p:sp>
-      <p:sp>
-        <p:nvSpPr>
-          <p:cNvPr id="144" name="celula-27/11"/>
-          <p:cNvSpPr/>
-          <p:nvPr/>
-        </p:nvSpPr>
-        <p:spPr>
-          <a:xfrm>
-            <a:off x="7383127" y="5010912"/>
-            <a:ext cx="1388582" cy="768096"/>
-          </a:xfrm>
-          <a:prstGeom prst="rect">
-            <a:avLst/>
-          </a:prstGeom>
-          <a:solidFill>
-            <a:schemeClr val="bg2"/>
-          </a:solidFill>
-          <a:ln w="9525">
-            <a:solidFill>
-              <a:srgbClr val="A9CFC6"/>
-            </a:solidFill>
-            <a:prstDash val="solid"/>
-          </a:ln>
-        </p:spPr>
-      </p:sp>
-      <p:sp>
-        <p:nvSpPr>
-          <p:cNvPr id="145" name="Text 143"/>
-          <p:cNvSpPr txBox="1"/>
-          <p:nvPr/>
-        </p:nvSpPr>
-        <p:spPr>
-          <a:xfrm>
-            <a:off x="7447135" y="5047488"/>
-            <a:ext cx="365760" cy="182880"/>
-          </a:xfrm>
-          <a:prstGeom prst="rect">
-            <a:avLst/>
-          </a:prstGeom>
-          <a:noFill/>
-          <a:ln/>
-        </p:spPr>
-        <p:txBody>
-          <a:bodyPr wrap="square" lIns="0" tIns="0" rIns="0" bIns="0" rtlCol="0" anchor="ctr"/>
-          <a:lstStyle/>
-          <a:p>
-            <a:pPr indent="0" marL="0">
-              <a:buNone/>
-            </a:pPr>
-            <a:r>
-              <a:rPr lang="en-US" sz="1000" dirty="0">
-                <a:solidFill>
-                  <a:schemeClr val="tx2"/>
-                </a:solidFill>
-              </a:rPr>
-              <a:t>27</a:t>
-            </a:r>
-            <a:endParaRPr lang="en-US" sz="1000" dirty="0"/>
-          </a:p>
-        </p:txBody>
-      </p:sp>
-      <p:sp>
-        <p:nvSpPr>
-          <p:cNvPr id="146" name="post-27"/>
-          <p:cNvSpPr/>
-          <p:nvPr/>
-        </p:nvSpPr>
-        <p:spPr>
-          <a:xfrm>
-            <a:off x="7447135" y="5230368"/>
-            <a:ext cx="1260566" cy="493776"/>
-          </a:xfrm>
-          <a:prstGeom prst="roundRect">
-            <a:avLst>
-              <a:gd name="adj" fmla="val 14815"/>
-            </a:avLst>
-          </a:prstGeom>
-          <a:solidFill>
-            <a:schemeClr val="tx1"/>
-          </a:solidFill>
-          <a:ln w="12700">
-            <a:solidFill>
-              <a:schemeClr val="tx1"/>
-            </a:solidFill>
-            <a:prstDash val="solid"/>
-          </a:ln>
-        </p:spPr>
-      </p:sp>
-      <p:sp>
-        <p:nvSpPr>
-          <p:cNvPr id="147" name="Text 145"/>
-          <p:cNvSpPr txBox="1"/>
-          <p:nvPr/>
-        </p:nvSpPr>
-        <p:spPr>
-          <a:xfrm>
-            <a:off x="7474567" y="5248656"/>
-            <a:ext cx="1004534" cy="457200"/>
-          </a:xfrm>
-          <a:prstGeom prst="rect">
-            <a:avLst/>
-          </a:prstGeom>
-          <a:noFill/>
-          <a:ln/>
-        </p:spPr>
-        <p:txBody>
-          <a:bodyPr wrap="square" lIns="0" tIns="0" rIns="0" bIns="0" rtlCol="0" anchor="ctr">
-            <a:normAutofit/>
-          </a:bodyPr>
-          <a:lstStyle/>
-          <a:p>
-            <a:pPr algn="ctr" indent="0" marL="0">
-              <a:buNone/>
-            </a:pPr>
-            <a:r>
-              <a:rPr lang="en-US" sz="1000" b="1" dirty="0">
-                <a:solidFill>
-                  <a:schemeClr val="bg1"/>
-                </a:solidFill>
-              </a:rPr>
-              <a:t>Case Chemitec: 98% de adesão</a:t>
-            </a:r>
-            <a:endParaRPr lang="en-US" sz="1000" dirty="0"/>
-          </a:p>
-        </p:txBody>
-      </p:sp>
-      <p:sp>
-        <p:nvSpPr>
-          <p:cNvPr id="148" name="tipo-27"/>
-          <p:cNvSpPr/>
-          <p:nvPr/>
-        </p:nvSpPr>
-        <p:spPr>
-          <a:xfrm>
-            <a:off x="8506533" y="5266944"/>
-            <a:ext cx="164592" cy="164592"/>
-          </a:xfrm>
-          <a:prstGeom prst="ellipse">
-            <a:avLst/>
-          </a:prstGeom>
-          <a:solidFill>
-            <a:schemeClr val="bg1"/>
-          </a:solidFill>
-          <a:ln w="9525">
-            <a:solidFill>
-              <a:schemeClr val="tx1"/>
-            </a:solidFill>
-            <a:prstDash val="solid"/>
-          </a:ln>
-        </p:spPr>
-      </p:sp>
-      <p:sp>
-        <p:nvSpPr>
-          <p:cNvPr id="149" name="Text 147"/>
-          <p:cNvSpPr txBox="1"/>
-          <p:nvPr/>
-        </p:nvSpPr>
-        <p:spPr>
-          <a:xfrm>
-            <a:off x="8506533" y="5266944"/>
-            <a:ext cx="164592" cy="164592"/>
-          </a:xfrm>
-          <a:prstGeom prst="rect">
-            <a:avLst/>
-          </a:prstGeom>
-          <a:noFill/>
-          <a:ln/>
-        </p:spPr>
-        <p:txBody>
-          <a:bodyPr wrap="square" lIns="0" tIns="0" rIns="0" bIns="0" rtlCol="0" anchor="ctr"/>
-          <a:lstStyle/>
-          <a:p>
-            <a:pPr algn="ctr" indent="0" marL="0">
-              <a:buNone/>
-            </a:pPr>
-            <a:r>
-              <a:rPr lang="en-US" sz="800" b="1" dirty="0">
-                <a:solidFill>
-                  <a:schemeClr val="tx1"/>
-                </a:solidFill>
-              </a:rPr>
-              <a:t>P</a:t>
-            </a:r>
-            <a:endParaRPr lang="en-US" sz="800" dirty="0"/>
-          </a:p>
-        </p:txBody>
-      </p:sp>
-      <p:sp>
-        <p:nvSpPr>
-          <p:cNvPr id="150" name="celula-28/11"/>
-          <p:cNvSpPr/>
-          <p:nvPr/>
-        </p:nvSpPr>
-        <p:spPr>
-          <a:xfrm>
-            <a:off x="8771709" y="5010912"/>
-            <a:ext cx="1388582" cy="768096"/>
-          </a:xfrm>
-          <a:prstGeom prst="rect">
-            <a:avLst/>
-          </a:prstGeom>
-          <a:solidFill>
-            <a:schemeClr val="bg2"/>
-          </a:solidFill>
-          <a:ln w="9525">
-            <a:solidFill>
-              <a:srgbClr val="A9CFC6"/>
-            </a:solidFill>
-            <a:prstDash val="solid"/>
-          </a:ln>
-        </p:spPr>
-      </p:sp>
-      <p:sp>
-        <p:nvSpPr>
-          <p:cNvPr id="151" name="Text 149"/>
-          <p:cNvSpPr txBox="1"/>
-          <p:nvPr/>
-        </p:nvSpPr>
-        <p:spPr>
-          <a:xfrm>
-            <a:off x="8835717" y="5047488"/>
-            <a:ext cx="365760" cy="182880"/>
-          </a:xfrm>
-          <a:prstGeom prst="rect">
-            <a:avLst/>
-          </a:prstGeom>
-          <a:noFill/>
-          <a:ln/>
-        </p:spPr>
-        <p:txBody>
-          <a:bodyPr wrap="square" lIns="0" tIns="0" rIns="0" bIns="0" rtlCol="0" anchor="ctr"/>
-          <a:lstStyle/>
-          <a:p>
-            <a:pPr indent="0" marL="0">
-              <a:buNone/>
-            </a:pPr>
-            <a:r>
-              <a:rPr lang="en-US" sz="1000" dirty="0">
-                <a:solidFill>
-                  <a:schemeClr val="tx2"/>
-                </a:solidFill>
-              </a:rPr>
-              <a:t>28</a:t>
-            </a:r>
-            <a:endParaRPr lang="en-US" sz="1000" dirty="0"/>
-          </a:p>
-        </p:txBody>
-      </p:sp>
-      <p:sp>
-        <p:nvSpPr>
-          <p:cNvPr id="152" name="celula-29/11"/>
-          <p:cNvSpPr/>
-          <p:nvPr/>
-        </p:nvSpPr>
-        <p:spPr>
-          <a:xfrm>
-            <a:off x="10160290" y="5010912"/>
-            <a:ext cx="1388582" cy="768096"/>
-          </a:xfrm>
-          <a:prstGeom prst="rect">
-            <a:avLst/>
-          </a:prstGeom>
-          <a:solidFill>
-            <a:schemeClr val="bg2"/>
-          </a:solidFill>
-          <a:ln w="9525">
-            <a:solidFill>
-              <a:srgbClr val="A9CFC6"/>
-            </a:solidFill>
-            <a:prstDash val="solid"/>
-          </a:ln>
-        </p:spPr>
-      </p:sp>
-      <p:sp>
-        <p:nvSpPr>
-          <p:cNvPr id="153" name="Text 151"/>
-          <p:cNvSpPr txBox="1"/>
-          <p:nvPr/>
-        </p:nvSpPr>
-        <p:spPr>
-          <a:xfrm>
-            <a:off x="10224298" y="5047488"/>
-            <a:ext cx="365760" cy="182880"/>
-          </a:xfrm>
-          <a:prstGeom prst="rect">
-            <a:avLst/>
-          </a:prstGeom>
-          <a:noFill/>
-          <a:ln/>
-        </p:spPr>
-        <p:txBody>
-          <a:bodyPr wrap="square" lIns="0" tIns="0" rIns="0" bIns="0" rtlCol="0" anchor="ctr"/>
-          <a:lstStyle/>
-          <a:p>
-            <a:pPr indent="0" marL="0">
-              <a:buNone/>
-            </a:pPr>
-            <a:r>
-              <a:rPr lang="en-US" sz="1000" dirty="0">
-                <a:solidFill>
-                  <a:schemeClr val="tx2"/>
-                </a:solidFill>
-              </a:rPr>
-              <a:t>29</a:t>
-            </a:r>
-            <a:endParaRPr lang="en-US" sz="1000" dirty="0"/>
-          </a:p>
-        </p:txBody>
-      </p:sp>
-      <p:sp>
-        <p:nvSpPr>
-          <p:cNvPr id="154" name="Text 152"/>
-          <p:cNvSpPr txBox="1"/>
-          <p:nvPr/>
-        </p:nvSpPr>
-        <p:spPr>
-          <a:xfrm>
-            <a:off x="640080" y="5779008"/>
-            <a:ext cx="1143000" cy="768096"/>
-          </a:xfrm>
-          <a:prstGeom prst="rect">
-            <a:avLst/>
-          </a:prstGeom>
-          <a:noFill/>
-          <a:ln/>
-        </p:spPr>
-        <p:txBody>
-          <a:bodyPr wrap="square" lIns="0" tIns="0" rIns="0" bIns="0" rtlCol="0" anchor="ctr"/>
-          <a:lstStyle/>
-          <a:p>
-            <a:pPr indent="0" marL="0">
-              <a:buNone/>
-            </a:pPr>
-            <a:r>
-              <a:rPr lang="en-US" sz="1400" b="1" dirty="0">
-                <a:solidFill>
-                  <a:schemeClr val="tx1"/>
-                </a:solidFill>
-              </a:rPr>
-              <a:t>Semana 7</a:t>
-            </a:r>
-            <a:endParaRPr lang="en-US" sz="1400" dirty="0"/>
-          </a:p>
-          <a:p>
-            <a:pPr indent="0" marL="0">
-              <a:buNone/>
-            </a:pPr>
-            <a:r>
-              <a:rPr lang="en-US" sz="1100" dirty="0">
-                <a:solidFill>
-                  <a:schemeClr val="tx1"/>
-                </a:solidFill>
-              </a:rPr>
-              <a:t>30/11 a 04/12</a:t>
-            </a:r>
-            <a:endParaRPr lang="en-US" sz="1400" dirty="0"/>
-          </a:p>
-        </p:txBody>
-      </p:sp>
-      <p:sp>
-        <p:nvSpPr>
-          <p:cNvPr id="155" name="celula-30/11"/>
-          <p:cNvSpPr/>
-          <p:nvPr/>
-        </p:nvSpPr>
-        <p:spPr>
-          <a:xfrm>
-            <a:off x="1828800" y="5779008"/>
-            <a:ext cx="1388582" cy="768096"/>
-          </a:xfrm>
-          <a:prstGeom prst="rect">
-            <a:avLst/>
-          </a:prstGeom>
-          <a:solidFill>
-            <a:schemeClr val="bg2"/>
-          </a:solidFill>
-          <a:ln w="9525">
-            <a:solidFill>
-              <a:srgbClr val="A9CFC6"/>
-            </a:solidFill>
-            <a:prstDash val="solid"/>
-          </a:ln>
-        </p:spPr>
-      </p:sp>
-      <p:sp>
-        <p:nvSpPr>
-          <p:cNvPr id="156" name="Text 154"/>
-          <p:cNvSpPr txBox="1"/>
-          <p:nvPr/>
-        </p:nvSpPr>
-        <p:spPr>
-          <a:xfrm>
-            <a:off x="1892808" y="5815584"/>
-            <a:ext cx="365760" cy="182880"/>
-          </a:xfrm>
-          <a:prstGeom prst="rect">
-            <a:avLst/>
-          </a:prstGeom>
-          <a:noFill/>
-          <a:ln/>
-        </p:spPr>
-        <p:txBody>
-          <a:bodyPr wrap="square" lIns="0" tIns="0" rIns="0" bIns="0" rtlCol="0" anchor="ctr"/>
-          <a:lstStyle/>
-          <a:p>
-            <a:pPr indent="0" marL="0">
-              <a:buNone/>
-            </a:pPr>
-            <a:r>
-              <a:rPr lang="en-US" sz="1000" dirty="0">
-                <a:solidFill>
-                  <a:schemeClr val="tx2"/>
-                </a:solidFill>
-              </a:rPr>
-              <a:t>30</a:t>
-            </a:r>
-            <a:endParaRPr lang="en-US" sz="1000" dirty="0"/>
-          </a:p>
-        </p:txBody>
-      </p:sp>
-      <p:sp>
-        <p:nvSpPr>
-          <p:cNvPr id="157" name="post-30"/>
-          <p:cNvSpPr/>
-          <p:nvPr/>
-        </p:nvSpPr>
-        <p:spPr>
-          <a:xfrm>
-            <a:off x="1892808" y="5998464"/>
-            <a:ext cx="1260566" cy="493776"/>
-          </a:xfrm>
-          <a:prstGeom prst="roundRect">
-            <a:avLst>
-              <a:gd name="adj" fmla="val 14815"/>
-            </a:avLst>
-          </a:prstGeom>
-          <a:solidFill>
-            <a:schemeClr val="accent1"/>
-          </a:solidFill>
-          <a:ln w="12700">
-            <a:solidFill>
-              <a:schemeClr val="accent1"/>
-            </a:solidFill>
-            <a:prstDash val="solid"/>
-          </a:ln>
-        </p:spPr>
-      </p:sp>
-      <p:sp>
-        <p:nvSpPr>
-          <p:cNvPr id="158" name="Text 156"/>
-          <p:cNvSpPr txBox="1"/>
-          <p:nvPr/>
-        </p:nvSpPr>
-        <p:spPr>
-          <a:xfrm>
-            <a:off x="1920240" y="6016752"/>
-            <a:ext cx="1004534" cy="457200"/>
-          </a:xfrm>
-          <a:prstGeom prst="rect">
-            <a:avLst/>
-          </a:prstGeom>
-          <a:noFill/>
-          <a:ln/>
-        </p:spPr>
-        <p:txBody>
-          <a:bodyPr wrap="square" lIns="0" tIns="0" rIns="0" bIns="0" rtlCol="0" anchor="ctr">
-            <a:normAutofit/>
-          </a:bodyPr>
-          <a:lstStyle/>
-          <a:p>
-            <a:pPr algn="ctr" indent="0" marL="0">
-              <a:buNone/>
-            </a:pPr>
-            <a:r>
-              <a:rPr lang="en-US" sz="1000" b="1" dirty="0">
-                <a:solidFill>
-                  <a:schemeClr val="tx1"/>
-                </a:solidFill>
-              </a:rPr>
-              <a:t>Dezembro chegou: a corrida das metas também adoece</a:t>
-            </a:r>
-            <a:endParaRPr lang="en-US" sz="1000" dirty="0"/>
-          </a:p>
-        </p:txBody>
-      </p:sp>
-      <p:sp>
-        <p:nvSpPr>
-          <p:cNvPr id="159" name="tipo-30"/>
-          <p:cNvSpPr/>
-          <p:nvPr/>
-        </p:nvSpPr>
-        <p:spPr>
-          <a:xfrm>
-            <a:off x="2952206" y="6035040"/>
-            <a:ext cx="164592" cy="164592"/>
-          </a:xfrm>
-          <a:prstGeom prst="ellipse">
-            <a:avLst/>
-          </a:prstGeom>
-          <a:solidFill>
-            <a:schemeClr val="bg1"/>
-          </a:solidFill>
-          <a:ln w="9525">
-            <a:solidFill>
-              <a:schemeClr val="tx1"/>
-            </a:solidFill>
-            <a:prstDash val="solid"/>
-          </a:ln>
-        </p:spPr>
-      </p:sp>
-      <p:sp>
-        <p:nvSpPr>
-          <p:cNvPr id="160" name="Text 158"/>
-          <p:cNvSpPr txBox="1"/>
-          <p:nvPr/>
-        </p:nvSpPr>
-        <p:spPr>
-          <a:xfrm>
-            <a:off x="2952206" y="6035040"/>
-            <a:ext cx="164592" cy="164592"/>
-          </a:xfrm>
-          <a:prstGeom prst="rect">
-            <a:avLst/>
-          </a:prstGeom>
-          <a:noFill/>
-          <a:ln/>
-        </p:spPr>
-        <p:txBody>
-          <a:bodyPr wrap="square" lIns="0" tIns="0" rIns="0" bIns="0" rtlCol="0" anchor="ctr"/>
-          <a:lstStyle/>
-          <a:p>
-            <a:pPr algn="ctr" indent="0" marL="0">
-              <a:buNone/>
-            </a:pPr>
-            <a:r>
-              <a:rPr lang="en-US" sz="800" b="1" dirty="0">
-                <a:solidFill>
-                  <a:schemeClr val="tx1"/>
-                </a:solidFill>
-              </a:rPr>
-              <a:t>E</a:t>
-            </a:r>
-            <a:endParaRPr lang="en-US" sz="800" dirty="0"/>
-          </a:p>
-        </p:txBody>
-      </p:sp>
-      <p:sp>
-        <p:nvSpPr>
-          <p:cNvPr id="161" name="celula-01/12"/>
-          <p:cNvSpPr/>
-          <p:nvPr/>
-        </p:nvSpPr>
-        <p:spPr>
-          <a:xfrm>
-            <a:off x="3217382" y="5779008"/>
-            <a:ext cx="1388582" cy="768096"/>
-          </a:xfrm>
-          <a:prstGeom prst="rect">
-            <a:avLst/>
-          </a:prstGeom>
-          <a:solidFill>
-            <a:schemeClr val="bg2"/>
-          </a:solidFill>
-          <a:ln w="9525">
-            <a:solidFill>
-              <a:srgbClr val="A9CFC6"/>
-            </a:solidFill>
-            <a:prstDash val="solid"/>
-          </a:ln>
-        </p:spPr>
-      </p:sp>
-      <p:sp>
-        <p:nvSpPr>
-          <p:cNvPr id="162" name="Text 160"/>
-          <p:cNvSpPr txBox="1"/>
-          <p:nvPr/>
-        </p:nvSpPr>
-        <p:spPr>
-          <a:xfrm>
-            <a:off x="3281390" y="5815584"/>
-            <a:ext cx="365760" cy="182880"/>
-          </a:xfrm>
-          <a:prstGeom prst="rect">
-            <a:avLst/>
-          </a:prstGeom>
-          <a:noFill/>
-          <a:ln/>
-        </p:spPr>
-        <p:txBody>
-          <a:bodyPr wrap="square" lIns="0" tIns="0" rIns="0" bIns="0" rtlCol="0" anchor="ctr"/>
-          <a:lstStyle/>
-          <a:p>
-            <a:pPr indent="0" marL="0">
-              <a:buNone/>
-            </a:pPr>
-            <a:r>
-              <a:rPr lang="en-US" sz="1000" dirty="0">
-                <a:solidFill>
-                  <a:srgbClr val="B9C4C1"/>
-                </a:solidFill>
-              </a:rPr>
-              <a:t>01</a:t>
-            </a:r>
-            <a:endParaRPr lang="en-US" sz="1000" dirty="0"/>
-          </a:p>
-        </p:txBody>
-      </p:sp>
-      <p:sp>
-        <p:nvSpPr>
-          <p:cNvPr id="163" name="celula-02/12"/>
-          <p:cNvSpPr/>
-          <p:nvPr/>
-        </p:nvSpPr>
-        <p:spPr>
-          <a:xfrm>
-            <a:off x="4605963" y="5779008"/>
-            <a:ext cx="1388582" cy="768096"/>
-          </a:xfrm>
-          <a:prstGeom prst="rect">
-            <a:avLst/>
-          </a:prstGeom>
-          <a:solidFill>
-            <a:schemeClr val="bg2"/>
-          </a:solidFill>
-          <a:ln w="9525">
-            <a:solidFill>
-              <a:srgbClr val="A9CFC6"/>
-            </a:solidFill>
-            <a:prstDash val="solid"/>
-          </a:ln>
-        </p:spPr>
-      </p:sp>
-      <p:sp>
-        <p:nvSpPr>
-          <p:cNvPr id="164" name="Text 162"/>
-          <p:cNvSpPr txBox="1"/>
-          <p:nvPr/>
-        </p:nvSpPr>
-        <p:spPr>
-          <a:xfrm>
-            <a:off x="4669971" y="5815584"/>
-            <a:ext cx="365760" cy="182880"/>
-          </a:xfrm>
-          <a:prstGeom prst="rect">
-            <a:avLst/>
-          </a:prstGeom>
-          <a:noFill/>
-          <a:ln/>
-        </p:spPr>
-        <p:txBody>
-          <a:bodyPr wrap="square" lIns="0" tIns="0" rIns="0" bIns="0" rtlCol="0" anchor="ctr"/>
-          <a:lstStyle/>
-          <a:p>
-            <a:pPr indent="0" marL="0">
-              <a:buNone/>
-            </a:pPr>
-            <a:r>
-              <a:rPr lang="en-US" sz="1000" dirty="0">
-                <a:solidFill>
-                  <a:srgbClr val="B9C4C1"/>
-                </a:solidFill>
-              </a:rPr>
-              <a:t>02</a:t>
-            </a:r>
-            <a:endParaRPr lang="en-US" sz="1000" dirty="0"/>
-          </a:p>
-        </p:txBody>
-      </p:sp>
-      <p:sp>
-        <p:nvSpPr>
-          <p:cNvPr id="165" name="celula-03/12"/>
-          <p:cNvSpPr/>
-          <p:nvPr/>
-        </p:nvSpPr>
-        <p:spPr>
-          <a:xfrm>
-            <a:off x="5994545" y="5779008"/>
-            <a:ext cx="1388582" cy="768096"/>
-          </a:xfrm>
-          <a:prstGeom prst="rect">
-            <a:avLst/>
-          </a:prstGeom>
-          <a:solidFill>
-            <a:schemeClr val="bg2"/>
-          </a:solidFill>
-          <a:ln w="9525">
-            <a:solidFill>
-              <a:srgbClr val="A9CFC6"/>
-            </a:solidFill>
-            <a:prstDash val="solid"/>
-          </a:ln>
-        </p:spPr>
-      </p:sp>
-      <p:sp>
-        <p:nvSpPr>
-          <p:cNvPr id="166" name="Text 164"/>
-          <p:cNvSpPr txBox="1"/>
-          <p:nvPr/>
-        </p:nvSpPr>
-        <p:spPr>
-          <a:xfrm>
-            <a:off x="6058553" y="5815584"/>
-            <a:ext cx="365760" cy="182880"/>
-          </a:xfrm>
-          <a:prstGeom prst="rect">
-            <a:avLst/>
-          </a:prstGeom>
-          <a:noFill/>
-          <a:ln/>
-        </p:spPr>
-        <p:txBody>
-          <a:bodyPr wrap="square" lIns="0" tIns="0" rIns="0" bIns="0" rtlCol="0" anchor="ctr"/>
-          <a:lstStyle/>
-          <a:p>
-            <a:pPr indent="0" marL="0">
-              <a:buNone/>
-            </a:pPr>
-            <a:r>
-              <a:rPr lang="en-US" sz="1000" dirty="0">
-                <a:solidFill>
-                  <a:srgbClr val="B9C4C1"/>
-                </a:solidFill>
-              </a:rPr>
-              <a:t>03</a:t>
-            </a:r>
-            <a:endParaRPr lang="en-US" sz="1000" dirty="0"/>
-          </a:p>
-        </p:txBody>
-      </p:sp>
-      <p:sp>
-        <p:nvSpPr>
-          <p:cNvPr id="167" name="celula-04/12"/>
-          <p:cNvSpPr/>
-          <p:nvPr/>
-        </p:nvSpPr>
-        <p:spPr>
-          <a:xfrm>
-            <a:off x="7383127" y="5779008"/>
-            <a:ext cx="1388582" cy="768096"/>
-          </a:xfrm>
-          <a:prstGeom prst="rect">
-            <a:avLst/>
-          </a:prstGeom>
-          <a:solidFill>
-            <a:schemeClr val="bg2"/>
-          </a:solidFill>
-          <a:ln w="9525">
-            <a:solidFill>
-              <a:srgbClr val="A9CFC6"/>
-            </a:solidFill>
-            <a:prstDash val="solid"/>
-          </a:ln>
-        </p:spPr>
-      </p:sp>
-      <p:sp>
-        <p:nvSpPr>
-          <p:cNvPr id="168" name="Text 166"/>
-          <p:cNvSpPr txBox="1"/>
-          <p:nvPr/>
-        </p:nvSpPr>
-        <p:spPr>
-          <a:xfrm>
-            <a:off x="7447135" y="5815584"/>
-            <a:ext cx="365760" cy="182880"/>
-          </a:xfrm>
-          <a:prstGeom prst="rect">
-            <a:avLst/>
-          </a:prstGeom>
-          <a:noFill/>
-          <a:ln/>
-        </p:spPr>
-        <p:txBody>
-          <a:bodyPr wrap="square" lIns="0" tIns="0" rIns="0" bIns="0" rtlCol="0" anchor="ctr"/>
-          <a:lstStyle/>
-          <a:p>
-            <a:pPr indent="0" marL="0">
-              <a:buNone/>
-            </a:pPr>
-            <a:r>
-              <a:rPr lang="en-US" sz="1000" dirty="0">
-                <a:solidFill>
-                  <a:srgbClr val="B9C4C1"/>
-                </a:solidFill>
-              </a:rPr>
-              <a:t>04</a:t>
-            </a:r>
-            <a:endParaRPr lang="en-US" sz="1000" dirty="0"/>
-          </a:p>
-        </p:txBody>
-      </p:sp>
-      <p:sp>
-        <p:nvSpPr>
-          <p:cNvPr id="169" name="celula-05/12"/>
-          <p:cNvSpPr/>
-          <p:nvPr/>
-        </p:nvSpPr>
-        <p:spPr>
-          <a:xfrm>
-            <a:off x="8771709" y="5779008"/>
-            <a:ext cx="1388582" cy="768096"/>
-          </a:xfrm>
-          <a:prstGeom prst="rect">
-            <a:avLst/>
-          </a:prstGeom>
-          <a:solidFill>
-            <a:schemeClr val="bg2"/>
-          </a:solidFill>
-          <a:ln w="9525">
-            <a:solidFill>
-              <a:srgbClr val="A9CFC6"/>
-            </a:solidFill>
-            <a:prstDash val="solid"/>
-          </a:ln>
-        </p:spPr>
-      </p:sp>
-      <p:sp>
-        <p:nvSpPr>
-          <p:cNvPr id="170" name="Text 168"/>
-          <p:cNvSpPr txBox="1"/>
-          <p:nvPr/>
-        </p:nvSpPr>
-        <p:spPr>
-          <a:xfrm>
-            <a:off x="8835717" y="5815584"/>
-            <a:ext cx="365760" cy="182880"/>
-          </a:xfrm>
-          <a:prstGeom prst="rect">
-            <a:avLst/>
-          </a:prstGeom>
-          <a:noFill/>
-          <a:ln/>
-        </p:spPr>
-        <p:txBody>
-          <a:bodyPr wrap="square" lIns="0" tIns="0" rIns="0" bIns="0" rtlCol="0" anchor="ctr"/>
-          <a:lstStyle/>
-          <a:p>
-            <a:pPr indent="0" marL="0">
-              <a:buNone/>
-            </a:pPr>
-            <a:r>
-              <a:rPr lang="en-US" sz="1000" dirty="0">
-                <a:solidFill>
-                  <a:srgbClr val="B9C4C1"/>
-                </a:solidFill>
-              </a:rPr>
-              <a:t>05</a:t>
-            </a:r>
-            <a:endParaRPr lang="en-US" sz="1000" dirty="0"/>
-          </a:p>
-        </p:txBody>
-      </p:sp>
-      <p:sp>
-        <p:nvSpPr>
-          <p:cNvPr id="171" name="celula-06/12"/>
-          <p:cNvSpPr/>
-          <p:nvPr/>
-        </p:nvSpPr>
-        <p:spPr>
-          <a:xfrm>
-            <a:off x="10160290" y="5779008"/>
-            <a:ext cx="1388582" cy="768096"/>
-          </a:xfrm>
-          <a:prstGeom prst="rect">
-            <a:avLst/>
-          </a:prstGeom>
-          <a:solidFill>
-            <a:schemeClr val="bg2"/>
-          </a:solidFill>
-          <a:ln w="9525">
-            <a:solidFill>
-              <a:srgbClr val="A9CFC6"/>
-            </a:solidFill>
-            <a:prstDash val="solid"/>
-          </a:ln>
-        </p:spPr>
-      </p:sp>
-      <p:sp>
-        <p:nvSpPr>
-          <p:cNvPr id="172" name="Text 170"/>
-          <p:cNvSpPr txBox="1"/>
-          <p:nvPr/>
-        </p:nvSpPr>
-        <p:spPr>
-          <a:xfrm>
-            <a:off x="10224298" y="5815584"/>
-            <a:ext cx="365760" cy="182880"/>
-          </a:xfrm>
-          <a:prstGeom prst="rect">
-            <a:avLst/>
-          </a:prstGeom>
-          <a:noFill/>
-          <a:ln/>
-        </p:spPr>
-        <p:txBody>
-          <a:bodyPr wrap="square" lIns="0" tIns="0" rIns="0" bIns="0" rtlCol="0" anchor="ctr"/>
-          <a:lstStyle/>
-          <a:p>
-            <a:pPr indent="0" marL="0">
-              <a:buNone/>
-            </a:pPr>
-            <a:r>
-              <a:rPr lang="en-US" sz="1000" dirty="0">
-                <a:solidFill>
-                  <a:srgbClr val="B9C4C1"/>
-                </a:solidFill>
-              </a:rPr>
-              <a:t>06</a:t>
-            </a:r>
-            <a:endParaRPr lang="en-US" sz="1000" dirty="0"/>
-          </a:p>
-        </p:txBody>
-      </p:sp>
-      <p:sp>
-        <p:nvSpPr>
-          <p:cNvPr id="173" name="Text 171"/>
+          <p:cNvPr id="157" name="Text 155"/>
           <p:cNvSpPr txBox="1"/>
           <p:nvPr/>
         </p:nvSpPr>
